--- a/backend/core/templates/core/audit_report_template_en.pptx
+++ b/backend/core/templates/core/audit_report_template_en.pptx
@@ -5,15 +5,18 @@
     <p:sldMasterId id="2147483648" r:id="rId1"/>
   </p:sldMasterIdLst>
   <p:sldIdLst>
-    <p:sldId id="256" r:id="rId2"/>
+    <p:sldId id="256" r:id="rId7"/>
+    <p:sldId id="257" r:id="rId8"/>
+    <p:sldId id="258" r:id="rId9"/>
+    <p:sldId id="259" r:id="rId10"/>
   </p:sldIdLst>
-  <p:sldSz cx="12192000" cy="6858000"/>
+  <p:sldSz cx="12192120" cy="6858000" type="screen4x3"/>
   <p:notesSz cx="6858000" cy="9144000"/>
   <p:defaultTextStyle>
     <a:defPPr>
-      <a:defRPr lang="en-FR"/>
+      <a:defRPr lang="en-US"/>
     </a:defPPr>
-    <a:lvl1pPr marL="0" algn="l" defTabSz="914400" rtl="0" eaLnBrk="1" latinLnBrk="0" hangingPunct="1">
+    <a:lvl1pPr marL="0" algn="l" defTabSz="457200" rtl="0" eaLnBrk="1" latinLnBrk="0" hangingPunct="1">
       <a:defRPr sz="1800" kern="1200">
         <a:solidFill>
           <a:schemeClr val="tx1"/>
@@ -23,7 +26,7 @@
         <a:cs typeface="+mn-cs"/>
       </a:defRPr>
     </a:lvl1pPr>
-    <a:lvl2pPr marL="457200" algn="l" defTabSz="914400" rtl="0" eaLnBrk="1" latinLnBrk="0" hangingPunct="1">
+    <a:lvl2pPr marL="457200" algn="l" defTabSz="457200" rtl="0" eaLnBrk="1" latinLnBrk="0" hangingPunct="1">
       <a:defRPr sz="1800" kern="1200">
         <a:solidFill>
           <a:schemeClr val="tx1"/>
@@ -33,7 +36,7 @@
         <a:cs typeface="+mn-cs"/>
       </a:defRPr>
     </a:lvl2pPr>
-    <a:lvl3pPr marL="914400" algn="l" defTabSz="914400" rtl="0" eaLnBrk="1" latinLnBrk="0" hangingPunct="1">
+    <a:lvl3pPr marL="914400" algn="l" defTabSz="457200" rtl="0" eaLnBrk="1" latinLnBrk="0" hangingPunct="1">
       <a:defRPr sz="1800" kern="1200">
         <a:solidFill>
           <a:schemeClr val="tx1"/>
@@ -43,7 +46,7 @@
         <a:cs typeface="+mn-cs"/>
       </a:defRPr>
     </a:lvl3pPr>
-    <a:lvl4pPr marL="1371600" algn="l" defTabSz="914400" rtl="0" eaLnBrk="1" latinLnBrk="0" hangingPunct="1">
+    <a:lvl4pPr marL="1371600" algn="l" defTabSz="457200" rtl="0" eaLnBrk="1" latinLnBrk="0" hangingPunct="1">
       <a:defRPr sz="1800" kern="1200">
         <a:solidFill>
           <a:schemeClr val="tx1"/>
@@ -53,7 +56,7 @@
         <a:cs typeface="+mn-cs"/>
       </a:defRPr>
     </a:lvl4pPr>
-    <a:lvl5pPr marL="1828800" algn="l" defTabSz="914400" rtl="0" eaLnBrk="1" latinLnBrk="0" hangingPunct="1">
+    <a:lvl5pPr marL="1828800" algn="l" defTabSz="457200" rtl="0" eaLnBrk="1" latinLnBrk="0" hangingPunct="1">
       <a:defRPr sz="1800" kern="1200">
         <a:solidFill>
           <a:schemeClr val="tx1"/>
@@ -63,7 +66,7 @@
         <a:cs typeface="+mn-cs"/>
       </a:defRPr>
     </a:lvl5pPr>
-    <a:lvl6pPr marL="2286000" algn="l" defTabSz="914400" rtl="0" eaLnBrk="1" latinLnBrk="0" hangingPunct="1">
+    <a:lvl6pPr marL="2286000" algn="l" defTabSz="457200" rtl="0" eaLnBrk="1" latinLnBrk="0" hangingPunct="1">
       <a:defRPr sz="1800" kern="1200">
         <a:solidFill>
           <a:schemeClr val="tx1"/>
@@ -73,7 +76,7 @@
         <a:cs typeface="+mn-cs"/>
       </a:defRPr>
     </a:lvl6pPr>
-    <a:lvl7pPr marL="2743200" algn="l" defTabSz="914400" rtl="0" eaLnBrk="1" latinLnBrk="0" hangingPunct="1">
+    <a:lvl7pPr marL="2743200" algn="l" defTabSz="457200" rtl="0" eaLnBrk="1" latinLnBrk="0" hangingPunct="1">
       <a:defRPr sz="1800" kern="1200">
         <a:solidFill>
           <a:schemeClr val="tx1"/>
@@ -83,7 +86,7 @@
         <a:cs typeface="+mn-cs"/>
       </a:defRPr>
     </a:lvl7pPr>
-    <a:lvl8pPr marL="3200400" algn="l" defTabSz="914400" rtl="0" eaLnBrk="1" latinLnBrk="0" hangingPunct="1">
+    <a:lvl8pPr marL="3200400" algn="l" defTabSz="457200" rtl="0" eaLnBrk="1" latinLnBrk="0" hangingPunct="1">
       <a:defRPr sz="1800" kern="1200">
         <a:solidFill>
           <a:schemeClr val="tx1"/>
@@ -93,7 +96,7 @@
         <a:cs typeface="+mn-cs"/>
       </a:defRPr>
     </a:lvl8pPr>
-    <a:lvl9pPr marL="3657600" algn="l" defTabSz="914400" rtl="0" eaLnBrk="1" latinLnBrk="0" hangingPunct="1">
+    <a:lvl9pPr marL="3657600" algn="l" defTabSz="457200" rtl="0" eaLnBrk="1" latinLnBrk="0" hangingPunct="1">
       <a:defRPr sz="1800" kern="1200">
         <a:solidFill>
           <a:schemeClr val="tx1"/>
@@ -126,13 +129,7 @@
       </p:grpSpPr>
       <p:sp>
         <p:nvSpPr>
-          <p:cNvPr id="2" name="Title 1">
-            <a:extLst>
-              <a:ext uri="{FF2B5EF4-FFF2-40B4-BE49-F238E27FC236}">
-                <a16:creationId xmlns:a16="http://schemas.microsoft.com/office/drawing/2014/main" id="{24384392-9B7C-671D-7219-CA9524963831}"/>
-              </a:ext>
-            </a:extLst>
-          </p:cNvPr>
+          <p:cNvPr id="2" name="Title 1"/>
           <p:cNvSpPr>
             <a:spLocks noGrp="1"/>
           </p:cNvSpPr>
@@ -142,35 +139,25 @@
         </p:nvSpPr>
         <p:spPr>
           <a:xfrm>
-            <a:off x="1524000" y="1122363"/>
-            <a:ext cx="9144000" cy="2387600"/>
+            <a:off x="685800" y="2130425"/>
+            <a:ext cx="7772400" cy="1470025"/>
           </a:xfrm>
         </p:spPr>
         <p:txBody>
-          <a:bodyPr anchor="b"/>
-          <a:lstStyle>
-            <a:lvl1pPr algn="ctr">
-              <a:defRPr sz="6000"/>
-            </a:lvl1pPr>
-          </a:lstStyle>
-          <a:p>
-            <a:r>
-              <a:rPr lang="en-GB"/>
+          <a:bodyPr/>
+          <a:lstStyle/>
+          <a:p>
+            <a:r>
+              <a:rPr lang="en-US" smtClean="0"/>
               <a:t>Click to edit Master title style</a:t>
             </a:r>
-            <a:endParaRPr lang="en-FR"/>
-          </a:p>
-        </p:txBody>
-      </p:sp>
-      <p:sp>
-        <p:nvSpPr>
-          <p:cNvPr id="3" name="Subtitle 2">
-            <a:extLst>
-              <a:ext uri="{FF2B5EF4-FFF2-40B4-BE49-F238E27FC236}">
-                <a16:creationId xmlns:a16="http://schemas.microsoft.com/office/drawing/2014/main" id="{76A9B37A-73F7-C668-2998-C4B37DA4F702}"/>
-              </a:ext>
-            </a:extLst>
-          </p:cNvPr>
+            <a:endParaRPr lang="en-US"/>
+          </a:p>
+        </p:txBody>
+      </p:sp>
+      <p:sp>
+        <p:nvSpPr>
+          <p:cNvPr id="3" name="Subtitle 2"/>
           <p:cNvSpPr>
             <a:spLocks noGrp="1"/>
           </p:cNvSpPr>
@@ -180,8 +167,8 @@
         </p:nvSpPr>
         <p:spPr>
           <a:xfrm>
-            <a:off x="1524000" y="3602038"/>
-            <a:ext cx="9144000" cy="1655762"/>
+            <a:off x="1371600" y="3886200"/>
+            <a:ext cx="6400800" cy="1752600"/>
           </a:xfrm>
         </p:spPr>
         <p:txBody>
@@ -189,59 +176,107 @@
           <a:lstStyle>
             <a:lvl1pPr marL="0" indent="0" algn="ctr">
               <a:buNone/>
-              <a:defRPr sz="2400"/>
+              <a:defRPr>
+                <a:solidFill>
+                  <a:schemeClr val="tx1">
+                    <a:tint val="75000"/>
+                  </a:schemeClr>
+                </a:solidFill>
+              </a:defRPr>
             </a:lvl1pPr>
             <a:lvl2pPr marL="457200" indent="0" algn="ctr">
               <a:buNone/>
-              <a:defRPr sz="2000"/>
+              <a:defRPr>
+                <a:solidFill>
+                  <a:schemeClr val="tx1">
+                    <a:tint val="75000"/>
+                  </a:schemeClr>
+                </a:solidFill>
+              </a:defRPr>
             </a:lvl2pPr>
             <a:lvl3pPr marL="914400" indent="0" algn="ctr">
               <a:buNone/>
-              <a:defRPr sz="1800"/>
+              <a:defRPr>
+                <a:solidFill>
+                  <a:schemeClr val="tx1">
+                    <a:tint val="75000"/>
+                  </a:schemeClr>
+                </a:solidFill>
+              </a:defRPr>
             </a:lvl3pPr>
             <a:lvl4pPr marL="1371600" indent="0" algn="ctr">
               <a:buNone/>
-              <a:defRPr sz="1600"/>
+              <a:defRPr>
+                <a:solidFill>
+                  <a:schemeClr val="tx1">
+                    <a:tint val="75000"/>
+                  </a:schemeClr>
+                </a:solidFill>
+              </a:defRPr>
             </a:lvl4pPr>
             <a:lvl5pPr marL="1828800" indent="0" algn="ctr">
               <a:buNone/>
-              <a:defRPr sz="1600"/>
+              <a:defRPr>
+                <a:solidFill>
+                  <a:schemeClr val="tx1">
+                    <a:tint val="75000"/>
+                  </a:schemeClr>
+                </a:solidFill>
+              </a:defRPr>
             </a:lvl5pPr>
             <a:lvl6pPr marL="2286000" indent="0" algn="ctr">
               <a:buNone/>
-              <a:defRPr sz="1600"/>
+              <a:defRPr>
+                <a:solidFill>
+                  <a:schemeClr val="tx1">
+                    <a:tint val="75000"/>
+                  </a:schemeClr>
+                </a:solidFill>
+              </a:defRPr>
             </a:lvl6pPr>
             <a:lvl7pPr marL="2743200" indent="0" algn="ctr">
               <a:buNone/>
-              <a:defRPr sz="1600"/>
+              <a:defRPr>
+                <a:solidFill>
+                  <a:schemeClr val="tx1">
+                    <a:tint val="75000"/>
+                  </a:schemeClr>
+                </a:solidFill>
+              </a:defRPr>
             </a:lvl7pPr>
             <a:lvl8pPr marL="3200400" indent="0" algn="ctr">
               <a:buNone/>
-              <a:defRPr sz="1600"/>
+              <a:defRPr>
+                <a:solidFill>
+                  <a:schemeClr val="tx1">
+                    <a:tint val="75000"/>
+                  </a:schemeClr>
+                </a:solidFill>
+              </a:defRPr>
             </a:lvl8pPr>
             <a:lvl9pPr marL="3657600" indent="0" algn="ctr">
               <a:buNone/>
-              <a:defRPr sz="1600"/>
+              <a:defRPr>
+                <a:solidFill>
+                  <a:schemeClr val="tx1">
+                    <a:tint val="75000"/>
+                  </a:schemeClr>
+                </a:solidFill>
+              </a:defRPr>
             </a:lvl9pPr>
           </a:lstStyle>
           <a:p>
             <a:r>
-              <a:rPr lang="en-GB"/>
+              <a:rPr lang="en-US" smtClean="0"/>
               <a:t>Click to edit Master subtitle style</a:t>
             </a:r>
-            <a:endParaRPr lang="en-FR"/>
-          </a:p>
-        </p:txBody>
-      </p:sp>
-      <p:sp>
-        <p:nvSpPr>
-          <p:cNvPr id="4" name="Date Placeholder 3">
-            <a:extLst>
-              <a:ext uri="{FF2B5EF4-FFF2-40B4-BE49-F238E27FC236}">
-                <a16:creationId xmlns:a16="http://schemas.microsoft.com/office/drawing/2014/main" id="{2EC09818-9E55-10B6-119C-2D81906EF59C}"/>
-              </a:ext>
-            </a:extLst>
-          </p:cNvPr>
+            <a:endParaRPr lang="en-US"/>
+          </a:p>
+        </p:txBody>
+      </p:sp>
+      <p:sp>
+        <p:nvSpPr>
+          <p:cNvPr id="4" name="Date Placeholder 3"/>
           <p:cNvSpPr>
             <a:spLocks noGrp="1"/>
           </p:cNvSpPr>
@@ -254,23 +289,17 @@
           <a:bodyPr/>
           <a:lstStyle/>
           <a:p>
-            <a:fld id="{7CD783A5-BC47-ED4D-84DA-4F8B01B4E4C0}" type="datetimeFigureOut">
-              <a:rPr lang="en-FR" smtClean="0"/>
-              <a:t>23/10/2025</a:t>
+            <a:fld id="{5BCAD085-E8A6-8845-BD4E-CB4CCA059FC4}" type="datetimeFigureOut">
+              <a:rPr lang="en-US" smtClean="0"/>
+              <a:t>1/27/13</a:t>
             </a:fld>
-            <a:endParaRPr lang="en-FR"/>
-          </a:p>
-        </p:txBody>
-      </p:sp>
-      <p:sp>
-        <p:nvSpPr>
-          <p:cNvPr id="5" name="Footer Placeholder 4">
-            <a:extLst>
-              <a:ext uri="{FF2B5EF4-FFF2-40B4-BE49-F238E27FC236}">
-                <a16:creationId xmlns:a16="http://schemas.microsoft.com/office/drawing/2014/main" id="{60951582-3011-0130-2495-0BA5B2BDCB01}"/>
-              </a:ext>
-            </a:extLst>
-          </p:cNvPr>
+            <a:endParaRPr lang="en-US"/>
+          </a:p>
+        </p:txBody>
+      </p:sp>
+      <p:sp>
+        <p:nvSpPr>
+          <p:cNvPr id="5" name="Footer Placeholder 4"/>
           <p:cNvSpPr>
             <a:spLocks noGrp="1"/>
           </p:cNvSpPr>
@@ -283,19 +312,13 @@
           <a:bodyPr/>
           <a:lstStyle/>
           <a:p>
-            <a:endParaRPr lang="en-FR"/>
-          </a:p>
-        </p:txBody>
-      </p:sp>
-      <p:sp>
-        <p:nvSpPr>
-          <p:cNvPr id="6" name="Slide Number Placeholder 5">
-            <a:extLst>
-              <a:ext uri="{FF2B5EF4-FFF2-40B4-BE49-F238E27FC236}">
-                <a16:creationId xmlns:a16="http://schemas.microsoft.com/office/drawing/2014/main" id="{29BE3FAF-D694-4E90-8CA4-17A38BF85814}"/>
-              </a:ext>
-            </a:extLst>
-          </p:cNvPr>
+            <a:endParaRPr lang="en-US"/>
+          </a:p>
+        </p:txBody>
+      </p:sp>
+      <p:sp>
+        <p:nvSpPr>
+          <p:cNvPr id="6" name="Slide Number Placeholder 5"/>
           <p:cNvSpPr>
             <a:spLocks noGrp="1"/>
           </p:cNvSpPr>
@@ -308,18 +331,18 @@
           <a:bodyPr/>
           <a:lstStyle/>
           <a:p>
-            <a:fld id="{7A684E51-FA75-6045-9327-F52E4E2EADA7}" type="slidenum">
-              <a:rPr lang="en-FR" smtClean="0"/>
+            <a:fld id="{C1FF6DA9-008F-8B48-92A6-B652298478BF}" type="slidenum">
+              <a:rPr lang="en-US" smtClean="0"/>
               <a:t>‹#›</a:t>
             </a:fld>
-            <a:endParaRPr lang="en-FR"/>
+            <a:endParaRPr lang="en-US"/>
           </a:p>
         </p:txBody>
       </p:sp>
     </p:spTree>
     <p:extLst>
       <p:ext uri="{BB962C8B-B14F-4D97-AF65-F5344CB8AC3E}">
-        <p14:creationId xmlns:p14="http://schemas.microsoft.com/office/powerpoint/2010/main" val="3733238234"/>
+        <p14:creationId xmlns:p14="http://schemas.microsoft.com/office/powerpoint/2010/main" val="3168075583"/>
       </p:ext>
     </p:extLst>
   </p:cSld>
@@ -348,13 +371,7 @@
       </p:grpSpPr>
       <p:sp>
         <p:nvSpPr>
-          <p:cNvPr id="2" name="Title 1">
-            <a:extLst>
-              <a:ext uri="{FF2B5EF4-FFF2-40B4-BE49-F238E27FC236}">
-                <a16:creationId xmlns:a16="http://schemas.microsoft.com/office/drawing/2014/main" id="{671E24C8-F68E-D038-2FA5-191B8017C263}"/>
-              </a:ext>
-            </a:extLst>
-          </p:cNvPr>
+          <p:cNvPr id="2" name="Title 1"/>
           <p:cNvSpPr>
             <a:spLocks noGrp="1"/>
           </p:cNvSpPr>
@@ -368,22 +385,16 @@
           <a:lstStyle/>
           <a:p>
             <a:r>
-              <a:rPr lang="en-GB"/>
+              <a:rPr lang="en-US" smtClean="0"/>
               <a:t>Click to edit Master title style</a:t>
             </a:r>
-            <a:endParaRPr lang="en-FR"/>
-          </a:p>
-        </p:txBody>
-      </p:sp>
-      <p:sp>
-        <p:nvSpPr>
-          <p:cNvPr id="3" name="Vertical Text Placeholder 2">
-            <a:extLst>
-              <a:ext uri="{FF2B5EF4-FFF2-40B4-BE49-F238E27FC236}">
-                <a16:creationId xmlns:a16="http://schemas.microsoft.com/office/drawing/2014/main" id="{C08E1BAB-3E23-D5B3-6DAE-401BFCDACA1D}"/>
-              </a:ext>
-            </a:extLst>
-          </p:cNvPr>
+            <a:endParaRPr lang="en-US"/>
+          </a:p>
+        </p:txBody>
+      </p:sp>
+      <p:sp>
+        <p:nvSpPr>
+          <p:cNvPr id="3" name="Vertical Text Placeholder 2"/>
           <p:cNvSpPr>
             <a:spLocks noGrp="1"/>
           </p:cNvSpPr>
@@ -398,50 +409,44 @@
           <a:p>
             <a:pPr lvl="0"/>
             <a:r>
-              <a:rPr lang="en-GB"/>
+              <a:rPr lang="en-US" smtClean="0"/>
               <a:t>Click to edit Master text styles</a:t>
             </a:r>
           </a:p>
           <a:p>
             <a:pPr lvl="1"/>
             <a:r>
-              <a:rPr lang="en-GB"/>
+              <a:rPr lang="en-US" smtClean="0"/>
               <a:t>Second level</a:t>
             </a:r>
           </a:p>
           <a:p>
             <a:pPr lvl="2"/>
             <a:r>
-              <a:rPr lang="en-GB"/>
+              <a:rPr lang="en-US" smtClean="0"/>
               <a:t>Third level</a:t>
             </a:r>
           </a:p>
           <a:p>
             <a:pPr lvl="3"/>
             <a:r>
-              <a:rPr lang="en-GB"/>
+              <a:rPr lang="en-US" smtClean="0"/>
               <a:t>Fourth level</a:t>
             </a:r>
           </a:p>
           <a:p>
             <a:pPr lvl="4"/>
             <a:r>
-              <a:rPr lang="en-GB"/>
+              <a:rPr lang="en-US" smtClean="0"/>
               <a:t>Fifth level</a:t>
             </a:r>
-            <a:endParaRPr lang="en-FR"/>
-          </a:p>
-        </p:txBody>
-      </p:sp>
-      <p:sp>
-        <p:nvSpPr>
-          <p:cNvPr id="4" name="Date Placeholder 3">
-            <a:extLst>
-              <a:ext uri="{FF2B5EF4-FFF2-40B4-BE49-F238E27FC236}">
-                <a16:creationId xmlns:a16="http://schemas.microsoft.com/office/drawing/2014/main" id="{476BC87E-6D99-EFC4-0978-40E6FB71C6BA}"/>
-              </a:ext>
-            </a:extLst>
-          </p:cNvPr>
+            <a:endParaRPr lang="en-US"/>
+          </a:p>
+        </p:txBody>
+      </p:sp>
+      <p:sp>
+        <p:nvSpPr>
+          <p:cNvPr id="4" name="Date Placeholder 3"/>
           <p:cNvSpPr>
             <a:spLocks noGrp="1"/>
           </p:cNvSpPr>
@@ -454,23 +459,17 @@
           <a:bodyPr/>
           <a:lstStyle/>
           <a:p>
-            <a:fld id="{7CD783A5-BC47-ED4D-84DA-4F8B01B4E4C0}" type="datetimeFigureOut">
-              <a:rPr lang="en-FR" smtClean="0"/>
-              <a:t>23/10/2025</a:t>
+            <a:fld id="{5BCAD085-E8A6-8845-BD4E-CB4CCA059FC4}" type="datetimeFigureOut">
+              <a:rPr lang="en-US" smtClean="0"/>
+              <a:t>1/27/13</a:t>
             </a:fld>
-            <a:endParaRPr lang="en-FR"/>
-          </a:p>
-        </p:txBody>
-      </p:sp>
-      <p:sp>
-        <p:nvSpPr>
-          <p:cNvPr id="5" name="Footer Placeholder 4">
-            <a:extLst>
-              <a:ext uri="{FF2B5EF4-FFF2-40B4-BE49-F238E27FC236}">
-                <a16:creationId xmlns:a16="http://schemas.microsoft.com/office/drawing/2014/main" id="{3AC0DF9D-9EFD-7690-4203-5436C738AA87}"/>
-              </a:ext>
-            </a:extLst>
-          </p:cNvPr>
+            <a:endParaRPr lang="en-US"/>
+          </a:p>
+        </p:txBody>
+      </p:sp>
+      <p:sp>
+        <p:nvSpPr>
+          <p:cNvPr id="5" name="Footer Placeholder 4"/>
           <p:cNvSpPr>
             <a:spLocks noGrp="1"/>
           </p:cNvSpPr>
@@ -483,19 +482,13 @@
           <a:bodyPr/>
           <a:lstStyle/>
           <a:p>
-            <a:endParaRPr lang="en-FR"/>
-          </a:p>
-        </p:txBody>
-      </p:sp>
-      <p:sp>
-        <p:nvSpPr>
-          <p:cNvPr id="6" name="Slide Number Placeholder 5">
-            <a:extLst>
-              <a:ext uri="{FF2B5EF4-FFF2-40B4-BE49-F238E27FC236}">
-                <a16:creationId xmlns:a16="http://schemas.microsoft.com/office/drawing/2014/main" id="{4538A08F-A0CD-B57E-BDFA-D947E4E668A8}"/>
-              </a:ext>
-            </a:extLst>
-          </p:cNvPr>
+            <a:endParaRPr lang="en-US"/>
+          </a:p>
+        </p:txBody>
+      </p:sp>
+      <p:sp>
+        <p:nvSpPr>
+          <p:cNvPr id="6" name="Slide Number Placeholder 5"/>
           <p:cNvSpPr>
             <a:spLocks noGrp="1"/>
           </p:cNvSpPr>
@@ -508,18 +501,18 @@
           <a:bodyPr/>
           <a:lstStyle/>
           <a:p>
-            <a:fld id="{7A684E51-FA75-6045-9327-F52E4E2EADA7}" type="slidenum">
-              <a:rPr lang="en-FR" smtClean="0"/>
+            <a:fld id="{C1FF6DA9-008F-8B48-92A6-B652298478BF}" type="slidenum">
+              <a:rPr lang="en-US" smtClean="0"/>
               <a:t>‹#›</a:t>
             </a:fld>
-            <a:endParaRPr lang="en-FR"/>
+            <a:endParaRPr lang="en-US"/>
           </a:p>
         </p:txBody>
       </p:sp>
     </p:spTree>
     <p:extLst>
       <p:ext uri="{BB962C8B-B14F-4D97-AF65-F5344CB8AC3E}">
-        <p14:creationId xmlns:p14="http://schemas.microsoft.com/office/powerpoint/2010/main" val="2257666199"/>
+        <p14:creationId xmlns:p14="http://schemas.microsoft.com/office/powerpoint/2010/main" val="2910927964"/>
       </p:ext>
     </p:extLst>
   </p:cSld>
@@ -548,13 +541,7 @@
       </p:grpSpPr>
       <p:sp>
         <p:nvSpPr>
-          <p:cNvPr id="2" name="Vertical Title 1">
-            <a:extLst>
-              <a:ext uri="{FF2B5EF4-FFF2-40B4-BE49-F238E27FC236}">
-                <a16:creationId xmlns:a16="http://schemas.microsoft.com/office/drawing/2014/main" id="{8A93492F-7DD6-14BD-A055-B70DD9E6EB46}"/>
-              </a:ext>
-            </a:extLst>
-          </p:cNvPr>
+          <p:cNvPr id="2" name="Vertical Title 1"/>
           <p:cNvSpPr>
             <a:spLocks noGrp="1"/>
           </p:cNvSpPr>
@@ -564,8 +551,8 @@
         </p:nvSpPr>
         <p:spPr>
           <a:xfrm>
-            <a:off x="8724900" y="365125"/>
-            <a:ext cx="2628900" cy="5811838"/>
+            <a:off x="6629400" y="274638"/>
+            <a:ext cx="2057400" cy="5851525"/>
           </a:xfrm>
         </p:spPr>
         <p:txBody>
@@ -573,22 +560,16 @@
           <a:lstStyle/>
           <a:p>
             <a:r>
-              <a:rPr lang="en-GB"/>
+              <a:rPr lang="en-US" smtClean="0"/>
               <a:t>Click to edit Master title style</a:t>
             </a:r>
-            <a:endParaRPr lang="en-FR"/>
-          </a:p>
-        </p:txBody>
-      </p:sp>
-      <p:sp>
-        <p:nvSpPr>
-          <p:cNvPr id="3" name="Vertical Text Placeholder 2">
-            <a:extLst>
-              <a:ext uri="{FF2B5EF4-FFF2-40B4-BE49-F238E27FC236}">
-                <a16:creationId xmlns:a16="http://schemas.microsoft.com/office/drawing/2014/main" id="{6973E8C0-A315-7CB6-E56E-DD1C9F374074}"/>
-              </a:ext>
-            </a:extLst>
-          </p:cNvPr>
+            <a:endParaRPr lang="en-US"/>
+          </a:p>
+        </p:txBody>
+      </p:sp>
+      <p:sp>
+        <p:nvSpPr>
+          <p:cNvPr id="3" name="Vertical Text Placeholder 2"/>
           <p:cNvSpPr>
             <a:spLocks noGrp="1"/>
           </p:cNvSpPr>
@@ -598,8 +579,8 @@
         </p:nvSpPr>
         <p:spPr>
           <a:xfrm>
-            <a:off x="838200" y="365125"/>
-            <a:ext cx="7734300" cy="5811838"/>
+            <a:off x="457200" y="274638"/>
+            <a:ext cx="6019800" cy="5851525"/>
           </a:xfrm>
         </p:spPr>
         <p:txBody>
@@ -608,50 +589,44 @@
           <a:p>
             <a:pPr lvl="0"/>
             <a:r>
-              <a:rPr lang="en-GB"/>
+              <a:rPr lang="en-US" smtClean="0"/>
               <a:t>Click to edit Master text styles</a:t>
             </a:r>
           </a:p>
           <a:p>
             <a:pPr lvl="1"/>
             <a:r>
-              <a:rPr lang="en-GB"/>
+              <a:rPr lang="en-US" smtClean="0"/>
               <a:t>Second level</a:t>
             </a:r>
           </a:p>
           <a:p>
             <a:pPr lvl="2"/>
             <a:r>
-              <a:rPr lang="en-GB"/>
+              <a:rPr lang="en-US" smtClean="0"/>
               <a:t>Third level</a:t>
             </a:r>
           </a:p>
           <a:p>
             <a:pPr lvl="3"/>
             <a:r>
-              <a:rPr lang="en-GB"/>
+              <a:rPr lang="en-US" smtClean="0"/>
               <a:t>Fourth level</a:t>
             </a:r>
           </a:p>
           <a:p>
             <a:pPr lvl="4"/>
             <a:r>
-              <a:rPr lang="en-GB"/>
+              <a:rPr lang="en-US" smtClean="0"/>
               <a:t>Fifth level</a:t>
             </a:r>
-            <a:endParaRPr lang="en-FR"/>
-          </a:p>
-        </p:txBody>
-      </p:sp>
-      <p:sp>
-        <p:nvSpPr>
-          <p:cNvPr id="4" name="Date Placeholder 3">
-            <a:extLst>
-              <a:ext uri="{FF2B5EF4-FFF2-40B4-BE49-F238E27FC236}">
-                <a16:creationId xmlns:a16="http://schemas.microsoft.com/office/drawing/2014/main" id="{301B12B0-C5E7-DF7E-4243-BA015B9DACE0}"/>
-              </a:ext>
-            </a:extLst>
-          </p:cNvPr>
+            <a:endParaRPr lang="en-US"/>
+          </a:p>
+        </p:txBody>
+      </p:sp>
+      <p:sp>
+        <p:nvSpPr>
+          <p:cNvPr id="4" name="Date Placeholder 3"/>
           <p:cNvSpPr>
             <a:spLocks noGrp="1"/>
           </p:cNvSpPr>
@@ -664,23 +639,17 @@
           <a:bodyPr/>
           <a:lstStyle/>
           <a:p>
-            <a:fld id="{7CD783A5-BC47-ED4D-84DA-4F8B01B4E4C0}" type="datetimeFigureOut">
-              <a:rPr lang="en-FR" smtClean="0"/>
-              <a:t>23/10/2025</a:t>
+            <a:fld id="{5BCAD085-E8A6-8845-BD4E-CB4CCA059FC4}" type="datetimeFigureOut">
+              <a:rPr lang="en-US" smtClean="0"/>
+              <a:t>1/27/13</a:t>
             </a:fld>
-            <a:endParaRPr lang="en-FR"/>
-          </a:p>
-        </p:txBody>
-      </p:sp>
-      <p:sp>
-        <p:nvSpPr>
-          <p:cNvPr id="5" name="Footer Placeholder 4">
-            <a:extLst>
-              <a:ext uri="{FF2B5EF4-FFF2-40B4-BE49-F238E27FC236}">
-                <a16:creationId xmlns:a16="http://schemas.microsoft.com/office/drawing/2014/main" id="{E0A946B1-A8ED-DD71-A95E-BB71E3358831}"/>
-              </a:ext>
-            </a:extLst>
-          </p:cNvPr>
+            <a:endParaRPr lang="en-US"/>
+          </a:p>
+        </p:txBody>
+      </p:sp>
+      <p:sp>
+        <p:nvSpPr>
+          <p:cNvPr id="5" name="Footer Placeholder 4"/>
           <p:cNvSpPr>
             <a:spLocks noGrp="1"/>
           </p:cNvSpPr>
@@ -693,19 +662,13 @@
           <a:bodyPr/>
           <a:lstStyle/>
           <a:p>
-            <a:endParaRPr lang="en-FR"/>
-          </a:p>
-        </p:txBody>
-      </p:sp>
-      <p:sp>
-        <p:nvSpPr>
-          <p:cNvPr id="6" name="Slide Number Placeholder 5">
-            <a:extLst>
-              <a:ext uri="{FF2B5EF4-FFF2-40B4-BE49-F238E27FC236}">
-                <a16:creationId xmlns:a16="http://schemas.microsoft.com/office/drawing/2014/main" id="{D720FBA1-7D9C-CD34-76E3-476E03F0267E}"/>
-              </a:ext>
-            </a:extLst>
-          </p:cNvPr>
+            <a:endParaRPr lang="en-US"/>
+          </a:p>
+        </p:txBody>
+      </p:sp>
+      <p:sp>
+        <p:nvSpPr>
+          <p:cNvPr id="6" name="Slide Number Placeholder 5"/>
           <p:cNvSpPr>
             <a:spLocks noGrp="1"/>
           </p:cNvSpPr>
@@ -718,18 +681,18 @@
           <a:bodyPr/>
           <a:lstStyle/>
           <a:p>
-            <a:fld id="{7A684E51-FA75-6045-9327-F52E4E2EADA7}" type="slidenum">
-              <a:rPr lang="en-FR" smtClean="0"/>
+            <a:fld id="{C1FF6DA9-008F-8B48-92A6-B652298478BF}" type="slidenum">
+              <a:rPr lang="en-US" smtClean="0"/>
               <a:t>‹#›</a:t>
             </a:fld>
-            <a:endParaRPr lang="en-FR"/>
+            <a:endParaRPr lang="en-US"/>
           </a:p>
         </p:txBody>
       </p:sp>
     </p:spTree>
     <p:extLst>
       <p:ext uri="{BB962C8B-B14F-4D97-AF65-F5344CB8AC3E}">
-        <p14:creationId xmlns:p14="http://schemas.microsoft.com/office/powerpoint/2010/main" val="2056708088"/>
+        <p14:creationId xmlns:p14="http://schemas.microsoft.com/office/powerpoint/2010/main" val="3612223792"/>
       </p:ext>
     </p:extLst>
   </p:cSld>
@@ -758,13 +721,7 @@
       </p:grpSpPr>
       <p:sp>
         <p:nvSpPr>
-          <p:cNvPr id="2" name="Title 1">
-            <a:extLst>
-              <a:ext uri="{FF2B5EF4-FFF2-40B4-BE49-F238E27FC236}">
-                <a16:creationId xmlns:a16="http://schemas.microsoft.com/office/drawing/2014/main" id="{17780DE8-8EF8-E43D-5DE5-99DAAA51A739}"/>
-              </a:ext>
-            </a:extLst>
-          </p:cNvPr>
+          <p:cNvPr id="2" name="Title 1"/>
           <p:cNvSpPr>
             <a:spLocks noGrp="1"/>
           </p:cNvSpPr>
@@ -778,22 +735,16 @@
           <a:lstStyle/>
           <a:p>
             <a:r>
-              <a:rPr lang="en-GB"/>
+              <a:rPr lang="en-US" smtClean="0"/>
               <a:t>Click to edit Master title style</a:t>
             </a:r>
-            <a:endParaRPr lang="en-FR"/>
-          </a:p>
-        </p:txBody>
-      </p:sp>
-      <p:sp>
-        <p:nvSpPr>
-          <p:cNvPr id="3" name="Content Placeholder 2">
-            <a:extLst>
-              <a:ext uri="{FF2B5EF4-FFF2-40B4-BE49-F238E27FC236}">
-                <a16:creationId xmlns:a16="http://schemas.microsoft.com/office/drawing/2014/main" id="{7E041B11-487C-F7ED-4C59-D06A66D3EBB4}"/>
-              </a:ext>
-            </a:extLst>
-          </p:cNvPr>
+            <a:endParaRPr lang="en-US"/>
+          </a:p>
+        </p:txBody>
+      </p:sp>
+      <p:sp>
+        <p:nvSpPr>
+          <p:cNvPr id="3" name="Content Placeholder 2"/>
           <p:cNvSpPr>
             <a:spLocks noGrp="1"/>
           </p:cNvSpPr>
@@ -808,50 +759,44 @@
           <a:p>
             <a:pPr lvl="0"/>
             <a:r>
-              <a:rPr lang="en-GB"/>
+              <a:rPr lang="en-US" smtClean="0"/>
               <a:t>Click to edit Master text styles</a:t>
             </a:r>
           </a:p>
           <a:p>
             <a:pPr lvl="1"/>
             <a:r>
-              <a:rPr lang="en-GB"/>
+              <a:rPr lang="en-US" smtClean="0"/>
               <a:t>Second level</a:t>
             </a:r>
           </a:p>
           <a:p>
             <a:pPr lvl="2"/>
             <a:r>
-              <a:rPr lang="en-GB"/>
+              <a:rPr lang="en-US" smtClean="0"/>
               <a:t>Third level</a:t>
             </a:r>
           </a:p>
           <a:p>
             <a:pPr lvl="3"/>
             <a:r>
-              <a:rPr lang="en-GB"/>
+              <a:rPr lang="en-US" smtClean="0"/>
               <a:t>Fourth level</a:t>
             </a:r>
           </a:p>
           <a:p>
             <a:pPr lvl="4"/>
             <a:r>
-              <a:rPr lang="en-GB"/>
+              <a:rPr lang="en-US" smtClean="0"/>
               <a:t>Fifth level</a:t>
             </a:r>
-            <a:endParaRPr lang="en-FR"/>
-          </a:p>
-        </p:txBody>
-      </p:sp>
-      <p:sp>
-        <p:nvSpPr>
-          <p:cNvPr id="4" name="Date Placeholder 3">
-            <a:extLst>
-              <a:ext uri="{FF2B5EF4-FFF2-40B4-BE49-F238E27FC236}">
-                <a16:creationId xmlns:a16="http://schemas.microsoft.com/office/drawing/2014/main" id="{04006D54-BE0A-0A67-C0FD-65FA7FA2927C}"/>
-              </a:ext>
-            </a:extLst>
-          </p:cNvPr>
+            <a:endParaRPr lang="en-US"/>
+          </a:p>
+        </p:txBody>
+      </p:sp>
+      <p:sp>
+        <p:nvSpPr>
+          <p:cNvPr id="4" name="Date Placeholder 3"/>
           <p:cNvSpPr>
             <a:spLocks noGrp="1"/>
           </p:cNvSpPr>
@@ -864,23 +809,17 @@
           <a:bodyPr/>
           <a:lstStyle/>
           <a:p>
-            <a:fld id="{7CD783A5-BC47-ED4D-84DA-4F8B01B4E4C0}" type="datetimeFigureOut">
-              <a:rPr lang="en-FR" smtClean="0"/>
-              <a:t>23/10/2025</a:t>
+            <a:fld id="{5BCAD085-E8A6-8845-BD4E-CB4CCA059FC4}" type="datetimeFigureOut">
+              <a:rPr lang="en-US" smtClean="0"/>
+              <a:t>1/27/13</a:t>
             </a:fld>
-            <a:endParaRPr lang="en-FR"/>
-          </a:p>
-        </p:txBody>
-      </p:sp>
-      <p:sp>
-        <p:nvSpPr>
-          <p:cNvPr id="5" name="Footer Placeholder 4">
-            <a:extLst>
-              <a:ext uri="{FF2B5EF4-FFF2-40B4-BE49-F238E27FC236}">
-                <a16:creationId xmlns:a16="http://schemas.microsoft.com/office/drawing/2014/main" id="{83496F5D-CBD6-9975-2AB5-0F401FB01C21}"/>
-              </a:ext>
-            </a:extLst>
-          </p:cNvPr>
+            <a:endParaRPr lang="en-US"/>
+          </a:p>
+        </p:txBody>
+      </p:sp>
+      <p:sp>
+        <p:nvSpPr>
+          <p:cNvPr id="5" name="Footer Placeholder 4"/>
           <p:cNvSpPr>
             <a:spLocks noGrp="1"/>
           </p:cNvSpPr>
@@ -893,19 +832,13 @@
           <a:bodyPr/>
           <a:lstStyle/>
           <a:p>
-            <a:endParaRPr lang="en-FR"/>
-          </a:p>
-        </p:txBody>
-      </p:sp>
-      <p:sp>
-        <p:nvSpPr>
-          <p:cNvPr id="6" name="Slide Number Placeholder 5">
-            <a:extLst>
-              <a:ext uri="{FF2B5EF4-FFF2-40B4-BE49-F238E27FC236}">
-                <a16:creationId xmlns:a16="http://schemas.microsoft.com/office/drawing/2014/main" id="{052E3FE3-C044-2850-E35C-911CC4A39B76}"/>
-              </a:ext>
-            </a:extLst>
-          </p:cNvPr>
+            <a:endParaRPr lang="en-US"/>
+          </a:p>
+        </p:txBody>
+      </p:sp>
+      <p:sp>
+        <p:nvSpPr>
+          <p:cNvPr id="6" name="Slide Number Placeholder 5"/>
           <p:cNvSpPr>
             <a:spLocks noGrp="1"/>
           </p:cNvSpPr>
@@ -918,18 +851,18 @@
           <a:bodyPr/>
           <a:lstStyle/>
           <a:p>
-            <a:fld id="{7A684E51-FA75-6045-9327-F52E4E2EADA7}" type="slidenum">
-              <a:rPr lang="en-FR" smtClean="0"/>
+            <a:fld id="{C1FF6DA9-008F-8B48-92A6-B652298478BF}" type="slidenum">
+              <a:rPr lang="en-US" smtClean="0"/>
               <a:t>‹#›</a:t>
             </a:fld>
-            <a:endParaRPr lang="en-FR"/>
+            <a:endParaRPr lang="en-US"/>
           </a:p>
         </p:txBody>
       </p:sp>
     </p:spTree>
     <p:extLst>
       <p:ext uri="{BB962C8B-B14F-4D97-AF65-F5344CB8AC3E}">
-        <p14:creationId xmlns:p14="http://schemas.microsoft.com/office/powerpoint/2010/main" val="2018518425"/>
+        <p14:creationId xmlns:p14="http://schemas.microsoft.com/office/powerpoint/2010/main" val="2614314258"/>
       </p:ext>
     </p:extLst>
   </p:cSld>
@@ -958,13 +891,7 @@
       </p:grpSpPr>
       <p:sp>
         <p:nvSpPr>
-          <p:cNvPr id="2" name="Title 1">
-            <a:extLst>
-              <a:ext uri="{FF2B5EF4-FFF2-40B4-BE49-F238E27FC236}">
-                <a16:creationId xmlns:a16="http://schemas.microsoft.com/office/drawing/2014/main" id="{6BD76AE8-6291-D404-B737-AF98DDC922D3}"/>
-              </a:ext>
-            </a:extLst>
-          </p:cNvPr>
+          <p:cNvPr id="2" name="Title 1"/>
           <p:cNvSpPr>
             <a:spLocks noGrp="1"/>
           </p:cNvSpPr>
@@ -974,35 +901,29 @@
         </p:nvSpPr>
         <p:spPr>
           <a:xfrm>
-            <a:off x="831850" y="1709738"/>
-            <a:ext cx="10515600" cy="2852737"/>
+            <a:off x="722313" y="4406900"/>
+            <a:ext cx="7772400" cy="1362075"/>
           </a:xfrm>
         </p:spPr>
         <p:txBody>
-          <a:bodyPr anchor="b"/>
+          <a:bodyPr anchor="t"/>
           <a:lstStyle>
-            <a:lvl1pPr>
-              <a:defRPr sz="6000"/>
+            <a:lvl1pPr algn="l">
+              <a:defRPr sz="4000" b="1" cap="all"/>
             </a:lvl1pPr>
           </a:lstStyle>
           <a:p>
             <a:r>
-              <a:rPr lang="en-GB"/>
+              <a:rPr lang="en-US" smtClean="0"/>
               <a:t>Click to edit Master title style</a:t>
             </a:r>
-            <a:endParaRPr lang="en-FR"/>
-          </a:p>
-        </p:txBody>
-      </p:sp>
-      <p:sp>
-        <p:nvSpPr>
-          <p:cNvPr id="3" name="Text Placeholder 2">
-            <a:extLst>
-              <a:ext uri="{FF2B5EF4-FFF2-40B4-BE49-F238E27FC236}">
-                <a16:creationId xmlns:a16="http://schemas.microsoft.com/office/drawing/2014/main" id="{B39BC56E-AADC-8EAC-1FD3-072D332B7C99}"/>
-              </a:ext>
-            </a:extLst>
-          </p:cNvPr>
+            <a:endParaRPr lang="en-US"/>
+          </a:p>
+        </p:txBody>
+      </p:sp>
+      <p:sp>
+        <p:nvSpPr>
+          <p:cNvPr id="3" name="Text Placeholder 2"/>
           <p:cNvSpPr>
             <a:spLocks noGrp="1"/>
           </p:cNvSpPr>
@@ -1012,99 +933,99 @@
         </p:nvSpPr>
         <p:spPr>
           <a:xfrm>
-            <a:off x="831850" y="4589463"/>
-            <a:ext cx="10515600" cy="1500187"/>
+            <a:off x="722313" y="2906713"/>
+            <a:ext cx="7772400" cy="1500187"/>
           </a:xfrm>
         </p:spPr>
         <p:txBody>
-          <a:bodyPr/>
+          <a:bodyPr anchor="b"/>
           <a:lstStyle>
             <a:lvl1pPr marL="0" indent="0">
               <a:buNone/>
-              <a:defRPr sz="2400">
+              <a:defRPr sz="2000">
                 <a:solidFill>
                   <a:schemeClr val="tx1">
-                    <a:tint val="82000"/>
+                    <a:tint val="75000"/>
                   </a:schemeClr>
                 </a:solidFill>
               </a:defRPr>
             </a:lvl1pPr>
             <a:lvl2pPr marL="457200" indent="0">
               <a:buNone/>
-              <a:defRPr sz="2000">
+              <a:defRPr sz="1800">
                 <a:solidFill>
                   <a:schemeClr val="tx1">
-                    <a:tint val="82000"/>
+                    <a:tint val="75000"/>
                   </a:schemeClr>
                 </a:solidFill>
               </a:defRPr>
             </a:lvl2pPr>
             <a:lvl3pPr marL="914400" indent="0">
               <a:buNone/>
-              <a:defRPr sz="1800">
+              <a:defRPr sz="1600">
                 <a:solidFill>
                   <a:schemeClr val="tx1">
-                    <a:tint val="82000"/>
+                    <a:tint val="75000"/>
                   </a:schemeClr>
                 </a:solidFill>
               </a:defRPr>
             </a:lvl3pPr>
             <a:lvl4pPr marL="1371600" indent="0">
               <a:buNone/>
-              <a:defRPr sz="1600">
+              <a:defRPr sz="1400">
                 <a:solidFill>
                   <a:schemeClr val="tx1">
-                    <a:tint val="82000"/>
+                    <a:tint val="75000"/>
                   </a:schemeClr>
                 </a:solidFill>
               </a:defRPr>
             </a:lvl4pPr>
             <a:lvl5pPr marL="1828800" indent="0">
               <a:buNone/>
-              <a:defRPr sz="1600">
+              <a:defRPr sz="1400">
                 <a:solidFill>
                   <a:schemeClr val="tx1">
-                    <a:tint val="82000"/>
+                    <a:tint val="75000"/>
                   </a:schemeClr>
                 </a:solidFill>
               </a:defRPr>
             </a:lvl5pPr>
             <a:lvl6pPr marL="2286000" indent="0">
               <a:buNone/>
-              <a:defRPr sz="1600">
+              <a:defRPr sz="1400">
                 <a:solidFill>
                   <a:schemeClr val="tx1">
-                    <a:tint val="82000"/>
+                    <a:tint val="75000"/>
                   </a:schemeClr>
                 </a:solidFill>
               </a:defRPr>
             </a:lvl6pPr>
             <a:lvl7pPr marL="2743200" indent="0">
               <a:buNone/>
-              <a:defRPr sz="1600">
+              <a:defRPr sz="1400">
                 <a:solidFill>
                   <a:schemeClr val="tx1">
-                    <a:tint val="82000"/>
+                    <a:tint val="75000"/>
                   </a:schemeClr>
                 </a:solidFill>
               </a:defRPr>
             </a:lvl7pPr>
             <a:lvl8pPr marL="3200400" indent="0">
               <a:buNone/>
-              <a:defRPr sz="1600">
+              <a:defRPr sz="1400">
                 <a:solidFill>
                   <a:schemeClr val="tx1">
-                    <a:tint val="82000"/>
+                    <a:tint val="75000"/>
                   </a:schemeClr>
                 </a:solidFill>
               </a:defRPr>
             </a:lvl8pPr>
             <a:lvl9pPr marL="3657600" indent="0">
               <a:buNone/>
-              <a:defRPr sz="1600">
+              <a:defRPr sz="1400">
                 <a:solidFill>
                   <a:schemeClr val="tx1">
-                    <a:tint val="82000"/>
+                    <a:tint val="75000"/>
                   </a:schemeClr>
                 </a:solidFill>
               </a:defRPr>
@@ -1113,7 +1034,7 @@
           <a:p>
             <a:pPr lvl="0"/>
             <a:r>
-              <a:rPr lang="en-GB"/>
+              <a:rPr lang="en-US" smtClean="0"/>
               <a:t>Click to edit Master text styles</a:t>
             </a:r>
           </a:p>
@@ -1121,13 +1042,7 @@
       </p:sp>
       <p:sp>
         <p:nvSpPr>
-          <p:cNvPr id="4" name="Date Placeholder 3">
-            <a:extLst>
-              <a:ext uri="{FF2B5EF4-FFF2-40B4-BE49-F238E27FC236}">
-                <a16:creationId xmlns:a16="http://schemas.microsoft.com/office/drawing/2014/main" id="{9A237AC7-11B6-7BB3-9A19-7B914CA3B994}"/>
-              </a:ext>
-            </a:extLst>
-          </p:cNvPr>
+          <p:cNvPr id="4" name="Date Placeholder 3"/>
           <p:cNvSpPr>
             <a:spLocks noGrp="1"/>
           </p:cNvSpPr>
@@ -1140,23 +1055,17 @@
           <a:bodyPr/>
           <a:lstStyle/>
           <a:p>
-            <a:fld id="{7CD783A5-BC47-ED4D-84DA-4F8B01B4E4C0}" type="datetimeFigureOut">
-              <a:rPr lang="en-FR" smtClean="0"/>
-              <a:t>23/10/2025</a:t>
+            <a:fld id="{5BCAD085-E8A6-8845-BD4E-CB4CCA059FC4}" type="datetimeFigureOut">
+              <a:rPr lang="en-US" smtClean="0"/>
+              <a:t>1/27/13</a:t>
             </a:fld>
-            <a:endParaRPr lang="en-FR"/>
-          </a:p>
-        </p:txBody>
-      </p:sp>
-      <p:sp>
-        <p:nvSpPr>
-          <p:cNvPr id="5" name="Footer Placeholder 4">
-            <a:extLst>
-              <a:ext uri="{FF2B5EF4-FFF2-40B4-BE49-F238E27FC236}">
-                <a16:creationId xmlns:a16="http://schemas.microsoft.com/office/drawing/2014/main" id="{99027E77-69CF-CBF4-27A7-F1A17536AC8B}"/>
-              </a:ext>
-            </a:extLst>
-          </p:cNvPr>
+            <a:endParaRPr lang="en-US"/>
+          </a:p>
+        </p:txBody>
+      </p:sp>
+      <p:sp>
+        <p:nvSpPr>
+          <p:cNvPr id="5" name="Footer Placeholder 4"/>
           <p:cNvSpPr>
             <a:spLocks noGrp="1"/>
           </p:cNvSpPr>
@@ -1169,19 +1078,13 @@
           <a:bodyPr/>
           <a:lstStyle/>
           <a:p>
-            <a:endParaRPr lang="en-FR"/>
-          </a:p>
-        </p:txBody>
-      </p:sp>
-      <p:sp>
-        <p:nvSpPr>
-          <p:cNvPr id="6" name="Slide Number Placeholder 5">
-            <a:extLst>
-              <a:ext uri="{FF2B5EF4-FFF2-40B4-BE49-F238E27FC236}">
-                <a16:creationId xmlns:a16="http://schemas.microsoft.com/office/drawing/2014/main" id="{A2D249C0-D6D2-BA56-DE25-84E8C4F05A10}"/>
-              </a:ext>
-            </a:extLst>
-          </p:cNvPr>
+            <a:endParaRPr lang="en-US"/>
+          </a:p>
+        </p:txBody>
+      </p:sp>
+      <p:sp>
+        <p:nvSpPr>
+          <p:cNvPr id="6" name="Slide Number Placeholder 5"/>
           <p:cNvSpPr>
             <a:spLocks noGrp="1"/>
           </p:cNvSpPr>
@@ -1194,18 +1097,18 @@
           <a:bodyPr/>
           <a:lstStyle/>
           <a:p>
-            <a:fld id="{7A684E51-FA75-6045-9327-F52E4E2EADA7}" type="slidenum">
-              <a:rPr lang="en-FR" smtClean="0"/>
+            <a:fld id="{C1FF6DA9-008F-8B48-92A6-B652298478BF}" type="slidenum">
+              <a:rPr lang="en-US" smtClean="0"/>
               <a:t>‹#›</a:t>
             </a:fld>
-            <a:endParaRPr lang="en-FR"/>
+            <a:endParaRPr lang="en-US"/>
           </a:p>
         </p:txBody>
       </p:sp>
     </p:spTree>
     <p:extLst>
       <p:ext uri="{BB962C8B-B14F-4D97-AF65-F5344CB8AC3E}">
-        <p14:creationId xmlns:p14="http://schemas.microsoft.com/office/powerpoint/2010/main" val="1708978799"/>
+        <p14:creationId xmlns:p14="http://schemas.microsoft.com/office/powerpoint/2010/main" val="960648375"/>
       </p:ext>
     </p:extLst>
   </p:cSld>
@@ -1234,13 +1137,7 @@
       </p:grpSpPr>
       <p:sp>
         <p:nvSpPr>
-          <p:cNvPr id="2" name="Title 1">
-            <a:extLst>
-              <a:ext uri="{FF2B5EF4-FFF2-40B4-BE49-F238E27FC236}">
-                <a16:creationId xmlns:a16="http://schemas.microsoft.com/office/drawing/2014/main" id="{914B590C-6E5E-2F12-3F15-9E5D33D27F2B}"/>
-              </a:ext>
-            </a:extLst>
-          </p:cNvPr>
+          <p:cNvPr id="2" name="Title 1"/>
           <p:cNvSpPr>
             <a:spLocks noGrp="1"/>
           </p:cNvSpPr>
@@ -1254,22 +1151,16 @@
           <a:lstStyle/>
           <a:p>
             <a:r>
-              <a:rPr lang="en-GB"/>
+              <a:rPr lang="en-US" smtClean="0"/>
               <a:t>Click to edit Master title style</a:t>
             </a:r>
-            <a:endParaRPr lang="en-FR"/>
-          </a:p>
-        </p:txBody>
-      </p:sp>
-      <p:sp>
-        <p:nvSpPr>
-          <p:cNvPr id="3" name="Content Placeholder 2">
-            <a:extLst>
-              <a:ext uri="{FF2B5EF4-FFF2-40B4-BE49-F238E27FC236}">
-                <a16:creationId xmlns:a16="http://schemas.microsoft.com/office/drawing/2014/main" id="{07EB94A3-39E9-6967-EF32-AEE9A2691B89}"/>
-              </a:ext>
-            </a:extLst>
-          </p:cNvPr>
+            <a:endParaRPr lang="en-US"/>
+          </a:p>
+        </p:txBody>
+      </p:sp>
+      <p:sp>
+        <p:nvSpPr>
+          <p:cNvPr id="3" name="Content Placeholder 2"/>
           <p:cNvSpPr>
             <a:spLocks noGrp="1"/>
           </p:cNvSpPr>
@@ -1279,60 +1170,82 @@
         </p:nvSpPr>
         <p:spPr>
           <a:xfrm>
-            <a:off x="838200" y="1825625"/>
-            <a:ext cx="5181600" cy="4351338"/>
+            <a:off x="457200" y="1600200"/>
+            <a:ext cx="4038600" cy="4525963"/>
           </a:xfrm>
         </p:spPr>
         <p:txBody>
           <a:bodyPr/>
-          <a:lstStyle/>
+          <a:lstStyle>
+            <a:lvl1pPr>
+              <a:defRPr sz="2800"/>
+            </a:lvl1pPr>
+            <a:lvl2pPr>
+              <a:defRPr sz="2400"/>
+            </a:lvl2pPr>
+            <a:lvl3pPr>
+              <a:defRPr sz="2000"/>
+            </a:lvl3pPr>
+            <a:lvl4pPr>
+              <a:defRPr sz="1800"/>
+            </a:lvl4pPr>
+            <a:lvl5pPr>
+              <a:defRPr sz="1800"/>
+            </a:lvl5pPr>
+            <a:lvl6pPr>
+              <a:defRPr sz="1800"/>
+            </a:lvl6pPr>
+            <a:lvl7pPr>
+              <a:defRPr sz="1800"/>
+            </a:lvl7pPr>
+            <a:lvl8pPr>
+              <a:defRPr sz="1800"/>
+            </a:lvl8pPr>
+            <a:lvl9pPr>
+              <a:defRPr sz="1800"/>
+            </a:lvl9pPr>
+          </a:lstStyle>
           <a:p>
             <a:pPr lvl="0"/>
             <a:r>
-              <a:rPr lang="en-GB"/>
+              <a:rPr lang="en-US" smtClean="0"/>
               <a:t>Click to edit Master text styles</a:t>
             </a:r>
           </a:p>
           <a:p>
             <a:pPr lvl="1"/>
             <a:r>
-              <a:rPr lang="en-GB"/>
+              <a:rPr lang="en-US" smtClean="0"/>
               <a:t>Second level</a:t>
             </a:r>
           </a:p>
           <a:p>
             <a:pPr lvl="2"/>
             <a:r>
-              <a:rPr lang="en-GB"/>
+              <a:rPr lang="en-US" smtClean="0"/>
               <a:t>Third level</a:t>
             </a:r>
           </a:p>
           <a:p>
             <a:pPr lvl="3"/>
             <a:r>
-              <a:rPr lang="en-GB"/>
+              <a:rPr lang="en-US" smtClean="0"/>
               <a:t>Fourth level</a:t>
             </a:r>
           </a:p>
           <a:p>
             <a:pPr lvl="4"/>
             <a:r>
-              <a:rPr lang="en-GB"/>
+              <a:rPr lang="en-US" smtClean="0"/>
               <a:t>Fifth level</a:t>
             </a:r>
-            <a:endParaRPr lang="en-FR"/>
-          </a:p>
-        </p:txBody>
-      </p:sp>
-      <p:sp>
-        <p:nvSpPr>
-          <p:cNvPr id="4" name="Content Placeholder 3">
-            <a:extLst>
-              <a:ext uri="{FF2B5EF4-FFF2-40B4-BE49-F238E27FC236}">
-                <a16:creationId xmlns:a16="http://schemas.microsoft.com/office/drawing/2014/main" id="{E461B5F4-76A3-DDB6-1430-7A1EE35B7946}"/>
-              </a:ext>
-            </a:extLst>
-          </p:cNvPr>
+            <a:endParaRPr lang="en-US"/>
+          </a:p>
+        </p:txBody>
+      </p:sp>
+      <p:sp>
+        <p:nvSpPr>
+          <p:cNvPr id="4" name="Content Placeholder 3"/>
           <p:cNvSpPr>
             <a:spLocks noGrp="1"/>
           </p:cNvSpPr>
@@ -1342,60 +1255,82 @@
         </p:nvSpPr>
         <p:spPr>
           <a:xfrm>
-            <a:off x="6172200" y="1825625"/>
-            <a:ext cx="5181600" cy="4351338"/>
+            <a:off x="4648200" y="1600200"/>
+            <a:ext cx="4038600" cy="4525963"/>
           </a:xfrm>
         </p:spPr>
         <p:txBody>
           <a:bodyPr/>
-          <a:lstStyle/>
+          <a:lstStyle>
+            <a:lvl1pPr>
+              <a:defRPr sz="2800"/>
+            </a:lvl1pPr>
+            <a:lvl2pPr>
+              <a:defRPr sz="2400"/>
+            </a:lvl2pPr>
+            <a:lvl3pPr>
+              <a:defRPr sz="2000"/>
+            </a:lvl3pPr>
+            <a:lvl4pPr>
+              <a:defRPr sz="1800"/>
+            </a:lvl4pPr>
+            <a:lvl5pPr>
+              <a:defRPr sz="1800"/>
+            </a:lvl5pPr>
+            <a:lvl6pPr>
+              <a:defRPr sz="1800"/>
+            </a:lvl6pPr>
+            <a:lvl7pPr>
+              <a:defRPr sz="1800"/>
+            </a:lvl7pPr>
+            <a:lvl8pPr>
+              <a:defRPr sz="1800"/>
+            </a:lvl8pPr>
+            <a:lvl9pPr>
+              <a:defRPr sz="1800"/>
+            </a:lvl9pPr>
+          </a:lstStyle>
           <a:p>
             <a:pPr lvl="0"/>
             <a:r>
-              <a:rPr lang="en-GB"/>
+              <a:rPr lang="en-US" smtClean="0"/>
               <a:t>Click to edit Master text styles</a:t>
             </a:r>
           </a:p>
           <a:p>
             <a:pPr lvl="1"/>
             <a:r>
-              <a:rPr lang="en-GB"/>
+              <a:rPr lang="en-US" smtClean="0"/>
               <a:t>Second level</a:t>
             </a:r>
           </a:p>
           <a:p>
             <a:pPr lvl="2"/>
             <a:r>
-              <a:rPr lang="en-GB"/>
+              <a:rPr lang="en-US" smtClean="0"/>
               <a:t>Third level</a:t>
             </a:r>
           </a:p>
           <a:p>
             <a:pPr lvl="3"/>
             <a:r>
-              <a:rPr lang="en-GB"/>
+              <a:rPr lang="en-US" smtClean="0"/>
               <a:t>Fourth level</a:t>
             </a:r>
           </a:p>
           <a:p>
             <a:pPr lvl="4"/>
             <a:r>
-              <a:rPr lang="en-GB"/>
+              <a:rPr lang="en-US" smtClean="0"/>
               <a:t>Fifth level</a:t>
             </a:r>
-            <a:endParaRPr lang="en-FR"/>
-          </a:p>
-        </p:txBody>
-      </p:sp>
-      <p:sp>
-        <p:nvSpPr>
-          <p:cNvPr id="5" name="Date Placeholder 4">
-            <a:extLst>
-              <a:ext uri="{FF2B5EF4-FFF2-40B4-BE49-F238E27FC236}">
-                <a16:creationId xmlns:a16="http://schemas.microsoft.com/office/drawing/2014/main" id="{3161DAA9-6519-BC32-3248-7BCFB979D715}"/>
-              </a:ext>
-            </a:extLst>
-          </p:cNvPr>
+            <a:endParaRPr lang="en-US"/>
+          </a:p>
+        </p:txBody>
+      </p:sp>
+      <p:sp>
+        <p:nvSpPr>
+          <p:cNvPr id="5" name="Date Placeholder 4"/>
           <p:cNvSpPr>
             <a:spLocks noGrp="1"/>
           </p:cNvSpPr>
@@ -1408,23 +1343,17 @@
           <a:bodyPr/>
           <a:lstStyle/>
           <a:p>
-            <a:fld id="{7CD783A5-BC47-ED4D-84DA-4F8B01B4E4C0}" type="datetimeFigureOut">
-              <a:rPr lang="en-FR" smtClean="0"/>
-              <a:t>23/10/2025</a:t>
+            <a:fld id="{5BCAD085-E8A6-8845-BD4E-CB4CCA059FC4}" type="datetimeFigureOut">
+              <a:rPr lang="en-US" smtClean="0"/>
+              <a:t>1/27/13</a:t>
             </a:fld>
-            <a:endParaRPr lang="en-FR"/>
-          </a:p>
-        </p:txBody>
-      </p:sp>
-      <p:sp>
-        <p:nvSpPr>
-          <p:cNvPr id="6" name="Footer Placeholder 5">
-            <a:extLst>
-              <a:ext uri="{FF2B5EF4-FFF2-40B4-BE49-F238E27FC236}">
-                <a16:creationId xmlns:a16="http://schemas.microsoft.com/office/drawing/2014/main" id="{A0304AB1-88A4-F3CF-04E4-6AEFCA2D4973}"/>
-              </a:ext>
-            </a:extLst>
-          </p:cNvPr>
+            <a:endParaRPr lang="en-US"/>
+          </a:p>
+        </p:txBody>
+      </p:sp>
+      <p:sp>
+        <p:nvSpPr>
+          <p:cNvPr id="6" name="Footer Placeholder 5"/>
           <p:cNvSpPr>
             <a:spLocks noGrp="1"/>
           </p:cNvSpPr>
@@ -1437,19 +1366,13 @@
           <a:bodyPr/>
           <a:lstStyle/>
           <a:p>
-            <a:endParaRPr lang="en-FR"/>
-          </a:p>
-        </p:txBody>
-      </p:sp>
-      <p:sp>
-        <p:nvSpPr>
-          <p:cNvPr id="7" name="Slide Number Placeholder 6">
-            <a:extLst>
-              <a:ext uri="{FF2B5EF4-FFF2-40B4-BE49-F238E27FC236}">
-                <a16:creationId xmlns:a16="http://schemas.microsoft.com/office/drawing/2014/main" id="{46D56661-D71D-7201-9090-8D15C2774180}"/>
-              </a:ext>
-            </a:extLst>
-          </p:cNvPr>
+            <a:endParaRPr lang="en-US"/>
+          </a:p>
+        </p:txBody>
+      </p:sp>
+      <p:sp>
+        <p:nvSpPr>
+          <p:cNvPr id="7" name="Slide Number Placeholder 6"/>
           <p:cNvSpPr>
             <a:spLocks noGrp="1"/>
           </p:cNvSpPr>
@@ -1462,18 +1385,18 @@
           <a:bodyPr/>
           <a:lstStyle/>
           <a:p>
-            <a:fld id="{7A684E51-FA75-6045-9327-F52E4E2EADA7}" type="slidenum">
-              <a:rPr lang="en-FR" smtClean="0"/>
+            <a:fld id="{C1FF6DA9-008F-8B48-92A6-B652298478BF}" type="slidenum">
+              <a:rPr lang="en-US" smtClean="0"/>
               <a:t>‹#›</a:t>
             </a:fld>
-            <a:endParaRPr lang="en-FR"/>
+            <a:endParaRPr lang="en-US"/>
           </a:p>
         </p:txBody>
       </p:sp>
     </p:spTree>
     <p:extLst>
       <p:ext uri="{BB962C8B-B14F-4D97-AF65-F5344CB8AC3E}">
-        <p14:creationId xmlns:p14="http://schemas.microsoft.com/office/powerpoint/2010/main" val="1137757203"/>
+        <p14:creationId xmlns:p14="http://schemas.microsoft.com/office/powerpoint/2010/main" val="2782244947"/>
       </p:ext>
     </p:extLst>
   </p:cSld>
@@ -1502,13 +1425,7 @@
       </p:grpSpPr>
       <p:sp>
         <p:nvSpPr>
-          <p:cNvPr id="2" name="Title 1">
-            <a:extLst>
-              <a:ext uri="{FF2B5EF4-FFF2-40B4-BE49-F238E27FC236}">
-                <a16:creationId xmlns:a16="http://schemas.microsoft.com/office/drawing/2014/main" id="{6BD06B6D-F3D2-D609-2D45-EB62CFF819C7}"/>
-              </a:ext>
-            </a:extLst>
-          </p:cNvPr>
+          <p:cNvPr id="2" name="Title 1"/>
           <p:cNvSpPr>
             <a:spLocks noGrp="1"/>
           </p:cNvSpPr>
@@ -1516,33 +1433,26 @@
             <p:ph type="title"/>
           </p:nvPr>
         </p:nvSpPr>
-        <p:spPr>
-          <a:xfrm>
-            <a:off x="839788" y="365125"/>
-            <a:ext cx="10515600" cy="1325563"/>
-          </a:xfrm>
-        </p:spPr>
+        <p:spPr/>
         <p:txBody>
           <a:bodyPr/>
-          <a:lstStyle/>
-          <a:p>
-            <a:r>
-              <a:rPr lang="en-GB"/>
+          <a:lstStyle>
+            <a:lvl1pPr>
+              <a:defRPr/>
+            </a:lvl1pPr>
+          </a:lstStyle>
+          <a:p>
+            <a:r>
+              <a:rPr lang="en-US" smtClean="0"/>
               <a:t>Click to edit Master title style</a:t>
             </a:r>
-            <a:endParaRPr lang="en-FR"/>
-          </a:p>
-        </p:txBody>
-      </p:sp>
-      <p:sp>
-        <p:nvSpPr>
-          <p:cNvPr id="3" name="Text Placeholder 2">
-            <a:extLst>
-              <a:ext uri="{FF2B5EF4-FFF2-40B4-BE49-F238E27FC236}">
-                <a16:creationId xmlns:a16="http://schemas.microsoft.com/office/drawing/2014/main" id="{848C6FB4-E21D-FE68-B4B5-65CC0547184A}"/>
-              </a:ext>
-            </a:extLst>
-          </p:cNvPr>
+            <a:endParaRPr lang="en-US"/>
+          </a:p>
+        </p:txBody>
+      </p:sp>
+      <p:sp>
+        <p:nvSpPr>
+          <p:cNvPr id="3" name="Text Placeholder 2"/>
           <p:cNvSpPr>
             <a:spLocks noGrp="1"/>
           </p:cNvSpPr>
@@ -1552,8 +1462,8 @@
         </p:nvSpPr>
         <p:spPr>
           <a:xfrm>
-            <a:off x="839788" y="1681163"/>
-            <a:ext cx="5157787" cy="823912"/>
+            <a:off x="457200" y="1535113"/>
+            <a:ext cx="4040188" cy="639762"/>
           </a:xfrm>
         </p:spPr>
         <p:txBody>
@@ -1599,7 +1509,7 @@
           <a:p>
             <a:pPr lvl="0"/>
             <a:r>
-              <a:rPr lang="en-GB"/>
+              <a:rPr lang="en-US" smtClean="0"/>
               <a:t>Click to edit Master text styles</a:t>
             </a:r>
           </a:p>
@@ -1607,13 +1517,7 @@
       </p:sp>
       <p:sp>
         <p:nvSpPr>
-          <p:cNvPr id="4" name="Content Placeholder 3">
-            <a:extLst>
-              <a:ext uri="{FF2B5EF4-FFF2-40B4-BE49-F238E27FC236}">
-                <a16:creationId xmlns:a16="http://schemas.microsoft.com/office/drawing/2014/main" id="{583A82BD-F914-035A-4B9C-557DF0E31C2B}"/>
-              </a:ext>
-            </a:extLst>
-          </p:cNvPr>
+          <p:cNvPr id="4" name="Content Placeholder 3"/>
           <p:cNvSpPr>
             <a:spLocks noGrp="1"/>
           </p:cNvSpPr>
@@ -1623,60 +1527,82 @@
         </p:nvSpPr>
         <p:spPr>
           <a:xfrm>
-            <a:off x="839788" y="2505075"/>
-            <a:ext cx="5157787" cy="3684588"/>
+            <a:off x="457200" y="2174875"/>
+            <a:ext cx="4040188" cy="3951288"/>
           </a:xfrm>
         </p:spPr>
         <p:txBody>
           <a:bodyPr/>
-          <a:lstStyle/>
+          <a:lstStyle>
+            <a:lvl1pPr>
+              <a:defRPr sz="2400"/>
+            </a:lvl1pPr>
+            <a:lvl2pPr>
+              <a:defRPr sz="2000"/>
+            </a:lvl2pPr>
+            <a:lvl3pPr>
+              <a:defRPr sz="1800"/>
+            </a:lvl3pPr>
+            <a:lvl4pPr>
+              <a:defRPr sz="1600"/>
+            </a:lvl4pPr>
+            <a:lvl5pPr>
+              <a:defRPr sz="1600"/>
+            </a:lvl5pPr>
+            <a:lvl6pPr>
+              <a:defRPr sz="1600"/>
+            </a:lvl6pPr>
+            <a:lvl7pPr>
+              <a:defRPr sz="1600"/>
+            </a:lvl7pPr>
+            <a:lvl8pPr>
+              <a:defRPr sz="1600"/>
+            </a:lvl8pPr>
+            <a:lvl9pPr>
+              <a:defRPr sz="1600"/>
+            </a:lvl9pPr>
+          </a:lstStyle>
           <a:p>
             <a:pPr lvl="0"/>
             <a:r>
-              <a:rPr lang="en-GB"/>
+              <a:rPr lang="en-US" smtClean="0"/>
               <a:t>Click to edit Master text styles</a:t>
             </a:r>
           </a:p>
           <a:p>
             <a:pPr lvl="1"/>
             <a:r>
-              <a:rPr lang="en-GB"/>
+              <a:rPr lang="en-US" smtClean="0"/>
               <a:t>Second level</a:t>
             </a:r>
           </a:p>
           <a:p>
             <a:pPr lvl="2"/>
             <a:r>
-              <a:rPr lang="en-GB"/>
+              <a:rPr lang="en-US" smtClean="0"/>
               <a:t>Third level</a:t>
             </a:r>
           </a:p>
           <a:p>
             <a:pPr lvl="3"/>
             <a:r>
-              <a:rPr lang="en-GB"/>
+              <a:rPr lang="en-US" smtClean="0"/>
               <a:t>Fourth level</a:t>
             </a:r>
           </a:p>
           <a:p>
             <a:pPr lvl="4"/>
             <a:r>
-              <a:rPr lang="en-GB"/>
+              <a:rPr lang="en-US" smtClean="0"/>
               <a:t>Fifth level</a:t>
             </a:r>
-            <a:endParaRPr lang="en-FR"/>
-          </a:p>
-        </p:txBody>
-      </p:sp>
-      <p:sp>
-        <p:nvSpPr>
-          <p:cNvPr id="5" name="Text Placeholder 4">
-            <a:extLst>
-              <a:ext uri="{FF2B5EF4-FFF2-40B4-BE49-F238E27FC236}">
-                <a16:creationId xmlns:a16="http://schemas.microsoft.com/office/drawing/2014/main" id="{93763AEC-2A4E-BE92-5D78-EC32CE463A75}"/>
-              </a:ext>
-            </a:extLst>
-          </p:cNvPr>
+            <a:endParaRPr lang="en-US"/>
+          </a:p>
+        </p:txBody>
+      </p:sp>
+      <p:sp>
+        <p:nvSpPr>
+          <p:cNvPr id="5" name="Text Placeholder 4"/>
           <p:cNvSpPr>
             <a:spLocks noGrp="1"/>
           </p:cNvSpPr>
@@ -1686,8 +1612,8 @@
         </p:nvSpPr>
         <p:spPr>
           <a:xfrm>
-            <a:off x="6172200" y="1681163"/>
-            <a:ext cx="5183188" cy="823912"/>
+            <a:off x="4645025" y="1535113"/>
+            <a:ext cx="4041775" cy="639762"/>
           </a:xfrm>
         </p:spPr>
         <p:txBody>
@@ -1733,7 +1659,7 @@
           <a:p>
             <a:pPr lvl="0"/>
             <a:r>
-              <a:rPr lang="en-GB"/>
+              <a:rPr lang="en-US" smtClean="0"/>
               <a:t>Click to edit Master text styles</a:t>
             </a:r>
           </a:p>
@@ -1741,13 +1667,7 @@
       </p:sp>
       <p:sp>
         <p:nvSpPr>
-          <p:cNvPr id="6" name="Content Placeholder 5">
-            <a:extLst>
-              <a:ext uri="{FF2B5EF4-FFF2-40B4-BE49-F238E27FC236}">
-                <a16:creationId xmlns:a16="http://schemas.microsoft.com/office/drawing/2014/main" id="{544A6FB1-BB99-EADB-4975-B6DD0F6A182C}"/>
-              </a:ext>
-            </a:extLst>
-          </p:cNvPr>
+          <p:cNvPr id="6" name="Content Placeholder 5"/>
           <p:cNvSpPr>
             <a:spLocks noGrp="1"/>
           </p:cNvSpPr>
@@ -1757,60 +1677,82 @@
         </p:nvSpPr>
         <p:spPr>
           <a:xfrm>
-            <a:off x="6172200" y="2505075"/>
-            <a:ext cx="5183188" cy="3684588"/>
+            <a:off x="4645025" y="2174875"/>
+            <a:ext cx="4041775" cy="3951288"/>
           </a:xfrm>
         </p:spPr>
         <p:txBody>
           <a:bodyPr/>
-          <a:lstStyle/>
+          <a:lstStyle>
+            <a:lvl1pPr>
+              <a:defRPr sz="2400"/>
+            </a:lvl1pPr>
+            <a:lvl2pPr>
+              <a:defRPr sz="2000"/>
+            </a:lvl2pPr>
+            <a:lvl3pPr>
+              <a:defRPr sz="1800"/>
+            </a:lvl3pPr>
+            <a:lvl4pPr>
+              <a:defRPr sz="1600"/>
+            </a:lvl4pPr>
+            <a:lvl5pPr>
+              <a:defRPr sz="1600"/>
+            </a:lvl5pPr>
+            <a:lvl6pPr>
+              <a:defRPr sz="1600"/>
+            </a:lvl6pPr>
+            <a:lvl7pPr>
+              <a:defRPr sz="1600"/>
+            </a:lvl7pPr>
+            <a:lvl8pPr>
+              <a:defRPr sz="1600"/>
+            </a:lvl8pPr>
+            <a:lvl9pPr>
+              <a:defRPr sz="1600"/>
+            </a:lvl9pPr>
+          </a:lstStyle>
           <a:p>
             <a:pPr lvl="0"/>
             <a:r>
-              <a:rPr lang="en-GB"/>
+              <a:rPr lang="en-US" smtClean="0"/>
               <a:t>Click to edit Master text styles</a:t>
             </a:r>
           </a:p>
           <a:p>
             <a:pPr lvl="1"/>
             <a:r>
-              <a:rPr lang="en-GB"/>
+              <a:rPr lang="en-US" smtClean="0"/>
               <a:t>Second level</a:t>
             </a:r>
           </a:p>
           <a:p>
             <a:pPr lvl="2"/>
             <a:r>
-              <a:rPr lang="en-GB"/>
+              <a:rPr lang="en-US" smtClean="0"/>
               <a:t>Third level</a:t>
             </a:r>
           </a:p>
           <a:p>
             <a:pPr lvl="3"/>
             <a:r>
-              <a:rPr lang="en-GB"/>
+              <a:rPr lang="en-US" smtClean="0"/>
               <a:t>Fourth level</a:t>
             </a:r>
           </a:p>
           <a:p>
             <a:pPr lvl="4"/>
             <a:r>
-              <a:rPr lang="en-GB"/>
+              <a:rPr lang="en-US" smtClean="0"/>
               <a:t>Fifth level</a:t>
             </a:r>
-            <a:endParaRPr lang="en-FR"/>
-          </a:p>
-        </p:txBody>
-      </p:sp>
-      <p:sp>
-        <p:nvSpPr>
-          <p:cNvPr id="7" name="Date Placeholder 6">
-            <a:extLst>
-              <a:ext uri="{FF2B5EF4-FFF2-40B4-BE49-F238E27FC236}">
-                <a16:creationId xmlns:a16="http://schemas.microsoft.com/office/drawing/2014/main" id="{D9A9ACC7-C1EF-6A3E-CF9A-E28CA677A72D}"/>
-              </a:ext>
-            </a:extLst>
-          </p:cNvPr>
+            <a:endParaRPr lang="en-US"/>
+          </a:p>
+        </p:txBody>
+      </p:sp>
+      <p:sp>
+        <p:nvSpPr>
+          <p:cNvPr id="7" name="Date Placeholder 6"/>
           <p:cNvSpPr>
             <a:spLocks noGrp="1"/>
           </p:cNvSpPr>
@@ -1823,23 +1765,17 @@
           <a:bodyPr/>
           <a:lstStyle/>
           <a:p>
-            <a:fld id="{7CD783A5-BC47-ED4D-84DA-4F8B01B4E4C0}" type="datetimeFigureOut">
-              <a:rPr lang="en-FR" smtClean="0"/>
-              <a:t>23/10/2025</a:t>
+            <a:fld id="{5BCAD085-E8A6-8845-BD4E-CB4CCA059FC4}" type="datetimeFigureOut">
+              <a:rPr lang="en-US" smtClean="0"/>
+              <a:t>1/27/13</a:t>
             </a:fld>
-            <a:endParaRPr lang="en-FR"/>
-          </a:p>
-        </p:txBody>
-      </p:sp>
-      <p:sp>
-        <p:nvSpPr>
-          <p:cNvPr id="8" name="Footer Placeholder 7">
-            <a:extLst>
-              <a:ext uri="{FF2B5EF4-FFF2-40B4-BE49-F238E27FC236}">
-                <a16:creationId xmlns:a16="http://schemas.microsoft.com/office/drawing/2014/main" id="{75FB81F6-1694-C024-EE63-3FDB9698A4C3}"/>
-              </a:ext>
-            </a:extLst>
-          </p:cNvPr>
+            <a:endParaRPr lang="en-US"/>
+          </a:p>
+        </p:txBody>
+      </p:sp>
+      <p:sp>
+        <p:nvSpPr>
+          <p:cNvPr id="8" name="Footer Placeholder 7"/>
           <p:cNvSpPr>
             <a:spLocks noGrp="1"/>
           </p:cNvSpPr>
@@ -1852,19 +1788,13 @@
           <a:bodyPr/>
           <a:lstStyle/>
           <a:p>
-            <a:endParaRPr lang="en-FR"/>
-          </a:p>
-        </p:txBody>
-      </p:sp>
-      <p:sp>
-        <p:nvSpPr>
-          <p:cNvPr id="9" name="Slide Number Placeholder 8">
-            <a:extLst>
-              <a:ext uri="{FF2B5EF4-FFF2-40B4-BE49-F238E27FC236}">
-                <a16:creationId xmlns:a16="http://schemas.microsoft.com/office/drawing/2014/main" id="{B4D7A655-244D-B49D-030A-5F492F32F10B}"/>
-              </a:ext>
-            </a:extLst>
-          </p:cNvPr>
+            <a:endParaRPr lang="en-US"/>
+          </a:p>
+        </p:txBody>
+      </p:sp>
+      <p:sp>
+        <p:nvSpPr>
+          <p:cNvPr id="9" name="Slide Number Placeholder 8"/>
           <p:cNvSpPr>
             <a:spLocks noGrp="1"/>
           </p:cNvSpPr>
@@ -1877,18 +1807,18 @@
           <a:bodyPr/>
           <a:lstStyle/>
           <a:p>
-            <a:fld id="{7A684E51-FA75-6045-9327-F52E4E2EADA7}" type="slidenum">
-              <a:rPr lang="en-FR" smtClean="0"/>
+            <a:fld id="{C1FF6DA9-008F-8B48-92A6-B652298478BF}" type="slidenum">
+              <a:rPr lang="en-US" smtClean="0"/>
               <a:t>‹#›</a:t>
             </a:fld>
-            <a:endParaRPr lang="en-FR"/>
+            <a:endParaRPr lang="en-US"/>
           </a:p>
         </p:txBody>
       </p:sp>
     </p:spTree>
     <p:extLst>
       <p:ext uri="{BB962C8B-B14F-4D97-AF65-F5344CB8AC3E}">
-        <p14:creationId xmlns:p14="http://schemas.microsoft.com/office/powerpoint/2010/main" val="645486734"/>
+        <p14:creationId xmlns:p14="http://schemas.microsoft.com/office/powerpoint/2010/main" val="990158736"/>
       </p:ext>
     </p:extLst>
   </p:cSld>
@@ -1917,13 +1847,7 @@
       </p:grpSpPr>
       <p:sp>
         <p:nvSpPr>
-          <p:cNvPr id="2" name="Title 1">
-            <a:extLst>
-              <a:ext uri="{FF2B5EF4-FFF2-40B4-BE49-F238E27FC236}">
-                <a16:creationId xmlns:a16="http://schemas.microsoft.com/office/drawing/2014/main" id="{D831E92E-120E-A24D-688A-137EB1919F10}"/>
-              </a:ext>
-            </a:extLst>
-          </p:cNvPr>
+          <p:cNvPr id="2" name="Title 1"/>
           <p:cNvSpPr>
             <a:spLocks noGrp="1"/>
           </p:cNvSpPr>
@@ -1937,22 +1861,16 @@
           <a:lstStyle/>
           <a:p>
             <a:r>
-              <a:rPr lang="en-GB"/>
+              <a:rPr lang="en-US" smtClean="0"/>
               <a:t>Click to edit Master title style</a:t>
             </a:r>
-            <a:endParaRPr lang="en-FR"/>
-          </a:p>
-        </p:txBody>
-      </p:sp>
-      <p:sp>
-        <p:nvSpPr>
-          <p:cNvPr id="3" name="Date Placeholder 2">
-            <a:extLst>
-              <a:ext uri="{FF2B5EF4-FFF2-40B4-BE49-F238E27FC236}">
-                <a16:creationId xmlns:a16="http://schemas.microsoft.com/office/drawing/2014/main" id="{61EF64EC-0480-4D3D-3162-C3C94875E674}"/>
-              </a:ext>
-            </a:extLst>
-          </p:cNvPr>
+            <a:endParaRPr lang="en-US"/>
+          </a:p>
+        </p:txBody>
+      </p:sp>
+      <p:sp>
+        <p:nvSpPr>
+          <p:cNvPr id="3" name="Date Placeholder 2"/>
           <p:cNvSpPr>
             <a:spLocks noGrp="1"/>
           </p:cNvSpPr>
@@ -1965,23 +1883,17 @@
           <a:bodyPr/>
           <a:lstStyle/>
           <a:p>
-            <a:fld id="{7CD783A5-BC47-ED4D-84DA-4F8B01B4E4C0}" type="datetimeFigureOut">
-              <a:rPr lang="en-FR" smtClean="0"/>
-              <a:t>23/10/2025</a:t>
+            <a:fld id="{5BCAD085-E8A6-8845-BD4E-CB4CCA059FC4}" type="datetimeFigureOut">
+              <a:rPr lang="en-US" smtClean="0"/>
+              <a:t>1/27/13</a:t>
             </a:fld>
-            <a:endParaRPr lang="en-FR"/>
-          </a:p>
-        </p:txBody>
-      </p:sp>
-      <p:sp>
-        <p:nvSpPr>
-          <p:cNvPr id="4" name="Footer Placeholder 3">
-            <a:extLst>
-              <a:ext uri="{FF2B5EF4-FFF2-40B4-BE49-F238E27FC236}">
-                <a16:creationId xmlns:a16="http://schemas.microsoft.com/office/drawing/2014/main" id="{624C01F6-AA34-F548-6249-71316962324A}"/>
-              </a:ext>
-            </a:extLst>
-          </p:cNvPr>
+            <a:endParaRPr lang="en-US"/>
+          </a:p>
+        </p:txBody>
+      </p:sp>
+      <p:sp>
+        <p:nvSpPr>
+          <p:cNvPr id="4" name="Footer Placeholder 3"/>
           <p:cNvSpPr>
             <a:spLocks noGrp="1"/>
           </p:cNvSpPr>
@@ -1994,19 +1906,13 @@
           <a:bodyPr/>
           <a:lstStyle/>
           <a:p>
-            <a:endParaRPr lang="en-FR"/>
-          </a:p>
-        </p:txBody>
-      </p:sp>
-      <p:sp>
-        <p:nvSpPr>
-          <p:cNvPr id="5" name="Slide Number Placeholder 4">
-            <a:extLst>
-              <a:ext uri="{FF2B5EF4-FFF2-40B4-BE49-F238E27FC236}">
-                <a16:creationId xmlns:a16="http://schemas.microsoft.com/office/drawing/2014/main" id="{EB9701A6-0537-84A3-B1B4-ED1FF51AA21B}"/>
-              </a:ext>
-            </a:extLst>
-          </p:cNvPr>
+            <a:endParaRPr lang="en-US"/>
+          </a:p>
+        </p:txBody>
+      </p:sp>
+      <p:sp>
+        <p:nvSpPr>
+          <p:cNvPr id="5" name="Slide Number Placeholder 4"/>
           <p:cNvSpPr>
             <a:spLocks noGrp="1"/>
           </p:cNvSpPr>
@@ -2019,18 +1925,18 @@
           <a:bodyPr/>
           <a:lstStyle/>
           <a:p>
-            <a:fld id="{7A684E51-FA75-6045-9327-F52E4E2EADA7}" type="slidenum">
-              <a:rPr lang="en-FR" smtClean="0"/>
+            <a:fld id="{C1FF6DA9-008F-8B48-92A6-B652298478BF}" type="slidenum">
+              <a:rPr lang="en-US" smtClean="0"/>
               <a:t>‹#›</a:t>
             </a:fld>
-            <a:endParaRPr lang="en-FR"/>
+            <a:endParaRPr lang="en-US"/>
           </a:p>
         </p:txBody>
       </p:sp>
     </p:spTree>
     <p:extLst>
       <p:ext uri="{BB962C8B-B14F-4D97-AF65-F5344CB8AC3E}">
-        <p14:creationId xmlns:p14="http://schemas.microsoft.com/office/powerpoint/2010/main" val="171082388"/>
+        <p14:creationId xmlns:p14="http://schemas.microsoft.com/office/powerpoint/2010/main" val="727027711"/>
       </p:ext>
     </p:extLst>
   </p:cSld>
@@ -2059,13 +1965,7 @@
       </p:grpSpPr>
       <p:sp>
         <p:nvSpPr>
-          <p:cNvPr id="2" name="Date Placeholder 1">
-            <a:extLst>
-              <a:ext uri="{FF2B5EF4-FFF2-40B4-BE49-F238E27FC236}">
-                <a16:creationId xmlns:a16="http://schemas.microsoft.com/office/drawing/2014/main" id="{390AA83E-5FF3-8EA5-81C2-A004EFCCB927}"/>
-              </a:ext>
-            </a:extLst>
-          </p:cNvPr>
+          <p:cNvPr id="2" name="Date Placeholder 1"/>
           <p:cNvSpPr>
             <a:spLocks noGrp="1"/>
           </p:cNvSpPr>
@@ -2078,23 +1978,17 @@
           <a:bodyPr/>
           <a:lstStyle/>
           <a:p>
-            <a:fld id="{7CD783A5-BC47-ED4D-84DA-4F8B01B4E4C0}" type="datetimeFigureOut">
-              <a:rPr lang="en-FR" smtClean="0"/>
-              <a:t>23/10/2025</a:t>
+            <a:fld id="{5BCAD085-E8A6-8845-BD4E-CB4CCA059FC4}" type="datetimeFigureOut">
+              <a:rPr lang="en-US" smtClean="0"/>
+              <a:t>1/27/13</a:t>
             </a:fld>
-            <a:endParaRPr lang="en-FR"/>
-          </a:p>
-        </p:txBody>
-      </p:sp>
-      <p:sp>
-        <p:nvSpPr>
-          <p:cNvPr id="3" name="Footer Placeholder 2">
-            <a:extLst>
-              <a:ext uri="{FF2B5EF4-FFF2-40B4-BE49-F238E27FC236}">
-                <a16:creationId xmlns:a16="http://schemas.microsoft.com/office/drawing/2014/main" id="{E359FC87-2552-FA39-F09E-4199286C59B1}"/>
-              </a:ext>
-            </a:extLst>
-          </p:cNvPr>
+            <a:endParaRPr lang="en-US"/>
+          </a:p>
+        </p:txBody>
+      </p:sp>
+      <p:sp>
+        <p:nvSpPr>
+          <p:cNvPr id="3" name="Footer Placeholder 2"/>
           <p:cNvSpPr>
             <a:spLocks noGrp="1"/>
           </p:cNvSpPr>
@@ -2107,19 +2001,13 @@
           <a:bodyPr/>
           <a:lstStyle/>
           <a:p>
-            <a:endParaRPr lang="en-FR"/>
-          </a:p>
-        </p:txBody>
-      </p:sp>
-      <p:sp>
-        <p:nvSpPr>
-          <p:cNvPr id="4" name="Slide Number Placeholder 3">
-            <a:extLst>
-              <a:ext uri="{FF2B5EF4-FFF2-40B4-BE49-F238E27FC236}">
-                <a16:creationId xmlns:a16="http://schemas.microsoft.com/office/drawing/2014/main" id="{C681AB23-A6C9-3B4F-0517-EF85A3BE5A1C}"/>
-              </a:ext>
-            </a:extLst>
-          </p:cNvPr>
+            <a:endParaRPr lang="en-US"/>
+          </a:p>
+        </p:txBody>
+      </p:sp>
+      <p:sp>
+        <p:nvSpPr>
+          <p:cNvPr id="4" name="Slide Number Placeholder 3"/>
           <p:cNvSpPr>
             <a:spLocks noGrp="1"/>
           </p:cNvSpPr>
@@ -2132,18 +2020,18 @@
           <a:bodyPr/>
           <a:lstStyle/>
           <a:p>
-            <a:fld id="{7A684E51-FA75-6045-9327-F52E4E2EADA7}" type="slidenum">
-              <a:rPr lang="en-FR" smtClean="0"/>
+            <a:fld id="{C1FF6DA9-008F-8B48-92A6-B652298478BF}" type="slidenum">
+              <a:rPr lang="en-US" smtClean="0"/>
               <a:t>‹#›</a:t>
             </a:fld>
-            <a:endParaRPr lang="en-FR"/>
+            <a:endParaRPr lang="en-US"/>
           </a:p>
         </p:txBody>
       </p:sp>
     </p:spTree>
     <p:extLst>
       <p:ext uri="{BB962C8B-B14F-4D97-AF65-F5344CB8AC3E}">
-        <p14:creationId xmlns:p14="http://schemas.microsoft.com/office/powerpoint/2010/main" val="3966702602"/>
+        <p14:creationId xmlns:p14="http://schemas.microsoft.com/office/powerpoint/2010/main" val="1212999818"/>
       </p:ext>
     </p:extLst>
   </p:cSld>
@@ -2172,13 +2060,7 @@
       </p:grpSpPr>
       <p:sp>
         <p:nvSpPr>
-          <p:cNvPr id="2" name="Title 1">
-            <a:extLst>
-              <a:ext uri="{FF2B5EF4-FFF2-40B4-BE49-F238E27FC236}">
-                <a16:creationId xmlns:a16="http://schemas.microsoft.com/office/drawing/2014/main" id="{3CA0B2BD-337C-A15D-84D8-CDD1611C2750}"/>
-              </a:ext>
-            </a:extLst>
-          </p:cNvPr>
+          <p:cNvPr id="2" name="Title 1"/>
           <p:cNvSpPr>
             <a:spLocks noGrp="1"/>
           </p:cNvSpPr>
@@ -2188,35 +2070,29 @@
         </p:nvSpPr>
         <p:spPr>
           <a:xfrm>
-            <a:off x="839788" y="457200"/>
-            <a:ext cx="3932237" cy="1600200"/>
+            <a:off x="457200" y="273050"/>
+            <a:ext cx="3008313" cy="1162050"/>
           </a:xfrm>
         </p:spPr>
         <p:txBody>
           <a:bodyPr anchor="b"/>
           <a:lstStyle>
-            <a:lvl1pPr>
-              <a:defRPr sz="3200"/>
+            <a:lvl1pPr algn="l">
+              <a:defRPr sz="2000" b="1"/>
             </a:lvl1pPr>
           </a:lstStyle>
           <a:p>
             <a:r>
-              <a:rPr lang="en-GB"/>
+              <a:rPr lang="en-US" smtClean="0"/>
               <a:t>Click to edit Master title style</a:t>
             </a:r>
-            <a:endParaRPr lang="en-FR"/>
-          </a:p>
-        </p:txBody>
-      </p:sp>
-      <p:sp>
-        <p:nvSpPr>
-          <p:cNvPr id="3" name="Content Placeholder 2">
-            <a:extLst>
-              <a:ext uri="{FF2B5EF4-FFF2-40B4-BE49-F238E27FC236}">
-                <a16:creationId xmlns:a16="http://schemas.microsoft.com/office/drawing/2014/main" id="{0040A468-92A9-65A0-7EF4-4BD4E98CB4A6}"/>
-              </a:ext>
-            </a:extLst>
-          </p:cNvPr>
+            <a:endParaRPr lang="en-US"/>
+          </a:p>
+        </p:txBody>
+      </p:sp>
+      <p:sp>
+        <p:nvSpPr>
+          <p:cNvPr id="3" name="Content Placeholder 2"/>
           <p:cNvSpPr>
             <a:spLocks noGrp="1"/>
           </p:cNvSpPr>
@@ -2226,8 +2102,8 @@
         </p:nvSpPr>
         <p:spPr>
           <a:xfrm>
-            <a:off x="5183188" y="987425"/>
-            <a:ext cx="6172200" cy="4873625"/>
+            <a:off x="3575050" y="273050"/>
+            <a:ext cx="5111750" cy="5853113"/>
           </a:xfrm>
         </p:spPr>
         <p:txBody>
@@ -2264,50 +2140,44 @@
           <a:p>
             <a:pPr lvl="0"/>
             <a:r>
-              <a:rPr lang="en-GB"/>
+              <a:rPr lang="en-US" smtClean="0"/>
               <a:t>Click to edit Master text styles</a:t>
             </a:r>
           </a:p>
           <a:p>
             <a:pPr lvl="1"/>
             <a:r>
-              <a:rPr lang="en-GB"/>
+              <a:rPr lang="en-US" smtClean="0"/>
               <a:t>Second level</a:t>
             </a:r>
           </a:p>
           <a:p>
             <a:pPr lvl="2"/>
             <a:r>
-              <a:rPr lang="en-GB"/>
+              <a:rPr lang="en-US" smtClean="0"/>
               <a:t>Third level</a:t>
             </a:r>
           </a:p>
           <a:p>
             <a:pPr lvl="3"/>
             <a:r>
-              <a:rPr lang="en-GB"/>
+              <a:rPr lang="en-US" smtClean="0"/>
               <a:t>Fourth level</a:t>
             </a:r>
           </a:p>
           <a:p>
             <a:pPr lvl="4"/>
             <a:r>
-              <a:rPr lang="en-GB"/>
+              <a:rPr lang="en-US" smtClean="0"/>
               <a:t>Fifth level</a:t>
             </a:r>
-            <a:endParaRPr lang="en-FR"/>
-          </a:p>
-        </p:txBody>
-      </p:sp>
-      <p:sp>
-        <p:nvSpPr>
-          <p:cNvPr id="4" name="Text Placeholder 3">
-            <a:extLst>
-              <a:ext uri="{FF2B5EF4-FFF2-40B4-BE49-F238E27FC236}">
-                <a16:creationId xmlns:a16="http://schemas.microsoft.com/office/drawing/2014/main" id="{8FDE07A4-DA39-8833-E6F9-69549D04FB77}"/>
-              </a:ext>
-            </a:extLst>
-          </p:cNvPr>
+            <a:endParaRPr lang="en-US"/>
+          </a:p>
+        </p:txBody>
+      </p:sp>
+      <p:sp>
+        <p:nvSpPr>
+          <p:cNvPr id="4" name="Text Placeholder 3"/>
           <p:cNvSpPr>
             <a:spLocks noGrp="1"/>
           </p:cNvSpPr>
@@ -2317,8 +2187,8 @@
         </p:nvSpPr>
         <p:spPr>
           <a:xfrm>
-            <a:off x="839788" y="2057400"/>
-            <a:ext cx="3932237" cy="3811588"/>
+            <a:off x="457200" y="1435100"/>
+            <a:ext cx="3008313" cy="4691063"/>
           </a:xfrm>
         </p:spPr>
         <p:txBody>
@@ -2326,45 +2196,45 @@
           <a:lstStyle>
             <a:lvl1pPr marL="0" indent="0">
               <a:buNone/>
-              <a:defRPr sz="1600"/>
+              <a:defRPr sz="1400"/>
             </a:lvl1pPr>
             <a:lvl2pPr marL="457200" indent="0">
               <a:buNone/>
-              <a:defRPr sz="1400"/>
+              <a:defRPr sz="1200"/>
             </a:lvl2pPr>
             <a:lvl3pPr marL="914400" indent="0">
               <a:buNone/>
-              <a:defRPr sz="1200"/>
+              <a:defRPr sz="1000"/>
             </a:lvl3pPr>
             <a:lvl4pPr marL="1371600" indent="0">
               <a:buNone/>
-              <a:defRPr sz="1000"/>
+              <a:defRPr sz="900"/>
             </a:lvl4pPr>
             <a:lvl5pPr marL="1828800" indent="0">
               <a:buNone/>
-              <a:defRPr sz="1000"/>
+              <a:defRPr sz="900"/>
             </a:lvl5pPr>
             <a:lvl6pPr marL="2286000" indent="0">
               <a:buNone/>
-              <a:defRPr sz="1000"/>
+              <a:defRPr sz="900"/>
             </a:lvl6pPr>
             <a:lvl7pPr marL="2743200" indent="0">
               <a:buNone/>
-              <a:defRPr sz="1000"/>
+              <a:defRPr sz="900"/>
             </a:lvl7pPr>
             <a:lvl8pPr marL="3200400" indent="0">
               <a:buNone/>
-              <a:defRPr sz="1000"/>
+              <a:defRPr sz="900"/>
             </a:lvl8pPr>
             <a:lvl9pPr marL="3657600" indent="0">
               <a:buNone/>
-              <a:defRPr sz="1000"/>
+              <a:defRPr sz="900"/>
             </a:lvl9pPr>
           </a:lstStyle>
           <a:p>
             <a:pPr lvl="0"/>
             <a:r>
-              <a:rPr lang="en-GB"/>
+              <a:rPr lang="en-US" smtClean="0"/>
               <a:t>Click to edit Master text styles</a:t>
             </a:r>
           </a:p>
@@ -2372,13 +2242,7 @@
       </p:sp>
       <p:sp>
         <p:nvSpPr>
-          <p:cNvPr id="5" name="Date Placeholder 4">
-            <a:extLst>
-              <a:ext uri="{FF2B5EF4-FFF2-40B4-BE49-F238E27FC236}">
-                <a16:creationId xmlns:a16="http://schemas.microsoft.com/office/drawing/2014/main" id="{26F67C14-170A-674E-355F-35DFAB93E6C4}"/>
-              </a:ext>
-            </a:extLst>
-          </p:cNvPr>
+          <p:cNvPr id="5" name="Date Placeholder 4"/>
           <p:cNvSpPr>
             <a:spLocks noGrp="1"/>
           </p:cNvSpPr>
@@ -2391,23 +2255,17 @@
           <a:bodyPr/>
           <a:lstStyle/>
           <a:p>
-            <a:fld id="{7CD783A5-BC47-ED4D-84DA-4F8B01B4E4C0}" type="datetimeFigureOut">
-              <a:rPr lang="en-FR" smtClean="0"/>
-              <a:t>23/10/2025</a:t>
+            <a:fld id="{5BCAD085-E8A6-8845-BD4E-CB4CCA059FC4}" type="datetimeFigureOut">
+              <a:rPr lang="en-US" smtClean="0"/>
+              <a:t>1/27/13</a:t>
             </a:fld>
-            <a:endParaRPr lang="en-FR"/>
-          </a:p>
-        </p:txBody>
-      </p:sp>
-      <p:sp>
-        <p:nvSpPr>
-          <p:cNvPr id="6" name="Footer Placeholder 5">
-            <a:extLst>
-              <a:ext uri="{FF2B5EF4-FFF2-40B4-BE49-F238E27FC236}">
-                <a16:creationId xmlns:a16="http://schemas.microsoft.com/office/drawing/2014/main" id="{C66A89CC-F8AD-2A7B-D5F2-BA884ECED17E}"/>
-              </a:ext>
-            </a:extLst>
-          </p:cNvPr>
+            <a:endParaRPr lang="en-US"/>
+          </a:p>
+        </p:txBody>
+      </p:sp>
+      <p:sp>
+        <p:nvSpPr>
+          <p:cNvPr id="6" name="Footer Placeholder 5"/>
           <p:cNvSpPr>
             <a:spLocks noGrp="1"/>
           </p:cNvSpPr>
@@ -2420,19 +2278,13 @@
           <a:bodyPr/>
           <a:lstStyle/>
           <a:p>
-            <a:endParaRPr lang="en-FR"/>
-          </a:p>
-        </p:txBody>
-      </p:sp>
-      <p:sp>
-        <p:nvSpPr>
-          <p:cNvPr id="7" name="Slide Number Placeholder 6">
-            <a:extLst>
-              <a:ext uri="{FF2B5EF4-FFF2-40B4-BE49-F238E27FC236}">
-                <a16:creationId xmlns:a16="http://schemas.microsoft.com/office/drawing/2014/main" id="{0E0A65AA-26E6-7C29-875A-B9ABC8A31151}"/>
-              </a:ext>
-            </a:extLst>
-          </p:cNvPr>
+            <a:endParaRPr lang="en-US"/>
+          </a:p>
+        </p:txBody>
+      </p:sp>
+      <p:sp>
+        <p:nvSpPr>
+          <p:cNvPr id="7" name="Slide Number Placeholder 6"/>
           <p:cNvSpPr>
             <a:spLocks noGrp="1"/>
           </p:cNvSpPr>
@@ -2445,18 +2297,18 @@
           <a:bodyPr/>
           <a:lstStyle/>
           <a:p>
-            <a:fld id="{7A684E51-FA75-6045-9327-F52E4E2EADA7}" type="slidenum">
-              <a:rPr lang="en-FR" smtClean="0"/>
+            <a:fld id="{C1FF6DA9-008F-8B48-92A6-B652298478BF}" type="slidenum">
+              <a:rPr lang="en-US" smtClean="0"/>
               <a:t>‹#›</a:t>
             </a:fld>
-            <a:endParaRPr lang="en-FR"/>
+            <a:endParaRPr lang="en-US"/>
           </a:p>
         </p:txBody>
       </p:sp>
     </p:spTree>
     <p:extLst>
       <p:ext uri="{BB962C8B-B14F-4D97-AF65-F5344CB8AC3E}">
-        <p14:creationId xmlns:p14="http://schemas.microsoft.com/office/powerpoint/2010/main" val="2374697047"/>
+        <p14:creationId xmlns:p14="http://schemas.microsoft.com/office/powerpoint/2010/main" val="1840726560"/>
       </p:ext>
     </p:extLst>
   </p:cSld>
@@ -2485,13 +2337,7 @@
       </p:grpSpPr>
       <p:sp>
         <p:nvSpPr>
-          <p:cNvPr id="2" name="Title 1">
-            <a:extLst>
-              <a:ext uri="{FF2B5EF4-FFF2-40B4-BE49-F238E27FC236}">
-                <a16:creationId xmlns:a16="http://schemas.microsoft.com/office/drawing/2014/main" id="{9C6748C7-4288-0E96-0F83-84900A3AFF60}"/>
-              </a:ext>
-            </a:extLst>
-          </p:cNvPr>
+          <p:cNvPr id="2" name="Title 1"/>
           <p:cNvSpPr>
             <a:spLocks noGrp="1"/>
           </p:cNvSpPr>
@@ -2501,35 +2347,29 @@
         </p:nvSpPr>
         <p:spPr>
           <a:xfrm>
-            <a:off x="839788" y="457200"/>
-            <a:ext cx="3932237" cy="1600200"/>
+            <a:off x="1792288" y="4800600"/>
+            <a:ext cx="5486400" cy="566738"/>
           </a:xfrm>
         </p:spPr>
         <p:txBody>
           <a:bodyPr anchor="b"/>
           <a:lstStyle>
-            <a:lvl1pPr>
-              <a:defRPr sz="3200"/>
+            <a:lvl1pPr algn="l">
+              <a:defRPr sz="2000" b="1"/>
             </a:lvl1pPr>
           </a:lstStyle>
           <a:p>
             <a:r>
-              <a:rPr lang="en-GB"/>
+              <a:rPr lang="en-US" smtClean="0"/>
               <a:t>Click to edit Master title style</a:t>
             </a:r>
-            <a:endParaRPr lang="en-FR"/>
-          </a:p>
-        </p:txBody>
-      </p:sp>
-      <p:sp>
-        <p:nvSpPr>
-          <p:cNvPr id="3" name="Picture Placeholder 2">
-            <a:extLst>
-              <a:ext uri="{FF2B5EF4-FFF2-40B4-BE49-F238E27FC236}">
-                <a16:creationId xmlns:a16="http://schemas.microsoft.com/office/drawing/2014/main" id="{020B8CB9-85A6-9C02-5D3E-15E1F074EE0F}"/>
-              </a:ext>
-            </a:extLst>
-          </p:cNvPr>
+            <a:endParaRPr lang="en-US"/>
+          </a:p>
+        </p:txBody>
+      </p:sp>
+      <p:sp>
+        <p:nvSpPr>
+          <p:cNvPr id="3" name="Picture Placeholder 2"/>
           <p:cNvSpPr>
             <a:spLocks noGrp="1"/>
           </p:cNvSpPr>
@@ -2539,8 +2379,8 @@
         </p:nvSpPr>
         <p:spPr>
           <a:xfrm>
-            <a:off x="5183188" y="987425"/>
-            <a:ext cx="6172200" cy="4873625"/>
+            <a:off x="1792288" y="612775"/>
+            <a:ext cx="5486400" cy="4114800"/>
           </a:xfrm>
         </p:spPr>
         <p:txBody>
@@ -2584,19 +2424,13 @@
             </a:lvl9pPr>
           </a:lstStyle>
           <a:p>
-            <a:endParaRPr lang="en-FR"/>
-          </a:p>
-        </p:txBody>
-      </p:sp>
-      <p:sp>
-        <p:nvSpPr>
-          <p:cNvPr id="4" name="Text Placeholder 3">
-            <a:extLst>
-              <a:ext uri="{FF2B5EF4-FFF2-40B4-BE49-F238E27FC236}">
-                <a16:creationId xmlns:a16="http://schemas.microsoft.com/office/drawing/2014/main" id="{750BE343-537A-FCCD-E608-CABC38CF110B}"/>
-              </a:ext>
-            </a:extLst>
-          </p:cNvPr>
+            <a:endParaRPr lang="en-US"/>
+          </a:p>
+        </p:txBody>
+      </p:sp>
+      <p:sp>
+        <p:nvSpPr>
+          <p:cNvPr id="4" name="Text Placeholder 3"/>
           <p:cNvSpPr>
             <a:spLocks noGrp="1"/>
           </p:cNvSpPr>
@@ -2606,8 +2440,8 @@
         </p:nvSpPr>
         <p:spPr>
           <a:xfrm>
-            <a:off x="839788" y="2057400"/>
-            <a:ext cx="3932237" cy="3811588"/>
+            <a:off x="1792288" y="5367338"/>
+            <a:ext cx="5486400" cy="804862"/>
           </a:xfrm>
         </p:spPr>
         <p:txBody>
@@ -2615,45 +2449,45 @@
           <a:lstStyle>
             <a:lvl1pPr marL="0" indent="0">
               <a:buNone/>
-              <a:defRPr sz="1600"/>
+              <a:defRPr sz="1400"/>
             </a:lvl1pPr>
             <a:lvl2pPr marL="457200" indent="0">
               <a:buNone/>
-              <a:defRPr sz="1400"/>
+              <a:defRPr sz="1200"/>
             </a:lvl2pPr>
             <a:lvl3pPr marL="914400" indent="0">
               <a:buNone/>
-              <a:defRPr sz="1200"/>
+              <a:defRPr sz="1000"/>
             </a:lvl3pPr>
             <a:lvl4pPr marL="1371600" indent="0">
               <a:buNone/>
-              <a:defRPr sz="1000"/>
+              <a:defRPr sz="900"/>
             </a:lvl4pPr>
             <a:lvl5pPr marL="1828800" indent="0">
               <a:buNone/>
-              <a:defRPr sz="1000"/>
+              <a:defRPr sz="900"/>
             </a:lvl5pPr>
             <a:lvl6pPr marL="2286000" indent="0">
               <a:buNone/>
-              <a:defRPr sz="1000"/>
+              <a:defRPr sz="900"/>
             </a:lvl6pPr>
             <a:lvl7pPr marL="2743200" indent="0">
               <a:buNone/>
-              <a:defRPr sz="1000"/>
+              <a:defRPr sz="900"/>
             </a:lvl7pPr>
             <a:lvl8pPr marL="3200400" indent="0">
               <a:buNone/>
-              <a:defRPr sz="1000"/>
+              <a:defRPr sz="900"/>
             </a:lvl8pPr>
             <a:lvl9pPr marL="3657600" indent="0">
               <a:buNone/>
-              <a:defRPr sz="1000"/>
+              <a:defRPr sz="900"/>
             </a:lvl9pPr>
           </a:lstStyle>
           <a:p>
             <a:pPr lvl="0"/>
             <a:r>
-              <a:rPr lang="en-GB"/>
+              <a:rPr lang="en-US" smtClean="0"/>
               <a:t>Click to edit Master text styles</a:t>
             </a:r>
           </a:p>
@@ -2661,13 +2495,7 @@
       </p:sp>
       <p:sp>
         <p:nvSpPr>
-          <p:cNvPr id="5" name="Date Placeholder 4">
-            <a:extLst>
-              <a:ext uri="{FF2B5EF4-FFF2-40B4-BE49-F238E27FC236}">
-                <a16:creationId xmlns:a16="http://schemas.microsoft.com/office/drawing/2014/main" id="{C46C5A29-0728-0B3D-ED5A-C94399504513}"/>
-              </a:ext>
-            </a:extLst>
-          </p:cNvPr>
+          <p:cNvPr id="5" name="Date Placeholder 4"/>
           <p:cNvSpPr>
             <a:spLocks noGrp="1"/>
           </p:cNvSpPr>
@@ -2680,23 +2508,17 @@
           <a:bodyPr/>
           <a:lstStyle/>
           <a:p>
-            <a:fld id="{7CD783A5-BC47-ED4D-84DA-4F8B01B4E4C0}" type="datetimeFigureOut">
-              <a:rPr lang="en-FR" smtClean="0"/>
-              <a:t>23/10/2025</a:t>
+            <a:fld id="{5BCAD085-E8A6-8845-BD4E-CB4CCA059FC4}" type="datetimeFigureOut">
+              <a:rPr lang="en-US" smtClean="0"/>
+              <a:t>1/27/13</a:t>
             </a:fld>
-            <a:endParaRPr lang="en-FR"/>
-          </a:p>
-        </p:txBody>
-      </p:sp>
-      <p:sp>
-        <p:nvSpPr>
-          <p:cNvPr id="6" name="Footer Placeholder 5">
-            <a:extLst>
-              <a:ext uri="{FF2B5EF4-FFF2-40B4-BE49-F238E27FC236}">
-                <a16:creationId xmlns:a16="http://schemas.microsoft.com/office/drawing/2014/main" id="{489FE4AA-57E4-EFD6-2675-3F98738FA3F5}"/>
-              </a:ext>
-            </a:extLst>
-          </p:cNvPr>
+            <a:endParaRPr lang="en-US"/>
+          </a:p>
+        </p:txBody>
+      </p:sp>
+      <p:sp>
+        <p:nvSpPr>
+          <p:cNvPr id="6" name="Footer Placeholder 5"/>
           <p:cNvSpPr>
             <a:spLocks noGrp="1"/>
           </p:cNvSpPr>
@@ -2709,19 +2531,13 @@
           <a:bodyPr/>
           <a:lstStyle/>
           <a:p>
-            <a:endParaRPr lang="en-FR"/>
-          </a:p>
-        </p:txBody>
-      </p:sp>
-      <p:sp>
-        <p:nvSpPr>
-          <p:cNvPr id="7" name="Slide Number Placeholder 6">
-            <a:extLst>
-              <a:ext uri="{FF2B5EF4-FFF2-40B4-BE49-F238E27FC236}">
-                <a16:creationId xmlns:a16="http://schemas.microsoft.com/office/drawing/2014/main" id="{6D608C8F-FB76-6B67-0151-3D9CA334B5D1}"/>
-              </a:ext>
-            </a:extLst>
-          </p:cNvPr>
+            <a:endParaRPr lang="en-US"/>
+          </a:p>
+        </p:txBody>
+      </p:sp>
+      <p:sp>
+        <p:nvSpPr>
+          <p:cNvPr id="7" name="Slide Number Placeholder 6"/>
           <p:cNvSpPr>
             <a:spLocks noGrp="1"/>
           </p:cNvSpPr>
@@ -2734,18 +2550,18 @@
           <a:bodyPr/>
           <a:lstStyle/>
           <a:p>
-            <a:fld id="{7A684E51-FA75-6045-9327-F52E4E2EADA7}" type="slidenum">
-              <a:rPr lang="en-FR" smtClean="0"/>
+            <a:fld id="{C1FF6DA9-008F-8B48-92A6-B652298478BF}" type="slidenum">
+              <a:rPr lang="en-US" smtClean="0"/>
               <a:t>‹#›</a:t>
             </a:fld>
-            <a:endParaRPr lang="en-FR"/>
+            <a:endParaRPr lang="en-US"/>
           </a:p>
         </p:txBody>
       </p:sp>
     </p:spTree>
     <p:extLst>
       <p:ext uri="{BB962C8B-B14F-4D97-AF65-F5344CB8AC3E}">
-        <p14:creationId xmlns:p14="http://schemas.microsoft.com/office/powerpoint/2010/main" val="74481663"/>
+        <p14:creationId xmlns:p14="http://schemas.microsoft.com/office/powerpoint/2010/main" val="3889236939"/>
       </p:ext>
     </p:extLst>
   </p:cSld>
@@ -2779,13 +2595,7 @@
       </p:grpSpPr>
       <p:sp>
         <p:nvSpPr>
-          <p:cNvPr id="2" name="Title Placeholder 1">
-            <a:extLst>
-              <a:ext uri="{FF2B5EF4-FFF2-40B4-BE49-F238E27FC236}">
-                <a16:creationId xmlns:a16="http://schemas.microsoft.com/office/drawing/2014/main" id="{F1927ED1-C350-0D11-FF4A-7805D6235605}"/>
-              </a:ext>
-            </a:extLst>
-          </p:cNvPr>
+          <p:cNvPr id="2" name="Title Placeholder 1"/>
           <p:cNvSpPr>
             <a:spLocks noGrp="1"/>
           </p:cNvSpPr>
@@ -2795,8 +2605,8 @@
         </p:nvSpPr>
         <p:spPr>
           <a:xfrm>
-            <a:off x="838200" y="365125"/>
-            <a:ext cx="10515600" cy="1325563"/>
+            <a:off x="457200" y="274638"/>
+            <a:ext cx="8229600" cy="1143000"/>
           </a:xfrm>
           <a:prstGeom prst="rect">
             <a:avLst/>
@@ -2809,22 +2619,16 @@
           <a:lstStyle/>
           <a:p>
             <a:r>
-              <a:rPr lang="en-GB"/>
+              <a:rPr lang="en-US" smtClean="0"/>
               <a:t>Click to edit Master title style</a:t>
             </a:r>
-            <a:endParaRPr lang="en-FR"/>
-          </a:p>
-        </p:txBody>
-      </p:sp>
-      <p:sp>
-        <p:nvSpPr>
-          <p:cNvPr id="3" name="Text Placeholder 2">
-            <a:extLst>
-              <a:ext uri="{FF2B5EF4-FFF2-40B4-BE49-F238E27FC236}">
-                <a16:creationId xmlns:a16="http://schemas.microsoft.com/office/drawing/2014/main" id="{06134AC3-7E67-14AF-DC52-90B7D7731917}"/>
-              </a:ext>
-            </a:extLst>
-          </p:cNvPr>
+            <a:endParaRPr lang="en-US"/>
+          </a:p>
+        </p:txBody>
+      </p:sp>
+      <p:sp>
+        <p:nvSpPr>
+          <p:cNvPr id="3" name="Text Placeholder 2"/>
           <p:cNvSpPr>
             <a:spLocks noGrp="1"/>
           </p:cNvSpPr>
@@ -2834,8 +2638,8 @@
         </p:nvSpPr>
         <p:spPr>
           <a:xfrm>
-            <a:off x="838200" y="1825625"/>
-            <a:ext cx="10515600" cy="4351338"/>
+            <a:off x="457200" y="1600200"/>
+            <a:ext cx="8229600" cy="4525963"/>
           </a:xfrm>
           <a:prstGeom prst="rect">
             <a:avLst/>
@@ -2849,50 +2653,44 @@
           <a:p>
             <a:pPr lvl="0"/>
             <a:r>
-              <a:rPr lang="en-GB"/>
+              <a:rPr lang="en-US" smtClean="0"/>
               <a:t>Click to edit Master text styles</a:t>
             </a:r>
           </a:p>
           <a:p>
             <a:pPr lvl="1"/>
             <a:r>
-              <a:rPr lang="en-GB"/>
+              <a:rPr lang="en-US" smtClean="0"/>
               <a:t>Second level</a:t>
             </a:r>
           </a:p>
           <a:p>
             <a:pPr lvl="2"/>
             <a:r>
-              <a:rPr lang="en-GB"/>
+              <a:rPr lang="en-US" smtClean="0"/>
               <a:t>Third level</a:t>
             </a:r>
           </a:p>
           <a:p>
             <a:pPr lvl="3"/>
             <a:r>
-              <a:rPr lang="en-GB"/>
+              <a:rPr lang="en-US" smtClean="0"/>
               <a:t>Fourth level</a:t>
             </a:r>
           </a:p>
           <a:p>
             <a:pPr lvl="4"/>
             <a:r>
-              <a:rPr lang="en-GB"/>
+              <a:rPr lang="en-US" smtClean="0"/>
               <a:t>Fifth level</a:t>
             </a:r>
-            <a:endParaRPr lang="en-FR"/>
-          </a:p>
-        </p:txBody>
-      </p:sp>
-      <p:sp>
-        <p:nvSpPr>
-          <p:cNvPr id="4" name="Date Placeholder 3">
-            <a:extLst>
-              <a:ext uri="{FF2B5EF4-FFF2-40B4-BE49-F238E27FC236}">
-                <a16:creationId xmlns:a16="http://schemas.microsoft.com/office/drawing/2014/main" id="{66518399-4C91-33EC-60E8-06393CC7B384}"/>
-              </a:ext>
-            </a:extLst>
-          </p:cNvPr>
+            <a:endParaRPr lang="en-US"/>
+          </a:p>
+        </p:txBody>
+      </p:sp>
+      <p:sp>
+        <p:nvSpPr>
+          <p:cNvPr id="4" name="Date Placeholder 3"/>
           <p:cNvSpPr>
             <a:spLocks noGrp="1"/>
           </p:cNvSpPr>
@@ -2902,8 +2700,8 @@
         </p:nvSpPr>
         <p:spPr>
           <a:xfrm>
-            <a:off x="838200" y="6356350"/>
-            <a:ext cx="2743200" cy="365125"/>
+            <a:off x="457200" y="6356350"/>
+            <a:ext cx="2133600" cy="365125"/>
           </a:xfrm>
           <a:prstGeom prst="rect">
             <a:avLst/>
@@ -2916,30 +2714,24 @@
               <a:defRPr sz="1200">
                 <a:solidFill>
                   <a:schemeClr val="tx1">
-                    <a:tint val="82000"/>
+                    <a:tint val="75000"/>
                   </a:schemeClr>
                 </a:solidFill>
               </a:defRPr>
             </a:lvl1pPr>
           </a:lstStyle>
           <a:p>
-            <a:fld id="{7CD783A5-BC47-ED4D-84DA-4F8B01B4E4C0}" type="datetimeFigureOut">
-              <a:rPr lang="en-FR" smtClean="0"/>
-              <a:t>23/10/2025</a:t>
+            <a:fld id="{5BCAD085-E8A6-8845-BD4E-CB4CCA059FC4}" type="datetimeFigureOut">
+              <a:rPr lang="en-US" smtClean="0"/>
+              <a:t>1/27/13</a:t>
             </a:fld>
-            <a:endParaRPr lang="en-FR"/>
-          </a:p>
-        </p:txBody>
-      </p:sp>
-      <p:sp>
-        <p:nvSpPr>
-          <p:cNvPr id="5" name="Footer Placeholder 4">
-            <a:extLst>
-              <a:ext uri="{FF2B5EF4-FFF2-40B4-BE49-F238E27FC236}">
-                <a16:creationId xmlns:a16="http://schemas.microsoft.com/office/drawing/2014/main" id="{2E0DB32C-3124-5DEA-E1ED-579509CF0A74}"/>
-              </a:ext>
-            </a:extLst>
-          </p:cNvPr>
+            <a:endParaRPr lang="en-US"/>
+          </a:p>
+        </p:txBody>
+      </p:sp>
+      <p:sp>
+        <p:nvSpPr>
+          <p:cNvPr id="5" name="Footer Placeholder 4"/>
           <p:cNvSpPr>
             <a:spLocks noGrp="1"/>
           </p:cNvSpPr>
@@ -2949,8 +2741,8 @@
         </p:nvSpPr>
         <p:spPr>
           <a:xfrm>
-            <a:off x="4038600" y="6356350"/>
-            <a:ext cx="4114800" cy="365125"/>
+            <a:off x="3124200" y="6356350"/>
+            <a:ext cx="2895600" cy="365125"/>
           </a:xfrm>
           <a:prstGeom prst="rect">
             <a:avLst/>
@@ -2963,26 +2755,20 @@
               <a:defRPr sz="1200">
                 <a:solidFill>
                   <a:schemeClr val="tx1">
-                    <a:tint val="82000"/>
+                    <a:tint val="75000"/>
                   </a:schemeClr>
                 </a:solidFill>
               </a:defRPr>
             </a:lvl1pPr>
           </a:lstStyle>
           <a:p>
-            <a:endParaRPr lang="en-FR"/>
-          </a:p>
-        </p:txBody>
-      </p:sp>
-      <p:sp>
-        <p:nvSpPr>
-          <p:cNvPr id="6" name="Slide Number Placeholder 5">
-            <a:extLst>
-              <a:ext uri="{FF2B5EF4-FFF2-40B4-BE49-F238E27FC236}">
-                <a16:creationId xmlns:a16="http://schemas.microsoft.com/office/drawing/2014/main" id="{78730C34-B21D-3E71-1A61-836E14218D26}"/>
-              </a:ext>
-            </a:extLst>
-          </p:cNvPr>
+            <a:endParaRPr lang="en-US"/>
+          </a:p>
+        </p:txBody>
+      </p:sp>
+      <p:sp>
+        <p:nvSpPr>
+          <p:cNvPr id="6" name="Slide Number Placeholder 5"/>
           <p:cNvSpPr>
             <a:spLocks noGrp="1"/>
           </p:cNvSpPr>
@@ -2992,8 +2778,8 @@
         </p:nvSpPr>
         <p:spPr>
           <a:xfrm>
-            <a:off x="8610600" y="6356350"/>
-            <a:ext cx="2743200" cy="365125"/>
+            <a:off x="6553200" y="6356350"/>
+            <a:ext cx="2133600" cy="365125"/>
           </a:xfrm>
           <a:prstGeom prst="rect">
             <a:avLst/>
@@ -3006,25 +2792,25 @@
               <a:defRPr sz="1200">
                 <a:solidFill>
                   <a:schemeClr val="tx1">
-                    <a:tint val="82000"/>
+                    <a:tint val="75000"/>
                   </a:schemeClr>
                 </a:solidFill>
               </a:defRPr>
             </a:lvl1pPr>
           </a:lstStyle>
           <a:p>
-            <a:fld id="{7A684E51-FA75-6045-9327-F52E4E2EADA7}" type="slidenum">
-              <a:rPr lang="en-FR" smtClean="0"/>
+            <a:fld id="{C1FF6DA9-008F-8B48-92A6-B652298478BF}" type="slidenum">
+              <a:rPr lang="en-US" smtClean="0"/>
               <a:t>‹#›</a:t>
             </a:fld>
-            <a:endParaRPr lang="en-FR"/>
+            <a:endParaRPr lang="en-US"/>
           </a:p>
         </p:txBody>
       </p:sp>
     </p:spTree>
     <p:extLst>
       <p:ext uri="{BB962C8B-B14F-4D97-AF65-F5344CB8AC3E}">
-        <p14:creationId xmlns:p14="http://schemas.microsoft.com/office/powerpoint/2010/main" val="2280436035"/>
+        <p14:creationId xmlns:p14="http://schemas.microsoft.com/office/powerpoint/2010/main" val="2209977519"/>
       </p:ext>
     </p:extLst>
   </p:cSld>
@@ -3044,10 +2830,7 @@
   </p:sldLayoutIdLst>
   <p:txStyles>
     <p:titleStyle>
-      <a:lvl1pPr algn="l" defTabSz="914400" rtl="0" eaLnBrk="1" latinLnBrk="0" hangingPunct="1">
-        <a:lnSpc>
-          <a:spcPct val="90000"/>
-        </a:lnSpc>
+      <a:lvl1pPr algn="ctr" defTabSz="457200" rtl="0" eaLnBrk="1" latinLnBrk="0" hangingPunct="1">
         <a:spcBef>
           <a:spcPct val="0"/>
         </a:spcBef>
@@ -3063,15 +2846,27 @@
       </a:lvl1pPr>
     </p:titleStyle>
     <p:bodyStyle>
-      <a:lvl1pPr marL="228600" indent="-228600" algn="l" defTabSz="914400" rtl="0" eaLnBrk="1" latinLnBrk="0" hangingPunct="1">
-        <a:lnSpc>
-          <a:spcPct val="90000"/>
-        </a:lnSpc>
+      <a:lvl1pPr marL="342900" indent="-342900" algn="l" defTabSz="457200" rtl="0" eaLnBrk="1" latinLnBrk="0" hangingPunct="1">
         <a:spcBef>
-          <a:spcPts val="1000"/>
+          <a:spcPct val="20000"/>
         </a:spcBef>
-        <a:buFont typeface="Arial" panose="020B0604020202020204" pitchFamily="34" charset="0"/>
+        <a:buFont typeface="Arial"/>
         <a:buChar char="•"/>
+        <a:defRPr sz="3200" kern="1200">
+          <a:solidFill>
+            <a:schemeClr val="tx1"/>
+          </a:solidFill>
+          <a:latin typeface="+mn-lt"/>
+          <a:ea typeface="+mn-ea"/>
+          <a:cs typeface="+mn-cs"/>
+        </a:defRPr>
+      </a:lvl1pPr>
+      <a:lvl2pPr marL="742950" indent="-285750" algn="l" defTabSz="457200" rtl="0" eaLnBrk="1" latinLnBrk="0" hangingPunct="1">
+        <a:spcBef>
+          <a:spcPct val="20000"/>
+        </a:spcBef>
+        <a:buFont typeface="Arial"/>
+        <a:buChar char="–"/>
         <a:defRPr sz="2800" kern="1200">
           <a:solidFill>
             <a:schemeClr val="tx1"/>
@@ -3080,15 +2875,12 @@
           <a:ea typeface="+mn-ea"/>
           <a:cs typeface="+mn-cs"/>
         </a:defRPr>
-      </a:lvl1pPr>
-      <a:lvl2pPr marL="685800" indent="-228600" algn="l" defTabSz="914400" rtl="0" eaLnBrk="1" latinLnBrk="0" hangingPunct="1">
-        <a:lnSpc>
-          <a:spcPct val="90000"/>
-        </a:lnSpc>
+      </a:lvl2pPr>
+      <a:lvl3pPr marL="1143000" indent="-228600" algn="l" defTabSz="457200" rtl="0" eaLnBrk="1" latinLnBrk="0" hangingPunct="1">
         <a:spcBef>
-          <a:spcPts val="500"/>
+          <a:spcPct val="20000"/>
         </a:spcBef>
-        <a:buFont typeface="Arial" panose="020B0604020202020204" pitchFamily="34" charset="0"/>
+        <a:buFont typeface="Arial"/>
         <a:buChar char="•"/>
         <a:defRPr sz="2400" kern="1200">
           <a:solidFill>
@@ -3098,15 +2890,42 @@
           <a:ea typeface="+mn-ea"/>
           <a:cs typeface="+mn-cs"/>
         </a:defRPr>
-      </a:lvl2pPr>
-      <a:lvl3pPr marL="1143000" indent="-228600" algn="l" defTabSz="914400" rtl="0" eaLnBrk="1" latinLnBrk="0" hangingPunct="1">
-        <a:lnSpc>
-          <a:spcPct val="90000"/>
-        </a:lnSpc>
+      </a:lvl3pPr>
+      <a:lvl4pPr marL="1600200" indent="-228600" algn="l" defTabSz="457200" rtl="0" eaLnBrk="1" latinLnBrk="0" hangingPunct="1">
         <a:spcBef>
-          <a:spcPts val="500"/>
+          <a:spcPct val="20000"/>
         </a:spcBef>
-        <a:buFont typeface="Arial" panose="020B0604020202020204" pitchFamily="34" charset="0"/>
+        <a:buFont typeface="Arial"/>
+        <a:buChar char="–"/>
+        <a:defRPr sz="2000" kern="1200">
+          <a:solidFill>
+            <a:schemeClr val="tx1"/>
+          </a:solidFill>
+          <a:latin typeface="+mn-lt"/>
+          <a:ea typeface="+mn-ea"/>
+          <a:cs typeface="+mn-cs"/>
+        </a:defRPr>
+      </a:lvl4pPr>
+      <a:lvl5pPr marL="2057400" indent="-228600" algn="l" defTabSz="457200" rtl="0" eaLnBrk="1" latinLnBrk="0" hangingPunct="1">
+        <a:spcBef>
+          <a:spcPct val="20000"/>
+        </a:spcBef>
+        <a:buFont typeface="Arial"/>
+        <a:buChar char="»"/>
+        <a:defRPr sz="2000" kern="1200">
+          <a:solidFill>
+            <a:schemeClr val="tx1"/>
+          </a:solidFill>
+          <a:latin typeface="+mn-lt"/>
+          <a:ea typeface="+mn-ea"/>
+          <a:cs typeface="+mn-cs"/>
+        </a:defRPr>
+      </a:lvl5pPr>
+      <a:lvl6pPr marL="2514600" indent="-228600" algn="l" defTabSz="457200" rtl="0" eaLnBrk="1" latinLnBrk="0" hangingPunct="1">
+        <a:spcBef>
+          <a:spcPct val="20000"/>
+        </a:spcBef>
+        <a:buFont typeface="Arial"/>
         <a:buChar char="•"/>
         <a:defRPr sz="2000" kern="1200">
           <a:solidFill>
@@ -3116,71 +2935,14 @@
           <a:ea typeface="+mn-ea"/>
           <a:cs typeface="+mn-cs"/>
         </a:defRPr>
-      </a:lvl3pPr>
-      <a:lvl4pPr marL="1600200" indent="-228600" algn="l" defTabSz="914400" rtl="0" eaLnBrk="1" latinLnBrk="0" hangingPunct="1">
-        <a:lnSpc>
-          <a:spcPct val="90000"/>
-        </a:lnSpc>
+      </a:lvl6pPr>
+      <a:lvl7pPr marL="2971800" indent="-228600" algn="l" defTabSz="457200" rtl="0" eaLnBrk="1" latinLnBrk="0" hangingPunct="1">
         <a:spcBef>
-          <a:spcPts val="500"/>
+          <a:spcPct val="20000"/>
         </a:spcBef>
-        <a:buFont typeface="Arial" panose="020B0604020202020204" pitchFamily="34" charset="0"/>
+        <a:buFont typeface="Arial"/>
         <a:buChar char="•"/>
-        <a:defRPr sz="1800" kern="1200">
-          <a:solidFill>
-            <a:schemeClr val="tx1"/>
-          </a:solidFill>
-          <a:latin typeface="+mn-lt"/>
-          <a:ea typeface="+mn-ea"/>
-          <a:cs typeface="+mn-cs"/>
-        </a:defRPr>
-      </a:lvl4pPr>
-      <a:lvl5pPr marL="2057400" indent="-228600" algn="l" defTabSz="914400" rtl="0" eaLnBrk="1" latinLnBrk="0" hangingPunct="1">
-        <a:lnSpc>
-          <a:spcPct val="90000"/>
-        </a:lnSpc>
-        <a:spcBef>
-          <a:spcPts val="500"/>
-        </a:spcBef>
-        <a:buFont typeface="Arial" panose="020B0604020202020204" pitchFamily="34" charset="0"/>
-        <a:buChar char="•"/>
-        <a:defRPr sz="1800" kern="1200">
-          <a:solidFill>
-            <a:schemeClr val="tx1"/>
-          </a:solidFill>
-          <a:latin typeface="+mn-lt"/>
-          <a:ea typeface="+mn-ea"/>
-          <a:cs typeface="+mn-cs"/>
-        </a:defRPr>
-      </a:lvl5pPr>
-      <a:lvl6pPr marL="2514600" indent="-228600" algn="l" defTabSz="914400" rtl="0" eaLnBrk="1" latinLnBrk="0" hangingPunct="1">
-        <a:lnSpc>
-          <a:spcPct val="90000"/>
-        </a:lnSpc>
-        <a:spcBef>
-          <a:spcPts val="500"/>
-        </a:spcBef>
-        <a:buFont typeface="Arial" panose="020B0604020202020204" pitchFamily="34" charset="0"/>
-        <a:buChar char="•"/>
-        <a:defRPr sz="1800" kern="1200">
-          <a:solidFill>
-            <a:schemeClr val="tx1"/>
-          </a:solidFill>
-          <a:latin typeface="+mn-lt"/>
-          <a:ea typeface="+mn-ea"/>
-          <a:cs typeface="+mn-cs"/>
-        </a:defRPr>
-      </a:lvl6pPr>
-      <a:lvl7pPr marL="2971800" indent="-228600" algn="l" defTabSz="914400" rtl="0" eaLnBrk="1" latinLnBrk="0" hangingPunct="1">
-        <a:lnSpc>
-          <a:spcPct val="90000"/>
-        </a:lnSpc>
-        <a:spcBef>
-          <a:spcPts val="500"/>
-        </a:spcBef>
-        <a:buFont typeface="Arial" panose="020B0604020202020204" pitchFamily="34" charset="0"/>
-        <a:buChar char="•"/>
-        <a:defRPr sz="1800" kern="1200">
+        <a:defRPr sz="2000" kern="1200">
           <a:solidFill>
             <a:schemeClr val="tx1"/>
           </a:solidFill>
@@ -3189,16 +2951,13 @@
           <a:cs typeface="+mn-cs"/>
         </a:defRPr>
       </a:lvl7pPr>
-      <a:lvl8pPr marL="3429000" indent="-228600" algn="l" defTabSz="914400" rtl="0" eaLnBrk="1" latinLnBrk="0" hangingPunct="1">
-        <a:lnSpc>
-          <a:spcPct val="90000"/>
-        </a:lnSpc>
+      <a:lvl8pPr marL="3429000" indent="-228600" algn="l" defTabSz="457200" rtl="0" eaLnBrk="1" latinLnBrk="0" hangingPunct="1">
         <a:spcBef>
-          <a:spcPts val="500"/>
+          <a:spcPct val="20000"/>
         </a:spcBef>
-        <a:buFont typeface="Arial" panose="020B0604020202020204" pitchFamily="34" charset="0"/>
+        <a:buFont typeface="Arial"/>
         <a:buChar char="•"/>
-        <a:defRPr sz="1800" kern="1200">
+        <a:defRPr sz="2000" kern="1200">
           <a:solidFill>
             <a:schemeClr val="tx1"/>
           </a:solidFill>
@@ -3207,16 +2966,13 @@
           <a:cs typeface="+mn-cs"/>
         </a:defRPr>
       </a:lvl8pPr>
-      <a:lvl9pPr marL="3886200" indent="-228600" algn="l" defTabSz="914400" rtl="0" eaLnBrk="1" latinLnBrk="0" hangingPunct="1">
-        <a:lnSpc>
-          <a:spcPct val="90000"/>
-        </a:lnSpc>
+      <a:lvl9pPr marL="3886200" indent="-228600" algn="l" defTabSz="457200" rtl="0" eaLnBrk="1" latinLnBrk="0" hangingPunct="1">
         <a:spcBef>
-          <a:spcPts val="500"/>
+          <a:spcPct val="20000"/>
         </a:spcBef>
-        <a:buFont typeface="Arial" panose="020B0604020202020204" pitchFamily="34" charset="0"/>
+        <a:buFont typeface="Arial"/>
         <a:buChar char="•"/>
-        <a:defRPr sz="1800" kern="1200">
+        <a:defRPr sz="2000" kern="1200">
           <a:solidFill>
             <a:schemeClr val="tx1"/>
           </a:solidFill>
@@ -3228,9 +2984,9 @@
     </p:bodyStyle>
     <p:otherStyle>
       <a:defPPr>
-        <a:defRPr lang="en-FR"/>
+        <a:defRPr lang="en-US"/>
       </a:defPPr>
-      <a:lvl1pPr marL="0" algn="l" defTabSz="914400" rtl="0" eaLnBrk="1" latinLnBrk="0" hangingPunct="1">
+      <a:lvl1pPr marL="0" algn="l" defTabSz="457200" rtl="0" eaLnBrk="1" latinLnBrk="0" hangingPunct="1">
         <a:defRPr sz="1800" kern="1200">
           <a:solidFill>
             <a:schemeClr val="tx1"/>
@@ -3240,7 +2996,7 @@
           <a:cs typeface="+mn-cs"/>
         </a:defRPr>
       </a:lvl1pPr>
-      <a:lvl2pPr marL="457200" algn="l" defTabSz="914400" rtl="0" eaLnBrk="1" latinLnBrk="0" hangingPunct="1">
+      <a:lvl2pPr marL="457200" algn="l" defTabSz="457200" rtl="0" eaLnBrk="1" latinLnBrk="0" hangingPunct="1">
         <a:defRPr sz="1800" kern="1200">
           <a:solidFill>
             <a:schemeClr val="tx1"/>
@@ -3250,7 +3006,7 @@
           <a:cs typeface="+mn-cs"/>
         </a:defRPr>
       </a:lvl2pPr>
-      <a:lvl3pPr marL="914400" algn="l" defTabSz="914400" rtl="0" eaLnBrk="1" latinLnBrk="0" hangingPunct="1">
+      <a:lvl3pPr marL="914400" algn="l" defTabSz="457200" rtl="0" eaLnBrk="1" latinLnBrk="0" hangingPunct="1">
         <a:defRPr sz="1800" kern="1200">
           <a:solidFill>
             <a:schemeClr val="tx1"/>
@@ -3260,7 +3016,7 @@
           <a:cs typeface="+mn-cs"/>
         </a:defRPr>
       </a:lvl3pPr>
-      <a:lvl4pPr marL="1371600" algn="l" defTabSz="914400" rtl="0" eaLnBrk="1" latinLnBrk="0" hangingPunct="1">
+      <a:lvl4pPr marL="1371600" algn="l" defTabSz="457200" rtl="0" eaLnBrk="1" latinLnBrk="0" hangingPunct="1">
         <a:defRPr sz="1800" kern="1200">
           <a:solidFill>
             <a:schemeClr val="tx1"/>
@@ -3270,7 +3026,7 @@
           <a:cs typeface="+mn-cs"/>
         </a:defRPr>
       </a:lvl4pPr>
-      <a:lvl5pPr marL="1828800" algn="l" defTabSz="914400" rtl="0" eaLnBrk="1" latinLnBrk="0" hangingPunct="1">
+      <a:lvl5pPr marL="1828800" algn="l" defTabSz="457200" rtl="0" eaLnBrk="1" latinLnBrk="0" hangingPunct="1">
         <a:defRPr sz="1800" kern="1200">
           <a:solidFill>
             <a:schemeClr val="tx1"/>
@@ -3280,7 +3036,7 @@
           <a:cs typeface="+mn-cs"/>
         </a:defRPr>
       </a:lvl5pPr>
-      <a:lvl6pPr marL="2286000" algn="l" defTabSz="914400" rtl="0" eaLnBrk="1" latinLnBrk="0" hangingPunct="1">
+      <a:lvl6pPr marL="2286000" algn="l" defTabSz="457200" rtl="0" eaLnBrk="1" latinLnBrk="0" hangingPunct="1">
         <a:defRPr sz="1800" kern="1200">
           <a:solidFill>
             <a:schemeClr val="tx1"/>
@@ -3290,7 +3046,7 @@
           <a:cs typeface="+mn-cs"/>
         </a:defRPr>
       </a:lvl6pPr>
-      <a:lvl7pPr marL="2743200" algn="l" defTabSz="914400" rtl="0" eaLnBrk="1" latinLnBrk="0" hangingPunct="1">
+      <a:lvl7pPr marL="2743200" algn="l" defTabSz="457200" rtl="0" eaLnBrk="1" latinLnBrk="0" hangingPunct="1">
         <a:defRPr sz="1800" kern="1200">
           <a:solidFill>
             <a:schemeClr val="tx1"/>
@@ -3300,7 +3056,7 @@
           <a:cs typeface="+mn-cs"/>
         </a:defRPr>
       </a:lvl7pPr>
-      <a:lvl8pPr marL="3200400" algn="l" defTabSz="914400" rtl="0" eaLnBrk="1" latinLnBrk="0" hangingPunct="1">
+      <a:lvl8pPr marL="3200400" algn="l" defTabSz="457200" rtl="0" eaLnBrk="1" latinLnBrk="0" hangingPunct="1">
         <a:defRPr sz="1800" kern="1200">
           <a:solidFill>
             <a:schemeClr val="tx1"/>
@@ -3310,7 +3066,7 @@
           <a:cs typeface="+mn-cs"/>
         </a:defRPr>
       </a:lvl8pPr>
-      <a:lvl9pPr marL="3657600" algn="l" defTabSz="914400" rtl="0" eaLnBrk="1" latinLnBrk="0" hangingPunct="1">
+      <a:lvl9pPr marL="3657600" algn="l" defTabSz="457200" rtl="0" eaLnBrk="1" latinLnBrk="0" hangingPunct="1">
         <a:defRPr sz="1800" kern="1200">
           <a:solidFill>
             <a:schemeClr val="tx1"/>
@@ -3326,7 +3082,7 @@
 </file>
 
 <file path=ppt/slides/slide1.xml><?xml version="1.0" encoding="utf-8"?>
-<p:sld xmlns:a="http://schemas.openxmlformats.org/drawingml/2006/main" xmlns:r="http://schemas.openxmlformats.org/officeDocument/2006/relationships" xmlns:p="http://schemas.openxmlformats.org/presentationml/2006/main">
+<p:sld xmlns:a="http://schemas.openxmlformats.org/drawingml/2006/main" xmlns:p="http://schemas.openxmlformats.org/presentationml/2006/main" xmlns:r="http://schemas.openxmlformats.org/officeDocument/2006/relationships">
   <p:cSld>
     <p:spTree>
       <p:nvGrpSpPr>
@@ -3334,80 +3090,2923 @@
         <p:cNvGrpSpPr/>
         <p:nvPr/>
       </p:nvGrpSpPr>
-      <p:grpSpPr>
-        <a:xfrm>
-          <a:off x="0" y="0"/>
-          <a:ext cx="0" cy="0"/>
-          <a:chOff x="0" y="0"/>
-          <a:chExt cx="0" cy="0"/>
-        </a:xfrm>
-      </p:grpSpPr>
-      <p:sp>
-        <p:nvSpPr>
-          <p:cNvPr id="2" name="Title 1">
-            <a:extLst>
-              <a:ext uri="{FF2B5EF4-FFF2-40B4-BE49-F238E27FC236}">
-                <a16:creationId xmlns:a16="http://schemas.microsoft.com/office/drawing/2014/main" id="{04ACF0D9-94F5-8041-B449-561BE15A45AC}"/>
-              </a:ext>
-            </a:extLst>
-          </p:cNvPr>
-          <p:cNvSpPr>
-            <a:spLocks noGrp="1"/>
-          </p:cNvSpPr>
-          <p:nvPr>
-            <p:ph type="ctrTitle"/>
-          </p:nvPr>
-        </p:nvSpPr>
-        <p:spPr/>
-        <p:txBody>
-          <a:bodyPr/>
-          <a:lstStyle/>
-          <a:p>
-            <a:r>
-              <a:rPr lang="en-GB" dirty="0"/>
-              <a:t>M</a:t>
-            </a:r>
-            <a:r>
-              <a:rPr lang="en-FR" dirty="0"/>
-              <a:t>y presentation</a:t>
-            </a:r>
-          </a:p>
-        </p:txBody>
-      </p:sp>
-      <p:sp>
-        <p:nvSpPr>
-          <p:cNvPr id="3" name="Subtitle 2">
-            <a:extLst>
-              <a:ext uri="{FF2B5EF4-FFF2-40B4-BE49-F238E27FC236}">
-                <a16:creationId xmlns:a16="http://schemas.microsoft.com/office/drawing/2014/main" id="{F67D5A75-94B3-B72E-B925-A1ABAE11BC30}"/>
-              </a:ext>
-            </a:extLst>
-          </p:cNvPr>
-          <p:cNvSpPr>
-            <a:spLocks noGrp="1"/>
-          </p:cNvSpPr>
-          <p:nvPr>
-            <p:ph type="subTitle" idx="1"/>
-          </p:nvPr>
-        </p:nvSpPr>
-        <p:spPr/>
-        <p:txBody>
-          <a:bodyPr/>
-          <a:lstStyle/>
-          <a:p>
-            <a:r>
-              <a:rPr lang="en-FR" dirty="0"/>
-              <a:t>{{ here }}</a:t>
+      <p:grpSpPr/>
+      <p:sp>
+        <p:nvSpPr>
+          <p:cNvPr id="2" name="TextBox 1"/>
+          <p:cNvSpPr txBox="1"/>
+          <p:nvPr/>
+        </p:nvSpPr>
+        <p:spPr>
+          <a:xfrm>
+            <a:off x="720000" y="288000"/>
+            <a:ext cx="10752120" cy="180000"/>
+          </a:xfrm>
+          <a:prstGeom prst="rect">
+            <a:avLst/>
+          </a:prstGeom>
+          <a:noFill/>
+        </p:spPr>
+        <p:txBody>
+          <a:bodyPr wrap="square" lIns="0" rIns="0" tIns="0" bIns="0">
+            <a:spAutoFit/>
+          </a:bodyPr>
+          <a:lstStyle/>
+          <a:p>
+            <a:pPr algn="r"/>
+            <a:r>
+              <a:rPr sz="750" b="0">
+                <a:solidFill>
+                  <a:srgbClr val="5B6470"/>
+                </a:solidFill>
+                <a:latin typeface="Calibri"/>
+              </a:rPr>
+              <a:t>[Client name]  |  [Report title]</a:t>
+            </a:r>
+          </a:p>
+        </p:txBody>
+      </p:sp>
+      <p:cxnSp>
+        <p:nvCxnSpPr>
+          <p:cNvPr id="3" name="Connector 2"/>
+          <p:cNvCxnSpPr/>
+          <p:nvPr/>
+        </p:nvCxnSpPr>
+        <p:spPr>
+          <a:xfrm>
+            <a:off x="720000" y="504000"/>
+            <a:ext cx="10752120" cy="0"/>
+          </a:xfrm>
+          <a:prstGeom prst="line">
+            <a:avLst/>
+          </a:prstGeom>
+          <a:ln w="9525">
+            <a:solidFill>
+              <a:srgbClr val="B8892B"/>
+            </a:solidFill>
+          </a:ln>
+        </p:spPr>
+        <p:style>
+          <a:lnRef idx="2">
+            <a:schemeClr val="accent1"/>
+          </a:lnRef>
+          <a:fillRef idx="0">
+            <a:schemeClr val="accent1"/>
+          </a:fillRef>
+          <a:effectRef idx="1">
+            <a:schemeClr val="accent1"/>
+          </a:effectRef>
+          <a:fontRef idx="minor">
+            <a:schemeClr val="tx1"/>
+          </a:fontRef>
+        </p:style>
+      </p:cxnSp>
+      <p:sp>
+        <p:nvSpPr>
+          <p:cNvPr id="4" name="TextBox 3"/>
+          <p:cNvSpPr txBox="1"/>
+          <p:nvPr/>
+        </p:nvSpPr>
+        <p:spPr>
+          <a:xfrm>
+            <a:off x="720000" y="6426000"/>
+            <a:ext cx="10752120" cy="216000"/>
+          </a:xfrm>
+          <a:prstGeom prst="rect">
+            <a:avLst/>
+          </a:prstGeom>
+          <a:noFill/>
+        </p:spPr>
+        <p:txBody>
+          <a:bodyPr wrap="square" lIns="0" rIns="0" tIns="0" bIns="0">
+            <a:spAutoFit/>
+          </a:bodyPr>
+          <a:lstStyle/>
+          <a:p>
+            <a:pPr algn="ctr"/>
+            <a:r>
+              <a:rPr sz="750" b="0">
+                <a:solidFill>
+                  <a:srgbClr val="5B6470"/>
+                </a:solidFill>
+                <a:latin typeface="Calibri"/>
+              </a:rPr>
+              <a:t>Confidential. Goldline Consultancy Ltd, 124 City Road, London EC1V 2NX. Company number 10901798.  Page </a:t>
+            </a:r>
+            <a:fld id="{B6F15528-21DE-4FAA-801E-634DDDAF4B2B}" type="slidenum">
+              <a:rPr sz="950">
+                <a:solidFill>
+                  <a:srgbClr val="1B1F26"/>
+                </a:solidFill>
+                <a:latin typeface="Calibri"/>
+              </a:rPr>
+              <a:t>#</a:t>
+            </a:fld>
+          </a:p>
+        </p:txBody>
+      </p:sp>
+      <p:pic>
+        <p:nvPicPr>
+          <p:cNvPr id="5" name="Picture 4" descr="goldline-grc-mark.png"/>
+          <p:cNvPicPr>
+            <a:picLocks noChangeAspect="1"/>
+          </p:cNvPicPr>
+          <p:nvPr/>
+        </p:nvPicPr>
+        <p:blipFill>
+          <a:blip r:embed="rId2"/>
+          <a:stretch>
+            <a:fillRect/>
+          </a:stretch>
+        </p:blipFill>
+        <p:spPr>
+          <a:xfrm>
+            <a:off x="720000" y="720000"/>
+            <a:ext cx="720000" cy="720000"/>
+          </a:xfrm>
+          <a:prstGeom prst="rect">
+            <a:avLst/>
+          </a:prstGeom>
+        </p:spPr>
+      </p:pic>
+      <p:sp>
+        <p:nvSpPr>
+          <p:cNvPr id="6" name="TextBox 5"/>
+          <p:cNvSpPr txBox="1"/>
+          <p:nvPr/>
+        </p:nvSpPr>
+        <p:spPr>
+          <a:xfrm>
+            <a:off x="720000" y="1728000"/>
+            <a:ext cx="6480000" cy="216000"/>
+          </a:xfrm>
+          <a:prstGeom prst="rect">
+            <a:avLst/>
+          </a:prstGeom>
+          <a:noFill/>
+        </p:spPr>
+        <p:txBody>
+          <a:bodyPr wrap="square" lIns="0" rIns="0" tIns="0" bIns="0">
+            <a:spAutoFit/>
+          </a:bodyPr>
+          <a:lstStyle/>
+          <a:p>
+            <a:pPr algn="l"/>
+            <a:r>
+              <a:rPr sz="1000" b="1">
+                <a:solidFill>
+                  <a:srgbClr val="B8892B"/>
+                </a:solidFill>
+                <a:latin typeface="Calibri"/>
+              </a:rPr>
+              <a:t>COMPLIANCE ASSESSMENT</a:t>
+            </a:r>
+          </a:p>
+        </p:txBody>
+      </p:sp>
+      <p:sp>
+        <p:nvSpPr>
+          <p:cNvPr id="7" name="TextBox 6"/>
+          <p:cNvSpPr txBox="1"/>
+          <p:nvPr/>
+        </p:nvSpPr>
+        <p:spPr>
+          <a:xfrm>
+            <a:off x="720000" y="2016000"/>
+            <a:ext cx="6480000" cy="432000"/>
+          </a:xfrm>
+          <a:prstGeom prst="rect">
+            <a:avLst/>
+          </a:prstGeom>
+          <a:noFill/>
+        </p:spPr>
+        <p:txBody>
+          <a:bodyPr wrap="square" lIns="0" rIns="0" tIns="0" bIns="0">
+            <a:spAutoFit/>
+          </a:bodyPr>
+          <a:lstStyle/>
+          <a:p>
+            <a:pPr algn="l"/>
+            <a:r>
+              <a:rPr sz="2200" b="1">
+                <a:solidFill>
+                  <a:srgbClr val="0A1628"/>
+                </a:solidFill>
+                <a:latin typeface="Calibri"/>
+              </a:rPr>
+              <a:t>[Report title]</a:t>
+            </a:r>
+          </a:p>
+        </p:txBody>
+      </p:sp>
+      <p:sp>
+        <p:nvSpPr>
+          <p:cNvPr id="8" name="TextBox 7"/>
+          <p:cNvSpPr txBox="1"/>
+          <p:nvPr/>
+        </p:nvSpPr>
+        <p:spPr>
+          <a:xfrm>
+            <a:off x="720000" y="2484000"/>
+            <a:ext cx="6480000" cy="324000"/>
+          </a:xfrm>
+          <a:prstGeom prst="rect">
+            <a:avLst/>
+          </a:prstGeom>
+          <a:noFill/>
+        </p:spPr>
+        <p:txBody>
+          <a:bodyPr wrap="square" lIns="0" rIns="0" tIns="0" bIns="0">
+            <a:spAutoFit/>
+          </a:bodyPr>
+          <a:lstStyle/>
+          <a:p>
+            <a:pPr algn="l"/>
+            <a:r>
+              <a:rPr sz="1500" b="0">
+                <a:solidFill>
+                  <a:srgbClr val="0A1628"/>
+                </a:solidFill>
+                <a:latin typeface="Calibri"/>
+              </a:rPr>
+              <a:t>Mapped to ISO/IEC 27001:2022</a:t>
+            </a:r>
+          </a:p>
+        </p:txBody>
+      </p:sp>
+      <p:sp>
+        <p:nvSpPr>
+          <p:cNvPr id="9" name="TextBox 8"/>
+          <p:cNvSpPr txBox="1"/>
+          <p:nvPr/>
+        </p:nvSpPr>
+        <p:spPr>
+          <a:xfrm>
+            <a:off x="720000" y="2880000"/>
+            <a:ext cx="6480000" cy="252000"/>
+          </a:xfrm>
+          <a:prstGeom prst="rect">
+            <a:avLst/>
+          </a:prstGeom>
+          <a:noFill/>
+        </p:spPr>
+        <p:txBody>
+          <a:bodyPr wrap="square" lIns="0" rIns="0" tIns="0" bIns="0">
+            <a:spAutoFit/>
+          </a:bodyPr>
+          <a:lstStyle/>
+          <a:p>
+            <a:pPr algn="l"/>
+            <a:r>
+              <a:rPr sz="1250" b="1">
+                <a:solidFill>
+                  <a:srgbClr val="1B1F26"/>
+                </a:solidFill>
+                <a:latin typeface="Calibri"/>
+              </a:rPr>
+              <a:t>Executive summary</a:t>
+            </a:r>
+          </a:p>
+        </p:txBody>
+      </p:sp>
+      <p:cxnSp>
+        <p:nvCxnSpPr>
+          <p:cNvPr id="10" name="Connector 9"/>
+          <p:cNvCxnSpPr/>
+          <p:nvPr/>
+        </p:nvCxnSpPr>
+        <p:spPr>
+          <a:xfrm>
+            <a:off x="720000" y="3240000"/>
+            <a:ext cx="6480000" cy="0"/>
+          </a:xfrm>
+          <a:prstGeom prst="line">
+            <a:avLst/>
+          </a:prstGeom>
+          <a:ln w="25400">
+            <a:solidFill>
+              <a:srgbClr val="B8892B"/>
+            </a:solidFill>
+          </a:ln>
+        </p:spPr>
+        <p:style>
+          <a:lnRef idx="2">
+            <a:schemeClr val="accent1"/>
+          </a:lnRef>
+          <a:fillRef idx="0">
+            <a:schemeClr val="accent1"/>
+          </a:fillRef>
+          <a:effectRef idx="1">
+            <a:schemeClr val="accent1"/>
+          </a:effectRef>
+          <a:fontRef idx="minor">
+            <a:schemeClr val="tx1"/>
+          </a:fontRef>
+        </p:style>
+      </p:cxnSp>
+      <p:graphicFrame>
+        <p:nvGraphicFramePr>
+          <p:cNvPr id="11" name="Table 10"/>
+          <p:cNvGraphicFramePr>
+            <a:graphicFrameLocks noGrp="1"/>
+          </p:cNvGraphicFramePr>
+          <p:nvPr/>
+        </p:nvGraphicFramePr>
+        <p:xfrm>
+          <a:off x="7560000" y="1080000"/>
+          <a:ext cx="3888000" cy="1728000"/>
+        </p:xfrm>
+        <a:graphic>
+          <a:graphicData uri="http://schemas.openxmlformats.org/drawingml/2006/table">
+            <a:tbl>
+              <a:tblPr firstRow="0" bandRow="0">
+                <a:tableStyleId>{5940675A-B579-460E-94D1-54222C63F5DA}</a:tableStyleId>
+              </a:tblPr>
+              <a:tblGrid>
+                <a:gridCol w="1440000"/>
+                <a:gridCol w="2448000"/>
+              </a:tblGrid>
+              <a:tr h="288000">
+                <a:tc>
+                  <a:txBody>
+                    <a:bodyPr/>
+                    <a:lstStyle/>
+                    <a:p>
+                      <a:r>
+                        <a:rPr sz="900" b="1">
+                          <a:solidFill>
+                            <a:srgbClr val="1B1F26"/>
+                          </a:solidFill>
+                          <a:latin typeface="Calibri"/>
+                        </a:rPr>
+                        <a:t>Company assessed</a:t>
+                      </a:r>
+                    </a:p>
+                  </a:txBody>
+                  <a:tcPr marL="50800" marR="50800" marT="50800" marB="50800">
+                    <a:lnL w="6350" cmpd="sng">
+                      <a:solidFill>
+                        <a:srgbClr val="D9D3C4"/>
+                      </a:solidFill>
+                    </a:lnL>
+                    <a:lnR w="6350" cmpd="sng">
+                      <a:solidFill>
+                        <a:srgbClr val="D9D3C4"/>
+                      </a:solidFill>
+                    </a:lnR>
+                    <a:lnT w="6350" cmpd="sng">
+                      <a:solidFill>
+                        <a:srgbClr val="D9D3C4"/>
+                      </a:solidFill>
+                    </a:lnT>
+                    <a:lnB w="6350" cmpd="sng">
+                      <a:solidFill>
+                        <a:srgbClr val="D9D3C4"/>
+                      </a:solidFill>
+                    </a:lnB>
+                    <a:solidFill>
+                      <a:srgbClr val="F6F3EB"/>
+                    </a:solidFill>
+                  </a:tcPr>
+                </a:tc>
+                <a:tc>
+                  <a:txBody>
+                    <a:bodyPr/>
+                    <a:lstStyle/>
+                    <a:p>
+                      <a:r>
+                        <a:rPr sz="900" b="0">
+                          <a:solidFill>
+                            <a:srgbClr val="1B1F26"/>
+                          </a:solidFill>
+                          <a:latin typeface="Calibri"/>
+                        </a:rPr>
+                        <a:t>[Company assessed]</a:t>
+                      </a:r>
+                    </a:p>
+                  </a:txBody>
+                  <a:tcPr marL="50800" marR="50800" marT="50800" marB="50800">
+                    <a:lnL w="6350" cmpd="sng">
+                      <a:solidFill>
+                        <a:srgbClr val="D9D3C4"/>
+                      </a:solidFill>
+                    </a:lnL>
+                    <a:lnR w="6350" cmpd="sng">
+                      <a:solidFill>
+                        <a:srgbClr val="D9D3C4"/>
+                      </a:solidFill>
+                    </a:lnR>
+                    <a:lnT w="6350" cmpd="sng">
+                      <a:solidFill>
+                        <a:srgbClr val="D9D3C4"/>
+                      </a:solidFill>
+                    </a:lnT>
+                    <a:lnB w="6350" cmpd="sng">
+                      <a:solidFill>
+                        <a:srgbClr val="D9D3C4"/>
+                      </a:solidFill>
+                    </a:lnB>
+                    <a:solidFill>
+                      <a:srgbClr val="FFFFFF"/>
+                    </a:solidFill>
+                  </a:tcPr>
+                </a:tc>
+              </a:tr>
+              <a:tr h="288000">
+                <a:tc>
+                  <a:txBody>
+                    <a:bodyPr/>
+                    <a:lstStyle/>
+                    <a:p>
+                      <a:r>
+                        <a:rPr sz="900" b="1">
+                          <a:solidFill>
+                            <a:srgbClr val="1B1F26"/>
+                          </a:solidFill>
+                          <a:latin typeface="Calibri"/>
+                        </a:rPr>
+                        <a:t>Prepared for</a:t>
+                      </a:r>
+                    </a:p>
+                  </a:txBody>
+                  <a:tcPr marL="50800" marR="50800" marT="50800" marB="50800">
+                    <a:lnL w="6350" cmpd="sng">
+                      <a:solidFill>
+                        <a:srgbClr val="D9D3C4"/>
+                      </a:solidFill>
+                    </a:lnL>
+                    <a:lnR w="6350" cmpd="sng">
+                      <a:solidFill>
+                        <a:srgbClr val="D9D3C4"/>
+                      </a:solidFill>
+                    </a:lnR>
+                    <a:lnT w="6350" cmpd="sng">
+                      <a:solidFill>
+                        <a:srgbClr val="D9D3C4"/>
+                      </a:solidFill>
+                    </a:lnT>
+                    <a:lnB w="6350" cmpd="sng">
+                      <a:solidFill>
+                        <a:srgbClr val="D9D3C4"/>
+                      </a:solidFill>
+                    </a:lnB>
+                    <a:solidFill>
+                      <a:srgbClr val="F6F3EB"/>
+                    </a:solidFill>
+                  </a:tcPr>
+                </a:tc>
+                <a:tc>
+                  <a:txBody>
+                    <a:bodyPr/>
+                    <a:lstStyle/>
+                    <a:p>
+                      <a:r>
+                        <a:rPr sz="900" b="0">
+                          <a:solidFill>
+                            <a:srgbClr val="1B1F26"/>
+                          </a:solidFill>
+                          <a:latin typeface="Calibri"/>
+                        </a:rPr>
+                        <a:t>[Prepared for]</a:t>
+                      </a:r>
+                    </a:p>
+                  </a:txBody>
+                  <a:tcPr marL="50800" marR="50800" marT="50800" marB="50800">
+                    <a:lnL w="6350" cmpd="sng">
+                      <a:solidFill>
+                        <a:srgbClr val="D9D3C4"/>
+                      </a:solidFill>
+                    </a:lnL>
+                    <a:lnR w="6350" cmpd="sng">
+                      <a:solidFill>
+                        <a:srgbClr val="D9D3C4"/>
+                      </a:solidFill>
+                    </a:lnR>
+                    <a:lnT w="6350" cmpd="sng">
+                      <a:solidFill>
+                        <a:srgbClr val="D9D3C4"/>
+                      </a:solidFill>
+                    </a:lnT>
+                    <a:lnB w="6350" cmpd="sng">
+                      <a:solidFill>
+                        <a:srgbClr val="D9D3C4"/>
+                      </a:solidFill>
+                    </a:lnB>
+                    <a:solidFill>
+                      <a:srgbClr val="FFFFFF"/>
+                    </a:solidFill>
+                  </a:tcPr>
+                </a:tc>
+              </a:tr>
+              <a:tr h="288000">
+                <a:tc>
+                  <a:txBody>
+                    <a:bodyPr/>
+                    <a:lstStyle/>
+                    <a:p>
+                      <a:r>
+                        <a:rPr sz="900" b="1">
+                          <a:solidFill>
+                            <a:srgbClr val="1B1F26"/>
+                          </a:solidFill>
+                          <a:latin typeface="Calibri"/>
+                        </a:rPr>
+                        <a:t>Engagement</a:t>
+                      </a:r>
+                    </a:p>
+                  </a:txBody>
+                  <a:tcPr marL="50800" marR="50800" marT="50800" marB="50800">
+                    <a:lnL w="6350" cmpd="sng">
+                      <a:solidFill>
+                        <a:srgbClr val="D9D3C4"/>
+                      </a:solidFill>
+                    </a:lnL>
+                    <a:lnR w="6350" cmpd="sng">
+                      <a:solidFill>
+                        <a:srgbClr val="D9D3C4"/>
+                      </a:solidFill>
+                    </a:lnR>
+                    <a:lnT w="6350" cmpd="sng">
+                      <a:solidFill>
+                        <a:srgbClr val="D9D3C4"/>
+                      </a:solidFill>
+                    </a:lnT>
+                    <a:lnB w="6350" cmpd="sng">
+                      <a:solidFill>
+                        <a:srgbClr val="D9D3C4"/>
+                      </a:solidFill>
+                    </a:lnB>
+                    <a:solidFill>
+                      <a:srgbClr val="F6F3EB"/>
+                    </a:solidFill>
+                  </a:tcPr>
+                </a:tc>
+                <a:tc>
+                  <a:txBody>
+                    <a:bodyPr/>
+                    <a:lstStyle/>
+                    <a:p>
+                      <a:r>
+                        <a:rPr sz="900" b="0">
+                          <a:solidFill>
+                            <a:srgbClr val="1B1F26"/>
+                          </a:solidFill>
+                          <a:latin typeface="Calibri"/>
+                        </a:rPr>
+                        <a:t>[Engagement]</a:t>
+                      </a:r>
+                    </a:p>
+                  </a:txBody>
+                  <a:tcPr marL="50800" marR="50800" marT="50800" marB="50800">
+                    <a:lnL w="6350" cmpd="sng">
+                      <a:solidFill>
+                        <a:srgbClr val="D9D3C4"/>
+                      </a:solidFill>
+                    </a:lnL>
+                    <a:lnR w="6350" cmpd="sng">
+                      <a:solidFill>
+                        <a:srgbClr val="D9D3C4"/>
+                      </a:solidFill>
+                    </a:lnR>
+                    <a:lnT w="6350" cmpd="sng">
+                      <a:solidFill>
+                        <a:srgbClr val="D9D3C4"/>
+                      </a:solidFill>
+                    </a:lnT>
+                    <a:lnB w="6350" cmpd="sng">
+                      <a:solidFill>
+                        <a:srgbClr val="D9D3C4"/>
+                      </a:solidFill>
+                    </a:lnB>
+                    <a:solidFill>
+                      <a:srgbClr val="FFFFFF"/>
+                    </a:solidFill>
+                  </a:tcPr>
+                </a:tc>
+              </a:tr>
+              <a:tr h="288000">
+                <a:tc>
+                  <a:txBody>
+                    <a:bodyPr/>
+                    <a:lstStyle/>
+                    <a:p>
+                      <a:r>
+                        <a:rPr sz="900" b="1">
+                          <a:solidFill>
+                            <a:srgbClr val="1B1F26"/>
+                          </a:solidFill>
+                          <a:latin typeface="Calibri"/>
+                        </a:rPr>
+                        <a:t>Report date</a:t>
+                      </a:r>
+                    </a:p>
+                  </a:txBody>
+                  <a:tcPr marL="50800" marR="50800" marT="50800" marB="50800">
+                    <a:lnL w="6350" cmpd="sng">
+                      <a:solidFill>
+                        <a:srgbClr val="D9D3C4"/>
+                      </a:solidFill>
+                    </a:lnL>
+                    <a:lnR w="6350" cmpd="sng">
+                      <a:solidFill>
+                        <a:srgbClr val="D9D3C4"/>
+                      </a:solidFill>
+                    </a:lnR>
+                    <a:lnT w="6350" cmpd="sng">
+                      <a:solidFill>
+                        <a:srgbClr val="D9D3C4"/>
+                      </a:solidFill>
+                    </a:lnT>
+                    <a:lnB w="6350" cmpd="sng">
+                      <a:solidFill>
+                        <a:srgbClr val="D9D3C4"/>
+                      </a:solidFill>
+                    </a:lnB>
+                    <a:solidFill>
+                      <a:srgbClr val="F6F3EB"/>
+                    </a:solidFill>
+                  </a:tcPr>
+                </a:tc>
+                <a:tc>
+                  <a:txBody>
+                    <a:bodyPr/>
+                    <a:lstStyle/>
+                    <a:p>
+                      <a:r>
+                        <a:rPr sz="900" b="0">
+                          <a:solidFill>
+                            <a:srgbClr val="1B1F26"/>
+                          </a:solidFill>
+                          <a:latin typeface="Calibri"/>
+                        </a:rPr>
+                        <a:t>[Report date]</a:t>
+                      </a:r>
+                    </a:p>
+                  </a:txBody>
+                  <a:tcPr marL="50800" marR="50800" marT="50800" marB="50800">
+                    <a:lnL w="6350" cmpd="sng">
+                      <a:solidFill>
+                        <a:srgbClr val="D9D3C4"/>
+                      </a:solidFill>
+                    </a:lnL>
+                    <a:lnR w="6350" cmpd="sng">
+                      <a:solidFill>
+                        <a:srgbClr val="D9D3C4"/>
+                      </a:solidFill>
+                    </a:lnR>
+                    <a:lnT w="6350" cmpd="sng">
+                      <a:solidFill>
+                        <a:srgbClr val="D9D3C4"/>
+                      </a:solidFill>
+                    </a:lnT>
+                    <a:lnB w="6350" cmpd="sng">
+                      <a:solidFill>
+                        <a:srgbClr val="D9D3C4"/>
+                      </a:solidFill>
+                    </a:lnB>
+                    <a:solidFill>
+                      <a:srgbClr val="FFFFFF"/>
+                    </a:solidFill>
+                  </a:tcPr>
+                </a:tc>
+              </a:tr>
+              <a:tr h="288000">
+                <a:tc>
+                  <a:txBody>
+                    <a:bodyPr/>
+                    <a:lstStyle/>
+                    <a:p>
+                      <a:r>
+                        <a:rPr sz="900" b="1">
+                          <a:solidFill>
+                            <a:srgbClr val="1B1F26"/>
+                          </a:solidFill>
+                          <a:latin typeface="Calibri"/>
+                        </a:rPr>
+                        <a:t>Version</a:t>
+                      </a:r>
+                    </a:p>
+                  </a:txBody>
+                  <a:tcPr marL="50800" marR="50800" marT="50800" marB="50800">
+                    <a:lnL w="6350" cmpd="sng">
+                      <a:solidFill>
+                        <a:srgbClr val="D9D3C4"/>
+                      </a:solidFill>
+                    </a:lnL>
+                    <a:lnR w="6350" cmpd="sng">
+                      <a:solidFill>
+                        <a:srgbClr val="D9D3C4"/>
+                      </a:solidFill>
+                    </a:lnR>
+                    <a:lnT w="6350" cmpd="sng">
+                      <a:solidFill>
+                        <a:srgbClr val="D9D3C4"/>
+                      </a:solidFill>
+                    </a:lnT>
+                    <a:lnB w="6350" cmpd="sng">
+                      <a:solidFill>
+                        <a:srgbClr val="D9D3C4"/>
+                      </a:solidFill>
+                    </a:lnB>
+                    <a:solidFill>
+                      <a:srgbClr val="F6F3EB"/>
+                    </a:solidFill>
+                  </a:tcPr>
+                </a:tc>
+                <a:tc>
+                  <a:txBody>
+                    <a:bodyPr/>
+                    <a:lstStyle/>
+                    <a:p>
+                      <a:r>
+                        <a:rPr sz="900" b="0">
+                          <a:solidFill>
+                            <a:srgbClr val="1B1F26"/>
+                          </a:solidFill>
+                          <a:latin typeface="Calibri"/>
+                        </a:rPr>
+                        <a:t>[Version]</a:t>
+                      </a:r>
+                    </a:p>
+                  </a:txBody>
+                  <a:tcPr marL="50800" marR="50800" marT="50800" marB="50800">
+                    <a:lnL w="6350" cmpd="sng">
+                      <a:solidFill>
+                        <a:srgbClr val="D9D3C4"/>
+                      </a:solidFill>
+                    </a:lnL>
+                    <a:lnR w="6350" cmpd="sng">
+                      <a:solidFill>
+                        <a:srgbClr val="D9D3C4"/>
+                      </a:solidFill>
+                    </a:lnR>
+                    <a:lnT w="6350" cmpd="sng">
+                      <a:solidFill>
+                        <a:srgbClr val="D9D3C4"/>
+                      </a:solidFill>
+                    </a:lnT>
+                    <a:lnB w="6350" cmpd="sng">
+                      <a:solidFill>
+                        <a:srgbClr val="D9D3C4"/>
+                      </a:solidFill>
+                    </a:lnB>
+                    <a:solidFill>
+                      <a:srgbClr val="FFFFFF"/>
+                    </a:solidFill>
+                  </a:tcPr>
+                </a:tc>
+              </a:tr>
+              <a:tr h="288000">
+                <a:tc>
+                  <a:txBody>
+                    <a:bodyPr/>
+                    <a:lstStyle/>
+                    <a:p>
+                      <a:r>
+                        <a:rPr sz="900" b="1">
+                          <a:solidFill>
+                            <a:srgbClr val="1B1F26"/>
+                          </a:solidFill>
+                          <a:latin typeface="Calibri"/>
+                        </a:rPr>
+                        <a:t>Assessor</a:t>
+                      </a:r>
+                    </a:p>
+                  </a:txBody>
+                  <a:tcPr marL="50800" marR="50800" marT="50800" marB="50800">
+                    <a:lnL w="6350" cmpd="sng">
+                      <a:solidFill>
+                        <a:srgbClr val="D9D3C4"/>
+                      </a:solidFill>
+                    </a:lnL>
+                    <a:lnR w="6350" cmpd="sng">
+                      <a:solidFill>
+                        <a:srgbClr val="D9D3C4"/>
+                      </a:solidFill>
+                    </a:lnR>
+                    <a:lnT w="6350" cmpd="sng">
+                      <a:solidFill>
+                        <a:srgbClr val="D9D3C4"/>
+                      </a:solidFill>
+                    </a:lnT>
+                    <a:lnB w="6350" cmpd="sng">
+                      <a:solidFill>
+                        <a:srgbClr val="D9D3C4"/>
+                      </a:solidFill>
+                    </a:lnB>
+                    <a:solidFill>
+                      <a:srgbClr val="F6F3EB"/>
+                    </a:solidFill>
+                  </a:tcPr>
+                </a:tc>
+                <a:tc>
+                  <a:txBody>
+                    <a:bodyPr/>
+                    <a:lstStyle/>
+                    <a:p>
+                      <a:r>
+                        <a:rPr sz="900" b="0">
+                          <a:solidFill>
+                            <a:srgbClr val="1B1F26"/>
+                          </a:solidFill>
+                          <a:latin typeface="Calibri"/>
+                        </a:rPr>
+                        <a:t>Alfred Obeng, Goldline Consultancy Ltd. ISO/IEC 27001 Lead Auditor</a:t>
+                      </a:r>
+                    </a:p>
+                  </a:txBody>
+                  <a:tcPr marL="50800" marR="50800" marT="50800" marB="50800">
+                    <a:lnL w="6350" cmpd="sng">
+                      <a:solidFill>
+                        <a:srgbClr val="D9D3C4"/>
+                      </a:solidFill>
+                    </a:lnL>
+                    <a:lnR w="6350" cmpd="sng">
+                      <a:solidFill>
+                        <a:srgbClr val="D9D3C4"/>
+                      </a:solidFill>
+                    </a:lnR>
+                    <a:lnT w="6350" cmpd="sng">
+                      <a:solidFill>
+                        <a:srgbClr val="D9D3C4"/>
+                      </a:solidFill>
+                    </a:lnT>
+                    <a:lnB w="6350" cmpd="sng">
+                      <a:solidFill>
+                        <a:srgbClr val="D9D3C4"/>
+                      </a:solidFill>
+                    </a:lnB>
+                    <a:solidFill>
+                      <a:srgbClr val="FFFFFF"/>
+                    </a:solidFill>
+                  </a:tcPr>
+                </a:tc>
+              </a:tr>
+            </a:tbl>
+          </a:graphicData>
+        </a:graphic>
+      </p:graphicFrame>
+      <p:sp>
+        <p:nvSpPr>
+          <p:cNvPr id="12" name="TextBox 11"/>
+          <p:cNvSpPr txBox="1"/>
+          <p:nvPr/>
+        </p:nvSpPr>
+        <p:spPr>
+          <a:xfrm>
+            <a:off x="720000" y="3600000"/>
+            <a:ext cx="6480000" cy="720000"/>
+          </a:xfrm>
+          <a:prstGeom prst="rect">
+            <a:avLst/>
+          </a:prstGeom>
+          <a:noFill/>
+        </p:spPr>
+        <p:txBody>
+          <a:bodyPr wrap="square" lIns="0" rIns="0" tIns="0" bIns="0">
+            <a:spAutoFit/>
+          </a:bodyPr>
+          <a:lstStyle/>
+          <a:p>
+            <a:pPr algn="l"/>
+            <a:r>
+              <a:rPr sz="900" b="1">
+                <a:solidFill>
+                  <a:srgbClr val="1B1F26"/>
+                </a:solidFill>
+                <a:latin typeface="Calibri"/>
+              </a:rPr>
+              <a:t>Confidential working document.</a:t>
+            </a:r>
+            <a:r>
+              <a:rPr sz="900">
+                <a:solidFill>
+                  <a:srgbClr val="5B6470"/>
+                </a:solidFill>
+                <a:latin typeface="Calibri"/>
+              </a:rPr>
+              <a:t> Prepared for [Client name] and intended only for its management and auditors. Do not share it with third parties without written agreement from Goldline Consultancy Ltd. Governed by the law of England and Wales.</a:t>
             </a:r>
           </a:p>
         </p:txBody>
       </p:sp>
     </p:spTree>
-    <p:extLst>
-      <p:ext uri="{BB962C8B-B14F-4D97-AF65-F5344CB8AC3E}">
-        <p14:creationId xmlns:p14="http://schemas.microsoft.com/office/powerpoint/2010/main" val="2227980164"/>
-      </p:ext>
-    </p:extLst>
+  </p:cSld>
+  <p:clrMapOvr>
+    <a:masterClrMapping/>
+  </p:clrMapOvr>
+</p:sld>
+</file>
+
+<file path=ppt/slides/slide2.xml><?xml version="1.0" encoding="utf-8"?>
+<p:sld xmlns:a="http://schemas.openxmlformats.org/drawingml/2006/main" xmlns:p="http://schemas.openxmlformats.org/presentationml/2006/main" xmlns:r="http://schemas.openxmlformats.org/officeDocument/2006/relationships">
+  <p:cSld>
+    <p:spTree>
+      <p:nvGrpSpPr>
+        <p:cNvPr id="1" name=""/>
+        <p:cNvGrpSpPr/>
+        <p:nvPr/>
+      </p:nvGrpSpPr>
+      <p:grpSpPr/>
+      <p:sp>
+        <p:nvSpPr>
+          <p:cNvPr id="2" name="TextBox 1"/>
+          <p:cNvSpPr txBox="1"/>
+          <p:nvPr/>
+        </p:nvSpPr>
+        <p:spPr>
+          <a:xfrm>
+            <a:off x="720000" y="288000"/>
+            <a:ext cx="10752120" cy="180000"/>
+          </a:xfrm>
+          <a:prstGeom prst="rect">
+            <a:avLst/>
+          </a:prstGeom>
+          <a:noFill/>
+        </p:spPr>
+        <p:txBody>
+          <a:bodyPr wrap="square" lIns="0" rIns="0" tIns="0" bIns="0">
+            <a:spAutoFit/>
+          </a:bodyPr>
+          <a:lstStyle/>
+          <a:p>
+            <a:pPr algn="r"/>
+            <a:r>
+              <a:rPr sz="750" b="0">
+                <a:solidFill>
+                  <a:srgbClr val="5B6470"/>
+                </a:solidFill>
+                <a:latin typeface="Calibri"/>
+              </a:rPr>
+              <a:t>[Client name]  |  [Report title]</a:t>
+            </a:r>
+          </a:p>
+        </p:txBody>
+      </p:sp>
+      <p:cxnSp>
+        <p:nvCxnSpPr>
+          <p:cNvPr id="3" name="Connector 2"/>
+          <p:cNvCxnSpPr/>
+          <p:nvPr/>
+        </p:nvCxnSpPr>
+        <p:spPr>
+          <a:xfrm>
+            <a:off x="720000" y="504000"/>
+            <a:ext cx="10752120" cy="0"/>
+          </a:xfrm>
+          <a:prstGeom prst="line">
+            <a:avLst/>
+          </a:prstGeom>
+          <a:ln w="9525">
+            <a:solidFill>
+              <a:srgbClr val="B8892B"/>
+            </a:solidFill>
+          </a:ln>
+        </p:spPr>
+        <p:style>
+          <a:lnRef idx="2">
+            <a:schemeClr val="accent1"/>
+          </a:lnRef>
+          <a:fillRef idx="0">
+            <a:schemeClr val="accent1"/>
+          </a:fillRef>
+          <a:effectRef idx="1">
+            <a:schemeClr val="accent1"/>
+          </a:effectRef>
+          <a:fontRef idx="minor">
+            <a:schemeClr val="tx1"/>
+          </a:fontRef>
+        </p:style>
+      </p:cxnSp>
+      <p:sp>
+        <p:nvSpPr>
+          <p:cNvPr id="4" name="TextBox 3"/>
+          <p:cNvSpPr txBox="1"/>
+          <p:nvPr/>
+        </p:nvSpPr>
+        <p:spPr>
+          <a:xfrm>
+            <a:off x="720000" y="6426000"/>
+            <a:ext cx="10752120" cy="216000"/>
+          </a:xfrm>
+          <a:prstGeom prst="rect">
+            <a:avLst/>
+          </a:prstGeom>
+          <a:noFill/>
+        </p:spPr>
+        <p:txBody>
+          <a:bodyPr wrap="square" lIns="0" rIns="0" tIns="0" bIns="0">
+            <a:spAutoFit/>
+          </a:bodyPr>
+          <a:lstStyle/>
+          <a:p>
+            <a:pPr algn="ctr"/>
+            <a:r>
+              <a:rPr sz="750" b="0">
+                <a:solidFill>
+                  <a:srgbClr val="5B6470"/>
+                </a:solidFill>
+                <a:latin typeface="Calibri"/>
+              </a:rPr>
+              <a:t>Confidential. Goldline Consultancy Ltd, 124 City Road, London EC1V 2NX. Company number 10901798.  Page </a:t>
+            </a:r>
+            <a:fld id="{B6F15528-21DE-4FAA-801E-634DDDAF4B2B}" type="slidenum">
+              <a:rPr sz="950">
+                <a:solidFill>
+                  <a:srgbClr val="1B1F26"/>
+                </a:solidFill>
+                <a:latin typeface="Calibri"/>
+              </a:rPr>
+              <a:t>#</a:t>
+            </a:fld>
+          </a:p>
+        </p:txBody>
+      </p:sp>
+      <p:sp>
+        <p:nvSpPr>
+          <p:cNvPr id="5" name="TextBox 4"/>
+          <p:cNvSpPr txBox="1"/>
+          <p:nvPr/>
+        </p:nvSpPr>
+        <p:spPr>
+          <a:xfrm>
+            <a:off x="720000" y="720000"/>
+            <a:ext cx="10752120" cy="360000"/>
+          </a:xfrm>
+          <a:prstGeom prst="rect">
+            <a:avLst/>
+          </a:prstGeom>
+          <a:noFill/>
+        </p:spPr>
+        <p:txBody>
+          <a:bodyPr wrap="square" lIns="0" rIns="0" tIns="0" bIns="0">
+            <a:spAutoFit/>
+          </a:bodyPr>
+          <a:lstStyle/>
+          <a:p>
+            <a:pPr algn="l"/>
+            <a:r>
+              <a:rPr sz="1500" b="1">
+                <a:solidFill>
+                  <a:srgbClr val="0A1628"/>
+                </a:solidFill>
+                <a:latin typeface="Calibri"/>
+              </a:rPr>
+              <a:t>Contents</a:t>
+            </a:r>
+          </a:p>
+        </p:txBody>
+      </p:sp>
+      <p:sp>
+        <p:nvSpPr>
+          <p:cNvPr id="6" name="TextBox 5"/>
+          <p:cNvSpPr txBox="1"/>
+          <p:nvPr/>
+        </p:nvSpPr>
+        <p:spPr>
+          <a:xfrm>
+            <a:off x="720000" y="1296000"/>
+            <a:ext cx="7200000" cy="252000"/>
+          </a:xfrm>
+          <a:prstGeom prst="rect">
+            <a:avLst/>
+          </a:prstGeom>
+          <a:noFill/>
+        </p:spPr>
+        <p:txBody>
+          <a:bodyPr wrap="square" lIns="0" rIns="0" tIns="0" bIns="0">
+            <a:spAutoFit/>
+          </a:bodyPr>
+          <a:lstStyle/>
+          <a:p>
+            <a:pPr algn="l"/>
+            <a:r>
+              <a:rPr sz="1250" b="1">
+                <a:solidFill>
+                  <a:srgbClr val="1B1F26"/>
+                </a:solidFill>
+                <a:latin typeface="Calibri"/>
+              </a:rPr>
+              <a:t>1. Summary</a:t>
+            </a:r>
+          </a:p>
+        </p:txBody>
+      </p:sp>
+      <p:sp>
+        <p:nvSpPr>
+          <p:cNvPr id="7" name="TextBox 6"/>
+          <p:cNvSpPr txBox="1"/>
+          <p:nvPr/>
+        </p:nvSpPr>
+        <p:spPr>
+          <a:xfrm>
+            <a:off x="720000" y="1620000"/>
+            <a:ext cx="7200000" cy="252000"/>
+          </a:xfrm>
+          <a:prstGeom prst="rect">
+            <a:avLst/>
+          </a:prstGeom>
+          <a:noFill/>
+        </p:spPr>
+        <p:txBody>
+          <a:bodyPr wrap="square" lIns="0" rIns="0" tIns="0" bIns="0">
+            <a:spAutoFit/>
+          </a:bodyPr>
+          <a:lstStyle/>
+          <a:p>
+            <a:pPr algn="l"/>
+            <a:r>
+              <a:rPr sz="1250" b="1">
+                <a:solidFill>
+                  <a:srgbClr val="1B1F26"/>
+                </a:solidFill>
+                <a:latin typeface="Calibri"/>
+              </a:rPr>
+              <a:t>2. Findings</a:t>
+            </a:r>
+          </a:p>
+        </p:txBody>
+      </p:sp>
+      <p:sp>
+        <p:nvSpPr>
+          <p:cNvPr id="8" name="TextBox 7"/>
+          <p:cNvSpPr txBox="1"/>
+          <p:nvPr/>
+        </p:nvSpPr>
+        <p:spPr>
+          <a:xfrm>
+            <a:off x="720000" y="1944000"/>
+            <a:ext cx="7200000" cy="252000"/>
+          </a:xfrm>
+          <a:prstGeom prst="rect">
+            <a:avLst/>
+          </a:prstGeom>
+          <a:noFill/>
+        </p:spPr>
+        <p:txBody>
+          <a:bodyPr wrap="square" lIns="0" rIns="0" tIns="0" bIns="0">
+            <a:spAutoFit/>
+          </a:bodyPr>
+          <a:lstStyle/>
+          <a:p>
+            <a:pPr algn="l"/>
+            <a:r>
+              <a:rPr sz="1250" b="1">
+                <a:solidFill>
+                  <a:srgbClr val="1B1F26"/>
+                </a:solidFill>
+                <a:latin typeface="Calibri"/>
+              </a:rPr>
+              <a:t>3. Action plan</a:t>
+            </a:r>
+          </a:p>
+        </p:txBody>
+      </p:sp>
+      <p:sp>
+        <p:nvSpPr>
+          <p:cNvPr id="9" name="TextBox 8"/>
+          <p:cNvSpPr txBox="1"/>
+          <p:nvPr/>
+        </p:nvSpPr>
+        <p:spPr>
+          <a:xfrm>
+            <a:off x="720000" y="2268000"/>
+            <a:ext cx="7200000" cy="252000"/>
+          </a:xfrm>
+          <a:prstGeom prst="rect">
+            <a:avLst/>
+          </a:prstGeom>
+          <a:noFill/>
+        </p:spPr>
+        <p:txBody>
+          <a:bodyPr wrap="square" lIns="0" rIns="0" tIns="0" bIns="0">
+            <a:spAutoFit/>
+          </a:bodyPr>
+          <a:lstStyle/>
+          <a:p>
+            <a:pPr algn="l"/>
+            <a:r>
+              <a:rPr sz="1250" b="1">
+                <a:solidFill>
+                  <a:srgbClr val="1B1F26"/>
+                </a:solidFill>
+                <a:latin typeface="Calibri"/>
+              </a:rPr>
+              <a:t>4. Next steps</a:t>
+            </a:r>
+          </a:p>
+        </p:txBody>
+      </p:sp>
+    </p:spTree>
+  </p:cSld>
+  <p:clrMapOvr>
+    <a:masterClrMapping/>
+  </p:clrMapOvr>
+</p:sld>
+</file>
+
+<file path=ppt/slides/slide3.xml><?xml version="1.0" encoding="utf-8"?>
+<p:sld xmlns:a="http://schemas.openxmlformats.org/drawingml/2006/main" xmlns:p="http://schemas.openxmlformats.org/presentationml/2006/main" xmlns:r="http://schemas.openxmlformats.org/officeDocument/2006/relationships">
+  <p:cSld>
+    <p:spTree>
+      <p:nvGrpSpPr>
+        <p:cNvPr id="1" name=""/>
+        <p:cNvGrpSpPr/>
+        <p:nvPr/>
+      </p:nvGrpSpPr>
+      <p:grpSpPr/>
+      <p:sp>
+        <p:nvSpPr>
+          <p:cNvPr id="2" name="TextBox 1"/>
+          <p:cNvSpPr txBox="1"/>
+          <p:nvPr/>
+        </p:nvSpPr>
+        <p:spPr>
+          <a:xfrm>
+            <a:off x="720000" y="288000"/>
+            <a:ext cx="10752120" cy="180000"/>
+          </a:xfrm>
+          <a:prstGeom prst="rect">
+            <a:avLst/>
+          </a:prstGeom>
+          <a:noFill/>
+        </p:spPr>
+        <p:txBody>
+          <a:bodyPr wrap="square" lIns="0" rIns="0" tIns="0" bIns="0">
+            <a:spAutoFit/>
+          </a:bodyPr>
+          <a:lstStyle/>
+          <a:p>
+            <a:pPr algn="r"/>
+            <a:r>
+              <a:rPr sz="750" b="0">
+                <a:solidFill>
+                  <a:srgbClr val="5B6470"/>
+                </a:solidFill>
+                <a:latin typeface="Calibri"/>
+              </a:rPr>
+              <a:t>[Client name]  |  [Report title]</a:t>
+            </a:r>
+          </a:p>
+        </p:txBody>
+      </p:sp>
+      <p:cxnSp>
+        <p:nvCxnSpPr>
+          <p:cNvPr id="3" name="Connector 2"/>
+          <p:cNvCxnSpPr/>
+          <p:nvPr/>
+        </p:nvCxnSpPr>
+        <p:spPr>
+          <a:xfrm>
+            <a:off x="720000" y="504000"/>
+            <a:ext cx="10752120" cy="0"/>
+          </a:xfrm>
+          <a:prstGeom prst="line">
+            <a:avLst/>
+          </a:prstGeom>
+          <a:ln w="9525">
+            <a:solidFill>
+              <a:srgbClr val="B8892B"/>
+            </a:solidFill>
+          </a:ln>
+        </p:spPr>
+        <p:style>
+          <a:lnRef idx="2">
+            <a:schemeClr val="accent1"/>
+          </a:lnRef>
+          <a:fillRef idx="0">
+            <a:schemeClr val="accent1"/>
+          </a:fillRef>
+          <a:effectRef idx="1">
+            <a:schemeClr val="accent1"/>
+          </a:effectRef>
+          <a:fontRef idx="minor">
+            <a:schemeClr val="tx1"/>
+          </a:fontRef>
+        </p:style>
+      </p:cxnSp>
+      <p:sp>
+        <p:nvSpPr>
+          <p:cNvPr id="4" name="TextBox 3"/>
+          <p:cNvSpPr txBox="1"/>
+          <p:nvPr/>
+        </p:nvSpPr>
+        <p:spPr>
+          <a:xfrm>
+            <a:off x="720000" y="6426000"/>
+            <a:ext cx="10752120" cy="216000"/>
+          </a:xfrm>
+          <a:prstGeom prst="rect">
+            <a:avLst/>
+          </a:prstGeom>
+          <a:noFill/>
+        </p:spPr>
+        <p:txBody>
+          <a:bodyPr wrap="square" lIns="0" rIns="0" tIns="0" bIns="0">
+            <a:spAutoFit/>
+          </a:bodyPr>
+          <a:lstStyle/>
+          <a:p>
+            <a:pPr algn="ctr"/>
+            <a:r>
+              <a:rPr sz="750" b="0">
+                <a:solidFill>
+                  <a:srgbClr val="5B6470"/>
+                </a:solidFill>
+                <a:latin typeface="Calibri"/>
+              </a:rPr>
+              <a:t>Confidential. Goldline Consultancy Ltd, 124 City Road, London EC1V 2NX. Company number 10901798.  Page </a:t>
+            </a:r>
+            <a:fld id="{B6F15528-21DE-4FAA-801E-634DDDAF4B2B}" type="slidenum">
+              <a:rPr sz="950">
+                <a:solidFill>
+                  <a:srgbClr val="1B1F26"/>
+                </a:solidFill>
+                <a:latin typeface="Calibri"/>
+              </a:rPr>
+              <a:t>#</a:t>
+            </a:fld>
+          </a:p>
+        </p:txBody>
+      </p:sp>
+      <p:sp>
+        <p:nvSpPr>
+          <p:cNvPr id="5" name="TextBox 4"/>
+          <p:cNvSpPr txBox="1"/>
+          <p:nvPr/>
+        </p:nvSpPr>
+        <p:spPr>
+          <a:xfrm>
+            <a:off x="720000" y="720000"/>
+            <a:ext cx="10752120" cy="360000"/>
+          </a:xfrm>
+          <a:prstGeom prst="rect">
+            <a:avLst/>
+          </a:prstGeom>
+          <a:noFill/>
+        </p:spPr>
+        <p:txBody>
+          <a:bodyPr wrap="square" lIns="0" rIns="0" tIns="0" bIns="0">
+            <a:spAutoFit/>
+          </a:bodyPr>
+          <a:lstStyle/>
+          <a:p>
+            <a:pPr algn="l"/>
+            <a:r>
+              <a:rPr sz="1500" b="1">
+                <a:solidFill>
+                  <a:srgbClr val="0A1628"/>
+                </a:solidFill>
+                <a:latin typeface="Calibri"/>
+              </a:rPr>
+              <a:t>1. Summary</a:t>
+            </a:r>
+          </a:p>
+        </p:txBody>
+      </p:sp>
+      <p:sp>
+        <p:nvSpPr>
+          <p:cNvPr id="6" name="TextBox 5"/>
+          <p:cNvSpPr txBox="1"/>
+          <p:nvPr/>
+        </p:nvSpPr>
+        <p:spPr>
+          <a:xfrm>
+            <a:off x="720000" y="1188000"/>
+            <a:ext cx="10752120" cy="288000"/>
+          </a:xfrm>
+          <a:prstGeom prst="rect">
+            <a:avLst/>
+          </a:prstGeom>
+          <a:noFill/>
+        </p:spPr>
+        <p:txBody>
+          <a:bodyPr wrap="square" lIns="0" rIns="0" tIns="0" bIns="0">
+            <a:spAutoFit/>
+          </a:bodyPr>
+          <a:lstStyle/>
+          <a:p>
+            <a:pPr algn="l"/>
+            <a:r>
+              <a:rPr sz="1050" b="1">
+                <a:solidFill>
+                  <a:srgbClr val="1B1F26"/>
+                </a:solidFill>
+                <a:latin typeface="Calibri"/>
+              </a:rPr>
+              <a:t>What this covers:</a:t>
+            </a:r>
+            <a:r>
+              <a:rPr sz="1050">
+                <a:solidFill>
+                  <a:srgbClr val="5B6470"/>
+                </a:solidFill>
+                <a:latin typeface="Calibri"/>
+              </a:rPr>
+              <a:t> [one or two sentences on scope and overall position]</a:t>
+            </a:r>
+          </a:p>
+        </p:txBody>
+      </p:sp>
+      <p:graphicFrame>
+        <p:nvGraphicFramePr>
+          <p:cNvPr id="7" name="Table 6"/>
+          <p:cNvGraphicFramePr>
+            <a:graphicFrameLocks noGrp="1"/>
+          </p:cNvGraphicFramePr>
+          <p:nvPr/>
+        </p:nvGraphicFramePr>
+        <p:xfrm>
+          <a:off x="720000" y="1656000"/>
+          <a:ext cx="10746000" cy="576000"/>
+        </p:xfrm>
+        <a:graphic>
+          <a:graphicData uri="http://schemas.openxmlformats.org/drawingml/2006/table">
+            <a:tbl>
+              <a:tblPr firstRow="0" bandRow="0">
+                <a:tableStyleId>{5940675A-B579-460E-94D1-54222C63F5DA}</a:tableStyleId>
+              </a:tblPr>
+              <a:tblGrid>
+                <a:gridCol w="2149200"/>
+                <a:gridCol w="2149200"/>
+                <a:gridCol w="2149200"/>
+                <a:gridCol w="2149200"/>
+                <a:gridCol w="2149200"/>
+              </a:tblGrid>
+              <a:tr h="288000">
+                <a:tc>
+                  <a:txBody>
+                    <a:bodyPr/>
+                    <a:lstStyle/>
+                    <a:p>
+                      <a:r>
+                        <a:rPr sz="900" b="1">
+                          <a:solidFill>
+                            <a:srgbClr val="FFFFFF"/>
+                          </a:solidFill>
+                          <a:latin typeface="Calibri"/>
+                        </a:rPr>
+                        <a:t>Met</a:t>
+                      </a:r>
+                    </a:p>
+                  </a:txBody>
+                  <a:tcPr marL="50800" marR="50800" marT="50800" marB="50800">
+                    <a:lnL w="6350" cmpd="sng">
+                      <a:solidFill>
+                        <a:srgbClr val="D9D3C4"/>
+                      </a:solidFill>
+                    </a:lnL>
+                    <a:lnR w="6350" cmpd="sng">
+                      <a:solidFill>
+                        <a:srgbClr val="D9D3C4"/>
+                      </a:solidFill>
+                    </a:lnR>
+                    <a:lnT w="6350" cmpd="sng">
+                      <a:solidFill>
+                        <a:srgbClr val="D9D3C4"/>
+                      </a:solidFill>
+                    </a:lnT>
+                    <a:lnB w="6350" cmpd="sng">
+                      <a:solidFill>
+                        <a:srgbClr val="D9D3C4"/>
+                      </a:solidFill>
+                    </a:lnB>
+                    <a:solidFill>
+                      <a:srgbClr val="0A1628"/>
+                    </a:solidFill>
+                  </a:tcPr>
+                </a:tc>
+                <a:tc>
+                  <a:txBody>
+                    <a:bodyPr/>
+                    <a:lstStyle/>
+                    <a:p>
+                      <a:r>
+                        <a:rPr sz="900" b="1">
+                          <a:solidFill>
+                            <a:srgbClr val="FFFFFF"/>
+                          </a:solidFill>
+                          <a:latin typeface="Calibri"/>
+                        </a:rPr>
+                        <a:t>Partially met</a:t>
+                      </a:r>
+                    </a:p>
+                  </a:txBody>
+                  <a:tcPr marL="50800" marR="50800" marT="50800" marB="50800">
+                    <a:lnL w="6350" cmpd="sng">
+                      <a:solidFill>
+                        <a:srgbClr val="D9D3C4"/>
+                      </a:solidFill>
+                    </a:lnL>
+                    <a:lnR w="6350" cmpd="sng">
+                      <a:solidFill>
+                        <a:srgbClr val="D9D3C4"/>
+                      </a:solidFill>
+                    </a:lnR>
+                    <a:lnT w="6350" cmpd="sng">
+                      <a:solidFill>
+                        <a:srgbClr val="D9D3C4"/>
+                      </a:solidFill>
+                    </a:lnT>
+                    <a:lnB w="6350" cmpd="sng">
+                      <a:solidFill>
+                        <a:srgbClr val="D9D3C4"/>
+                      </a:solidFill>
+                    </a:lnB>
+                    <a:solidFill>
+                      <a:srgbClr val="0A1628"/>
+                    </a:solidFill>
+                  </a:tcPr>
+                </a:tc>
+                <a:tc>
+                  <a:txBody>
+                    <a:bodyPr/>
+                    <a:lstStyle/>
+                    <a:p>
+                      <a:r>
+                        <a:rPr sz="900" b="1">
+                          <a:solidFill>
+                            <a:srgbClr val="FFFFFF"/>
+                          </a:solidFill>
+                          <a:latin typeface="Calibri"/>
+                        </a:rPr>
+                        <a:t>Not met</a:t>
+                      </a:r>
+                    </a:p>
+                  </a:txBody>
+                  <a:tcPr marL="50800" marR="50800" marT="50800" marB="50800">
+                    <a:lnL w="6350" cmpd="sng">
+                      <a:solidFill>
+                        <a:srgbClr val="D9D3C4"/>
+                      </a:solidFill>
+                    </a:lnL>
+                    <a:lnR w="6350" cmpd="sng">
+                      <a:solidFill>
+                        <a:srgbClr val="D9D3C4"/>
+                      </a:solidFill>
+                    </a:lnR>
+                    <a:lnT w="6350" cmpd="sng">
+                      <a:solidFill>
+                        <a:srgbClr val="D9D3C4"/>
+                      </a:solidFill>
+                    </a:lnT>
+                    <a:lnB w="6350" cmpd="sng">
+                      <a:solidFill>
+                        <a:srgbClr val="D9D3C4"/>
+                      </a:solidFill>
+                    </a:lnB>
+                    <a:solidFill>
+                      <a:srgbClr val="0A1628"/>
+                    </a:solidFill>
+                  </a:tcPr>
+                </a:tc>
+                <a:tc>
+                  <a:txBody>
+                    <a:bodyPr/>
+                    <a:lstStyle/>
+                    <a:p>
+                      <a:r>
+                        <a:rPr sz="900" b="1">
+                          <a:solidFill>
+                            <a:srgbClr val="FFFFFF"/>
+                          </a:solidFill>
+                          <a:latin typeface="Calibri"/>
+                        </a:rPr>
+                        <a:t>Not applicable</a:t>
+                      </a:r>
+                    </a:p>
+                  </a:txBody>
+                  <a:tcPr marL="50800" marR="50800" marT="50800" marB="50800">
+                    <a:lnL w="6350" cmpd="sng">
+                      <a:solidFill>
+                        <a:srgbClr val="D9D3C4"/>
+                      </a:solidFill>
+                    </a:lnL>
+                    <a:lnR w="6350" cmpd="sng">
+                      <a:solidFill>
+                        <a:srgbClr val="D9D3C4"/>
+                      </a:solidFill>
+                    </a:lnR>
+                    <a:lnT w="6350" cmpd="sng">
+                      <a:solidFill>
+                        <a:srgbClr val="D9D3C4"/>
+                      </a:solidFill>
+                    </a:lnT>
+                    <a:lnB w="6350" cmpd="sng">
+                      <a:solidFill>
+                        <a:srgbClr val="D9D3C4"/>
+                      </a:solidFill>
+                    </a:lnB>
+                    <a:solidFill>
+                      <a:srgbClr val="0A1628"/>
+                    </a:solidFill>
+                  </a:tcPr>
+                </a:tc>
+                <a:tc>
+                  <a:txBody>
+                    <a:bodyPr/>
+                    <a:lstStyle/>
+                    <a:p>
+                      <a:r>
+                        <a:rPr sz="900" b="1">
+                          <a:solidFill>
+                            <a:srgbClr val="FFFFFF"/>
+                          </a:solidFill>
+                          <a:latin typeface="Calibri"/>
+                        </a:rPr>
+                        <a:t>Not assessed</a:t>
+                      </a:r>
+                    </a:p>
+                  </a:txBody>
+                  <a:tcPr marL="50800" marR="50800" marT="50800" marB="50800">
+                    <a:lnL w="6350" cmpd="sng">
+                      <a:solidFill>
+                        <a:srgbClr val="D9D3C4"/>
+                      </a:solidFill>
+                    </a:lnL>
+                    <a:lnR w="6350" cmpd="sng">
+                      <a:solidFill>
+                        <a:srgbClr val="D9D3C4"/>
+                      </a:solidFill>
+                    </a:lnR>
+                    <a:lnT w="6350" cmpd="sng">
+                      <a:solidFill>
+                        <a:srgbClr val="D9D3C4"/>
+                      </a:solidFill>
+                    </a:lnT>
+                    <a:lnB w="6350" cmpd="sng">
+                      <a:solidFill>
+                        <a:srgbClr val="D9D3C4"/>
+                      </a:solidFill>
+                    </a:lnB>
+                    <a:solidFill>
+                      <a:srgbClr val="0A1628"/>
+                    </a:solidFill>
+                  </a:tcPr>
+                </a:tc>
+              </a:tr>
+              <a:tr h="288000">
+                <a:tc>
+                  <a:txBody>
+                    <a:bodyPr/>
+                    <a:lstStyle/>
+                    <a:p>
+                      <a:r>
+                        <a:rPr sz="900" b="0">
+                          <a:solidFill>
+                            <a:srgbClr val="1B1F26"/>
+                          </a:solidFill>
+                          <a:latin typeface="Calibri"/>
+                        </a:rPr>
+                        <a:t>[n]</a:t>
+                      </a:r>
+                    </a:p>
+                  </a:txBody>
+                  <a:tcPr marL="50800" marR="50800" marT="50800" marB="50800">
+                    <a:lnL w="6350" cmpd="sng">
+                      <a:solidFill>
+                        <a:srgbClr val="D9D3C4"/>
+                      </a:solidFill>
+                    </a:lnL>
+                    <a:lnR w="6350" cmpd="sng">
+                      <a:solidFill>
+                        <a:srgbClr val="D9D3C4"/>
+                      </a:solidFill>
+                    </a:lnR>
+                    <a:lnT w="6350" cmpd="sng">
+                      <a:solidFill>
+                        <a:srgbClr val="D9D3C4"/>
+                      </a:solidFill>
+                    </a:lnT>
+                    <a:lnB w="6350" cmpd="sng">
+                      <a:solidFill>
+                        <a:srgbClr val="D9D3C4"/>
+                      </a:solidFill>
+                    </a:lnB>
+                    <a:solidFill>
+                      <a:srgbClr val="C6EFCE"/>
+                    </a:solidFill>
+                  </a:tcPr>
+                </a:tc>
+                <a:tc>
+                  <a:txBody>
+                    <a:bodyPr/>
+                    <a:lstStyle/>
+                    <a:p>
+                      <a:r>
+                        <a:rPr sz="900" b="0">
+                          <a:solidFill>
+                            <a:srgbClr val="1B1F26"/>
+                          </a:solidFill>
+                          <a:latin typeface="Calibri"/>
+                        </a:rPr>
+                        <a:t>[n]</a:t>
+                      </a:r>
+                    </a:p>
+                  </a:txBody>
+                  <a:tcPr marL="50800" marR="50800" marT="50800" marB="50800">
+                    <a:lnL w="6350" cmpd="sng">
+                      <a:solidFill>
+                        <a:srgbClr val="D9D3C4"/>
+                      </a:solidFill>
+                    </a:lnL>
+                    <a:lnR w="6350" cmpd="sng">
+                      <a:solidFill>
+                        <a:srgbClr val="D9D3C4"/>
+                      </a:solidFill>
+                    </a:lnR>
+                    <a:lnT w="6350" cmpd="sng">
+                      <a:solidFill>
+                        <a:srgbClr val="D9D3C4"/>
+                      </a:solidFill>
+                    </a:lnT>
+                    <a:lnB w="6350" cmpd="sng">
+                      <a:solidFill>
+                        <a:srgbClr val="D9D3C4"/>
+                      </a:solidFill>
+                    </a:lnB>
+                    <a:solidFill>
+                      <a:srgbClr val="FFEB9C"/>
+                    </a:solidFill>
+                  </a:tcPr>
+                </a:tc>
+                <a:tc>
+                  <a:txBody>
+                    <a:bodyPr/>
+                    <a:lstStyle/>
+                    <a:p>
+                      <a:r>
+                        <a:rPr sz="900" b="0">
+                          <a:solidFill>
+                            <a:srgbClr val="1B1F26"/>
+                          </a:solidFill>
+                          <a:latin typeface="Calibri"/>
+                        </a:rPr>
+                        <a:t>[n]</a:t>
+                      </a:r>
+                    </a:p>
+                  </a:txBody>
+                  <a:tcPr marL="50800" marR="50800" marT="50800" marB="50800">
+                    <a:lnL w="6350" cmpd="sng">
+                      <a:solidFill>
+                        <a:srgbClr val="D9D3C4"/>
+                      </a:solidFill>
+                    </a:lnL>
+                    <a:lnR w="6350" cmpd="sng">
+                      <a:solidFill>
+                        <a:srgbClr val="D9D3C4"/>
+                      </a:solidFill>
+                    </a:lnR>
+                    <a:lnT w="6350" cmpd="sng">
+                      <a:solidFill>
+                        <a:srgbClr val="D9D3C4"/>
+                      </a:solidFill>
+                    </a:lnT>
+                    <a:lnB w="6350" cmpd="sng">
+                      <a:solidFill>
+                        <a:srgbClr val="D9D3C4"/>
+                      </a:solidFill>
+                    </a:lnB>
+                    <a:solidFill>
+                      <a:srgbClr val="FFC7CE"/>
+                    </a:solidFill>
+                  </a:tcPr>
+                </a:tc>
+                <a:tc>
+                  <a:txBody>
+                    <a:bodyPr/>
+                    <a:lstStyle/>
+                    <a:p>
+                      <a:r>
+                        <a:rPr sz="900" b="0">
+                          <a:solidFill>
+                            <a:srgbClr val="1B1F26"/>
+                          </a:solidFill>
+                          <a:latin typeface="Calibri"/>
+                        </a:rPr>
+                        <a:t>[n]</a:t>
+                      </a:r>
+                    </a:p>
+                  </a:txBody>
+                  <a:tcPr marL="50800" marR="50800" marT="50800" marB="50800">
+                    <a:lnL w="6350" cmpd="sng">
+                      <a:solidFill>
+                        <a:srgbClr val="D9D3C4"/>
+                      </a:solidFill>
+                    </a:lnL>
+                    <a:lnR w="6350" cmpd="sng">
+                      <a:solidFill>
+                        <a:srgbClr val="D9D3C4"/>
+                      </a:solidFill>
+                    </a:lnR>
+                    <a:lnT w="6350" cmpd="sng">
+                      <a:solidFill>
+                        <a:srgbClr val="D9D3C4"/>
+                      </a:solidFill>
+                    </a:lnT>
+                    <a:lnB w="6350" cmpd="sng">
+                      <a:solidFill>
+                        <a:srgbClr val="D9D3C4"/>
+                      </a:solidFill>
+                    </a:lnB>
+                    <a:solidFill>
+                      <a:srgbClr val="E7E6E6"/>
+                    </a:solidFill>
+                  </a:tcPr>
+                </a:tc>
+                <a:tc>
+                  <a:txBody>
+                    <a:bodyPr/>
+                    <a:lstStyle/>
+                    <a:p>
+                      <a:r>
+                        <a:rPr sz="900" b="0">
+                          <a:solidFill>
+                            <a:srgbClr val="1B1F26"/>
+                          </a:solidFill>
+                          <a:latin typeface="Calibri"/>
+                        </a:rPr>
+                        <a:t>[n]</a:t>
+                      </a:r>
+                    </a:p>
+                  </a:txBody>
+                  <a:tcPr marL="50800" marR="50800" marT="50800" marB="50800">
+                    <a:lnL w="6350" cmpd="sng">
+                      <a:solidFill>
+                        <a:srgbClr val="D9D3C4"/>
+                      </a:solidFill>
+                    </a:lnL>
+                    <a:lnR w="6350" cmpd="sng">
+                      <a:solidFill>
+                        <a:srgbClr val="D9D3C4"/>
+                      </a:solidFill>
+                    </a:lnR>
+                    <a:lnT w="6350" cmpd="sng">
+                      <a:solidFill>
+                        <a:srgbClr val="D9D3C4"/>
+                      </a:solidFill>
+                    </a:lnT>
+                    <a:lnB w="6350" cmpd="sng">
+                      <a:solidFill>
+                        <a:srgbClr val="D9D3C4"/>
+                      </a:solidFill>
+                    </a:lnB>
+                    <a:solidFill>
+                      <a:srgbClr val="E7E6E6"/>
+                    </a:solidFill>
+                  </a:tcPr>
+                </a:tc>
+              </a:tr>
+            </a:tbl>
+          </a:graphicData>
+        </a:graphic>
+      </p:graphicFrame>
+    </p:spTree>
+  </p:cSld>
+  <p:clrMapOvr>
+    <a:masterClrMapping/>
+  </p:clrMapOvr>
+</p:sld>
+</file>
+
+<file path=ppt/slides/slide4.xml><?xml version="1.0" encoding="utf-8"?>
+<p:sld xmlns:a="http://schemas.openxmlformats.org/drawingml/2006/main" xmlns:p="http://schemas.openxmlformats.org/presentationml/2006/main" xmlns:r="http://schemas.openxmlformats.org/officeDocument/2006/relationships">
+  <p:cSld>
+    <p:spTree>
+      <p:nvGrpSpPr>
+        <p:cNvPr id="1" name=""/>
+        <p:cNvGrpSpPr/>
+        <p:nvPr/>
+      </p:nvGrpSpPr>
+      <p:grpSpPr/>
+      <p:sp>
+        <p:nvSpPr>
+          <p:cNvPr id="2" name="TextBox 1"/>
+          <p:cNvSpPr txBox="1"/>
+          <p:nvPr/>
+        </p:nvSpPr>
+        <p:spPr>
+          <a:xfrm>
+            <a:off x="720000" y="288000"/>
+            <a:ext cx="10752120" cy="180000"/>
+          </a:xfrm>
+          <a:prstGeom prst="rect">
+            <a:avLst/>
+          </a:prstGeom>
+          <a:noFill/>
+        </p:spPr>
+        <p:txBody>
+          <a:bodyPr wrap="square" lIns="0" rIns="0" tIns="0" bIns="0">
+            <a:spAutoFit/>
+          </a:bodyPr>
+          <a:lstStyle/>
+          <a:p>
+            <a:pPr algn="r"/>
+            <a:r>
+              <a:rPr sz="750" b="0">
+                <a:solidFill>
+                  <a:srgbClr val="5B6470"/>
+                </a:solidFill>
+                <a:latin typeface="Calibri"/>
+              </a:rPr>
+              <a:t>[Client name]  |  [Report title]</a:t>
+            </a:r>
+          </a:p>
+        </p:txBody>
+      </p:sp>
+      <p:cxnSp>
+        <p:nvCxnSpPr>
+          <p:cNvPr id="3" name="Connector 2"/>
+          <p:cNvCxnSpPr/>
+          <p:nvPr/>
+        </p:nvCxnSpPr>
+        <p:spPr>
+          <a:xfrm>
+            <a:off x="720000" y="504000"/>
+            <a:ext cx="10752120" cy="0"/>
+          </a:xfrm>
+          <a:prstGeom prst="line">
+            <a:avLst/>
+          </a:prstGeom>
+          <a:ln w="9525">
+            <a:solidFill>
+              <a:srgbClr val="B8892B"/>
+            </a:solidFill>
+          </a:ln>
+        </p:spPr>
+        <p:style>
+          <a:lnRef idx="2">
+            <a:schemeClr val="accent1"/>
+          </a:lnRef>
+          <a:fillRef idx="0">
+            <a:schemeClr val="accent1"/>
+          </a:fillRef>
+          <a:effectRef idx="1">
+            <a:schemeClr val="accent1"/>
+          </a:effectRef>
+          <a:fontRef idx="minor">
+            <a:schemeClr val="tx1"/>
+          </a:fontRef>
+        </p:style>
+      </p:cxnSp>
+      <p:sp>
+        <p:nvSpPr>
+          <p:cNvPr id="4" name="TextBox 3"/>
+          <p:cNvSpPr txBox="1"/>
+          <p:nvPr/>
+        </p:nvSpPr>
+        <p:spPr>
+          <a:xfrm>
+            <a:off x="720000" y="6426000"/>
+            <a:ext cx="10752120" cy="216000"/>
+          </a:xfrm>
+          <a:prstGeom prst="rect">
+            <a:avLst/>
+          </a:prstGeom>
+          <a:noFill/>
+        </p:spPr>
+        <p:txBody>
+          <a:bodyPr wrap="square" lIns="0" rIns="0" tIns="0" bIns="0">
+            <a:spAutoFit/>
+          </a:bodyPr>
+          <a:lstStyle/>
+          <a:p>
+            <a:pPr algn="ctr"/>
+            <a:r>
+              <a:rPr sz="750" b="0">
+                <a:solidFill>
+                  <a:srgbClr val="5B6470"/>
+                </a:solidFill>
+                <a:latin typeface="Calibri"/>
+              </a:rPr>
+              <a:t>Confidential. Goldline Consultancy Ltd, 124 City Road, London EC1V 2NX. Company number 10901798.  Page </a:t>
+            </a:r>
+            <a:fld id="{B6F15528-21DE-4FAA-801E-634DDDAF4B2B}" type="slidenum">
+              <a:rPr sz="950">
+                <a:solidFill>
+                  <a:srgbClr val="1B1F26"/>
+                </a:solidFill>
+                <a:latin typeface="Calibri"/>
+              </a:rPr>
+              <a:t>#</a:t>
+            </a:fld>
+          </a:p>
+        </p:txBody>
+      </p:sp>
+      <p:sp>
+        <p:nvSpPr>
+          <p:cNvPr id="5" name="TextBox 4"/>
+          <p:cNvSpPr txBox="1"/>
+          <p:nvPr/>
+        </p:nvSpPr>
+        <p:spPr>
+          <a:xfrm>
+            <a:off x="720000" y="720000"/>
+            <a:ext cx="10752120" cy="360000"/>
+          </a:xfrm>
+          <a:prstGeom prst="rect">
+            <a:avLst/>
+          </a:prstGeom>
+          <a:noFill/>
+        </p:spPr>
+        <p:txBody>
+          <a:bodyPr wrap="square" lIns="0" rIns="0" tIns="0" bIns="0">
+            <a:spAutoFit/>
+          </a:bodyPr>
+          <a:lstStyle/>
+          <a:p>
+            <a:pPr algn="l"/>
+            <a:r>
+              <a:rPr sz="1500" b="1">
+                <a:solidFill>
+                  <a:srgbClr val="0A1628"/>
+                </a:solidFill>
+                <a:latin typeface="Calibri"/>
+              </a:rPr>
+              <a:t>2. Findings</a:t>
+            </a:r>
+          </a:p>
+        </p:txBody>
+      </p:sp>
+      <p:graphicFrame>
+        <p:nvGraphicFramePr>
+          <p:cNvPr id="6" name="Table 5"/>
+          <p:cNvGraphicFramePr>
+            <a:graphicFrameLocks noGrp="1"/>
+          </p:cNvGraphicFramePr>
+          <p:nvPr/>
+        </p:nvGraphicFramePr>
+        <p:xfrm>
+          <a:off x="720000" y="1224000"/>
+          <a:ext cx="10753200" cy="1440000"/>
+        </p:xfrm>
+        <a:graphic>
+          <a:graphicData uri="http://schemas.openxmlformats.org/drawingml/2006/table">
+            <a:tbl>
+              <a:tblPr firstRow="0" bandRow="0">
+                <a:tableStyleId>{5940675A-B579-460E-94D1-54222C63F5DA}</a:tableStyleId>
+              </a:tblPr>
+              <a:tblGrid>
+                <a:gridCol w="1440000"/>
+                <a:gridCol w="3240000"/>
+                <a:gridCol w="4680000"/>
+                <a:gridCol w="1393200"/>
+              </a:tblGrid>
+              <a:tr h="288000">
+                <a:tc>
+                  <a:txBody>
+                    <a:bodyPr/>
+                    <a:lstStyle/>
+                    <a:p>
+                      <a:r>
+                        <a:rPr sz="900" b="1">
+                          <a:solidFill>
+                            <a:srgbClr val="FFFFFF"/>
+                          </a:solidFill>
+                          <a:latin typeface="Calibri"/>
+                        </a:rPr>
+                        <a:t>ISO 27001 reference</a:t>
+                      </a:r>
+                    </a:p>
+                  </a:txBody>
+                  <a:tcPr marL="50800" marR="50800" marT="50800" marB="50800">
+                    <a:lnL w="6350" cmpd="sng">
+                      <a:solidFill>
+                        <a:srgbClr val="D9D3C4"/>
+                      </a:solidFill>
+                    </a:lnL>
+                    <a:lnR w="6350" cmpd="sng">
+                      <a:solidFill>
+                        <a:srgbClr val="D9D3C4"/>
+                      </a:solidFill>
+                    </a:lnR>
+                    <a:lnT w="6350" cmpd="sng">
+                      <a:solidFill>
+                        <a:srgbClr val="D9D3C4"/>
+                      </a:solidFill>
+                    </a:lnT>
+                    <a:lnB w="6350" cmpd="sng">
+                      <a:solidFill>
+                        <a:srgbClr val="D9D3C4"/>
+                      </a:solidFill>
+                    </a:lnB>
+                    <a:solidFill>
+                      <a:srgbClr val="0A1628"/>
+                    </a:solidFill>
+                  </a:tcPr>
+                </a:tc>
+                <a:tc>
+                  <a:txBody>
+                    <a:bodyPr/>
+                    <a:lstStyle/>
+                    <a:p>
+                      <a:r>
+                        <a:rPr sz="900" b="1">
+                          <a:solidFill>
+                            <a:srgbClr val="FFFFFF"/>
+                          </a:solidFill>
+                          <a:latin typeface="Calibri"/>
+                        </a:rPr>
+                        <a:t>Requirement</a:t>
+                      </a:r>
+                    </a:p>
+                  </a:txBody>
+                  <a:tcPr marL="50800" marR="50800" marT="50800" marB="50800">
+                    <a:lnL w="6350" cmpd="sng">
+                      <a:solidFill>
+                        <a:srgbClr val="D9D3C4"/>
+                      </a:solidFill>
+                    </a:lnL>
+                    <a:lnR w="6350" cmpd="sng">
+                      <a:solidFill>
+                        <a:srgbClr val="D9D3C4"/>
+                      </a:solidFill>
+                    </a:lnR>
+                    <a:lnT w="6350" cmpd="sng">
+                      <a:solidFill>
+                        <a:srgbClr val="D9D3C4"/>
+                      </a:solidFill>
+                    </a:lnT>
+                    <a:lnB w="6350" cmpd="sng">
+                      <a:solidFill>
+                        <a:srgbClr val="D9D3C4"/>
+                      </a:solidFill>
+                    </a:lnB>
+                    <a:solidFill>
+                      <a:srgbClr val="0A1628"/>
+                    </a:solidFill>
+                  </a:tcPr>
+                </a:tc>
+                <a:tc>
+                  <a:txBody>
+                    <a:bodyPr/>
+                    <a:lstStyle/>
+                    <a:p>
+                      <a:r>
+                        <a:rPr sz="900" b="1">
+                          <a:solidFill>
+                            <a:srgbClr val="FFFFFF"/>
+                          </a:solidFill>
+                          <a:latin typeface="Calibri"/>
+                        </a:rPr>
+                        <a:t>Observation</a:t>
+                      </a:r>
+                    </a:p>
+                  </a:txBody>
+                  <a:tcPr marL="50800" marR="50800" marT="50800" marB="50800">
+                    <a:lnL w="6350" cmpd="sng">
+                      <a:solidFill>
+                        <a:srgbClr val="D9D3C4"/>
+                      </a:solidFill>
+                    </a:lnL>
+                    <a:lnR w="6350" cmpd="sng">
+                      <a:solidFill>
+                        <a:srgbClr val="D9D3C4"/>
+                      </a:solidFill>
+                    </a:lnR>
+                    <a:lnT w="6350" cmpd="sng">
+                      <a:solidFill>
+                        <a:srgbClr val="D9D3C4"/>
+                      </a:solidFill>
+                    </a:lnT>
+                    <a:lnB w="6350" cmpd="sng">
+                      <a:solidFill>
+                        <a:srgbClr val="D9D3C4"/>
+                      </a:solidFill>
+                    </a:lnB>
+                    <a:solidFill>
+                      <a:srgbClr val="0A1628"/>
+                    </a:solidFill>
+                  </a:tcPr>
+                </a:tc>
+                <a:tc>
+                  <a:txBody>
+                    <a:bodyPr/>
+                    <a:lstStyle/>
+                    <a:p>
+                      <a:r>
+                        <a:rPr sz="900" b="1">
+                          <a:solidFill>
+                            <a:srgbClr val="FFFFFF"/>
+                          </a:solidFill>
+                          <a:latin typeface="Calibri"/>
+                        </a:rPr>
+                        <a:t>Rating</a:t>
+                      </a:r>
+                    </a:p>
+                  </a:txBody>
+                  <a:tcPr marL="50800" marR="50800" marT="50800" marB="50800">
+                    <a:lnL w="6350" cmpd="sng">
+                      <a:solidFill>
+                        <a:srgbClr val="D9D3C4"/>
+                      </a:solidFill>
+                    </a:lnL>
+                    <a:lnR w="6350" cmpd="sng">
+                      <a:solidFill>
+                        <a:srgbClr val="D9D3C4"/>
+                      </a:solidFill>
+                    </a:lnR>
+                    <a:lnT w="6350" cmpd="sng">
+                      <a:solidFill>
+                        <a:srgbClr val="D9D3C4"/>
+                      </a:solidFill>
+                    </a:lnT>
+                    <a:lnB w="6350" cmpd="sng">
+                      <a:solidFill>
+                        <a:srgbClr val="D9D3C4"/>
+                      </a:solidFill>
+                    </a:lnB>
+                    <a:solidFill>
+                      <a:srgbClr val="0A1628"/>
+                    </a:solidFill>
+                  </a:tcPr>
+                </a:tc>
+              </a:tr>
+              <a:tr h="288000">
+                <a:tc>
+                  <a:txBody>
+                    <a:bodyPr/>
+                    <a:lstStyle/>
+                    <a:p>
+                      <a:r>
+                        <a:rPr sz="900" b="0">
+                          <a:solidFill>
+                            <a:srgbClr val="1B1F26"/>
+                          </a:solidFill>
+                          <a:latin typeface="Calibri"/>
+                        </a:rPr>
+                        <a:t>[A.5.15]</a:t>
+                      </a:r>
+                    </a:p>
+                  </a:txBody>
+                  <a:tcPr marL="50800" marR="50800" marT="50800" marB="50800">
+                    <a:lnL w="6350" cmpd="sng">
+                      <a:solidFill>
+                        <a:srgbClr val="D9D3C4"/>
+                      </a:solidFill>
+                    </a:lnL>
+                    <a:lnR w="6350" cmpd="sng">
+                      <a:solidFill>
+                        <a:srgbClr val="D9D3C4"/>
+                      </a:solidFill>
+                    </a:lnR>
+                    <a:lnT w="6350" cmpd="sng">
+                      <a:solidFill>
+                        <a:srgbClr val="D9D3C4"/>
+                      </a:solidFill>
+                    </a:lnT>
+                    <a:lnB w="6350" cmpd="sng">
+                      <a:solidFill>
+                        <a:srgbClr val="D9D3C4"/>
+                      </a:solidFill>
+                    </a:lnB>
+                    <a:solidFill>
+                      <a:srgbClr val="FFFFFF"/>
+                    </a:solidFill>
+                  </a:tcPr>
+                </a:tc>
+                <a:tc>
+                  <a:txBody>
+                    <a:bodyPr/>
+                    <a:lstStyle/>
+                    <a:p>
+                      <a:r>
+                        <a:rPr sz="900" b="0">
+                          <a:solidFill>
+                            <a:srgbClr val="1B1F26"/>
+                          </a:solidFill>
+                          <a:latin typeface="Calibri"/>
+                        </a:rPr>
+                        <a:t>[Requirement]</a:t>
+                      </a:r>
+                    </a:p>
+                  </a:txBody>
+                  <a:tcPr marL="50800" marR="50800" marT="50800" marB="50800">
+                    <a:lnL w="6350" cmpd="sng">
+                      <a:solidFill>
+                        <a:srgbClr val="D9D3C4"/>
+                      </a:solidFill>
+                    </a:lnL>
+                    <a:lnR w="6350" cmpd="sng">
+                      <a:solidFill>
+                        <a:srgbClr val="D9D3C4"/>
+                      </a:solidFill>
+                    </a:lnR>
+                    <a:lnT w="6350" cmpd="sng">
+                      <a:solidFill>
+                        <a:srgbClr val="D9D3C4"/>
+                      </a:solidFill>
+                    </a:lnT>
+                    <a:lnB w="6350" cmpd="sng">
+                      <a:solidFill>
+                        <a:srgbClr val="D9D3C4"/>
+                      </a:solidFill>
+                    </a:lnB>
+                    <a:solidFill>
+                      <a:srgbClr val="FFFFFF"/>
+                    </a:solidFill>
+                  </a:tcPr>
+                </a:tc>
+                <a:tc>
+                  <a:txBody>
+                    <a:bodyPr/>
+                    <a:lstStyle/>
+                    <a:p>
+                      <a:r>
+                        <a:rPr sz="900" b="0">
+                          <a:solidFill>
+                            <a:srgbClr val="1B1F26"/>
+                          </a:solidFill>
+                          <a:latin typeface="Calibri"/>
+                        </a:rPr>
+                        <a:t>[Observation]</a:t>
+                      </a:r>
+                    </a:p>
+                  </a:txBody>
+                  <a:tcPr marL="50800" marR="50800" marT="50800" marB="50800">
+                    <a:lnL w="6350" cmpd="sng">
+                      <a:solidFill>
+                        <a:srgbClr val="D9D3C4"/>
+                      </a:solidFill>
+                    </a:lnL>
+                    <a:lnR w="6350" cmpd="sng">
+                      <a:solidFill>
+                        <a:srgbClr val="D9D3C4"/>
+                      </a:solidFill>
+                    </a:lnR>
+                    <a:lnT w="6350" cmpd="sng">
+                      <a:solidFill>
+                        <a:srgbClr val="D9D3C4"/>
+                      </a:solidFill>
+                    </a:lnT>
+                    <a:lnB w="6350" cmpd="sng">
+                      <a:solidFill>
+                        <a:srgbClr val="D9D3C4"/>
+                      </a:solidFill>
+                    </a:lnB>
+                    <a:solidFill>
+                      <a:srgbClr val="FFFFFF"/>
+                    </a:solidFill>
+                  </a:tcPr>
+                </a:tc>
+                <a:tc>
+                  <a:txBody>
+                    <a:bodyPr/>
+                    <a:lstStyle/>
+                    <a:p>
+                      <a:r>
+                        <a:rPr sz="900" b="0">
+                          <a:solidFill>
+                            <a:srgbClr val="1B1F26"/>
+                          </a:solidFill>
+                          <a:latin typeface="Calibri"/>
+                        </a:rPr>
+                        <a:t>Met</a:t>
+                      </a:r>
+                    </a:p>
+                  </a:txBody>
+                  <a:tcPr marL="50800" marR="50800" marT="50800" marB="50800">
+                    <a:lnL w="6350" cmpd="sng">
+                      <a:solidFill>
+                        <a:srgbClr val="D9D3C4"/>
+                      </a:solidFill>
+                    </a:lnL>
+                    <a:lnR w="6350" cmpd="sng">
+                      <a:solidFill>
+                        <a:srgbClr val="D9D3C4"/>
+                      </a:solidFill>
+                    </a:lnR>
+                    <a:lnT w="6350" cmpd="sng">
+                      <a:solidFill>
+                        <a:srgbClr val="D9D3C4"/>
+                      </a:solidFill>
+                    </a:lnT>
+                    <a:lnB w="6350" cmpd="sng">
+                      <a:solidFill>
+                        <a:srgbClr val="D9D3C4"/>
+                      </a:solidFill>
+                    </a:lnB>
+                    <a:solidFill>
+                      <a:srgbClr val="C6EFCE"/>
+                    </a:solidFill>
+                  </a:tcPr>
+                </a:tc>
+              </a:tr>
+              <a:tr h="288000">
+                <a:tc>
+                  <a:txBody>
+                    <a:bodyPr/>
+                    <a:lstStyle/>
+                    <a:p>
+                      <a:r>
+                        <a:rPr sz="900" b="0">
+                          <a:solidFill>
+                            <a:srgbClr val="1B1F26"/>
+                          </a:solidFill>
+                          <a:latin typeface="Calibri"/>
+                        </a:rPr>
+                        <a:t>[A.8.13]</a:t>
+                      </a:r>
+                    </a:p>
+                  </a:txBody>
+                  <a:tcPr marL="50800" marR="50800" marT="50800" marB="50800">
+                    <a:lnL w="6350" cmpd="sng">
+                      <a:solidFill>
+                        <a:srgbClr val="D9D3C4"/>
+                      </a:solidFill>
+                    </a:lnL>
+                    <a:lnR w="6350" cmpd="sng">
+                      <a:solidFill>
+                        <a:srgbClr val="D9D3C4"/>
+                      </a:solidFill>
+                    </a:lnR>
+                    <a:lnT w="6350" cmpd="sng">
+                      <a:solidFill>
+                        <a:srgbClr val="D9D3C4"/>
+                      </a:solidFill>
+                    </a:lnT>
+                    <a:lnB w="6350" cmpd="sng">
+                      <a:solidFill>
+                        <a:srgbClr val="D9D3C4"/>
+                      </a:solidFill>
+                    </a:lnB>
+                    <a:solidFill>
+                      <a:srgbClr val="FFFFFF"/>
+                    </a:solidFill>
+                  </a:tcPr>
+                </a:tc>
+                <a:tc>
+                  <a:txBody>
+                    <a:bodyPr/>
+                    <a:lstStyle/>
+                    <a:p>
+                      <a:r>
+                        <a:rPr sz="900" b="0">
+                          <a:solidFill>
+                            <a:srgbClr val="1B1F26"/>
+                          </a:solidFill>
+                          <a:latin typeface="Calibri"/>
+                        </a:rPr>
+                        <a:t>[Requirement]</a:t>
+                      </a:r>
+                    </a:p>
+                  </a:txBody>
+                  <a:tcPr marL="50800" marR="50800" marT="50800" marB="50800">
+                    <a:lnL w="6350" cmpd="sng">
+                      <a:solidFill>
+                        <a:srgbClr val="D9D3C4"/>
+                      </a:solidFill>
+                    </a:lnL>
+                    <a:lnR w="6350" cmpd="sng">
+                      <a:solidFill>
+                        <a:srgbClr val="D9D3C4"/>
+                      </a:solidFill>
+                    </a:lnR>
+                    <a:lnT w="6350" cmpd="sng">
+                      <a:solidFill>
+                        <a:srgbClr val="D9D3C4"/>
+                      </a:solidFill>
+                    </a:lnT>
+                    <a:lnB w="6350" cmpd="sng">
+                      <a:solidFill>
+                        <a:srgbClr val="D9D3C4"/>
+                      </a:solidFill>
+                    </a:lnB>
+                    <a:solidFill>
+                      <a:srgbClr val="FFFFFF"/>
+                    </a:solidFill>
+                  </a:tcPr>
+                </a:tc>
+                <a:tc>
+                  <a:txBody>
+                    <a:bodyPr/>
+                    <a:lstStyle/>
+                    <a:p>
+                      <a:r>
+                        <a:rPr sz="900" b="0">
+                          <a:solidFill>
+                            <a:srgbClr val="1B1F26"/>
+                          </a:solidFill>
+                          <a:latin typeface="Calibri"/>
+                        </a:rPr>
+                        <a:t>[Observation]</a:t>
+                      </a:r>
+                    </a:p>
+                  </a:txBody>
+                  <a:tcPr marL="50800" marR="50800" marT="50800" marB="50800">
+                    <a:lnL w="6350" cmpd="sng">
+                      <a:solidFill>
+                        <a:srgbClr val="D9D3C4"/>
+                      </a:solidFill>
+                    </a:lnL>
+                    <a:lnR w="6350" cmpd="sng">
+                      <a:solidFill>
+                        <a:srgbClr val="D9D3C4"/>
+                      </a:solidFill>
+                    </a:lnR>
+                    <a:lnT w="6350" cmpd="sng">
+                      <a:solidFill>
+                        <a:srgbClr val="D9D3C4"/>
+                      </a:solidFill>
+                    </a:lnT>
+                    <a:lnB w="6350" cmpd="sng">
+                      <a:solidFill>
+                        <a:srgbClr val="D9D3C4"/>
+                      </a:solidFill>
+                    </a:lnB>
+                    <a:solidFill>
+                      <a:srgbClr val="FFFFFF"/>
+                    </a:solidFill>
+                  </a:tcPr>
+                </a:tc>
+                <a:tc>
+                  <a:txBody>
+                    <a:bodyPr/>
+                    <a:lstStyle/>
+                    <a:p>
+                      <a:r>
+                        <a:rPr sz="900" b="0">
+                          <a:solidFill>
+                            <a:srgbClr val="1B1F26"/>
+                          </a:solidFill>
+                          <a:latin typeface="Calibri"/>
+                        </a:rPr>
+                        <a:t>Partially met</a:t>
+                      </a:r>
+                    </a:p>
+                  </a:txBody>
+                  <a:tcPr marL="50800" marR="50800" marT="50800" marB="50800">
+                    <a:lnL w="6350" cmpd="sng">
+                      <a:solidFill>
+                        <a:srgbClr val="D9D3C4"/>
+                      </a:solidFill>
+                    </a:lnL>
+                    <a:lnR w="6350" cmpd="sng">
+                      <a:solidFill>
+                        <a:srgbClr val="D9D3C4"/>
+                      </a:solidFill>
+                    </a:lnR>
+                    <a:lnT w="6350" cmpd="sng">
+                      <a:solidFill>
+                        <a:srgbClr val="D9D3C4"/>
+                      </a:solidFill>
+                    </a:lnT>
+                    <a:lnB w="6350" cmpd="sng">
+                      <a:solidFill>
+                        <a:srgbClr val="D9D3C4"/>
+                      </a:solidFill>
+                    </a:lnB>
+                    <a:solidFill>
+                      <a:srgbClr val="FFEB9C"/>
+                    </a:solidFill>
+                  </a:tcPr>
+                </a:tc>
+              </a:tr>
+              <a:tr h="288000">
+                <a:tc>
+                  <a:txBody>
+                    <a:bodyPr/>
+                    <a:lstStyle/>
+                    <a:p>
+                      <a:r>
+                        <a:rPr sz="900" b="0">
+                          <a:solidFill>
+                            <a:srgbClr val="1B1F26"/>
+                          </a:solidFill>
+                          <a:latin typeface="Calibri"/>
+                        </a:rPr>
+                        <a:t>[A.5.24]</a:t>
+                      </a:r>
+                    </a:p>
+                  </a:txBody>
+                  <a:tcPr marL="50800" marR="50800" marT="50800" marB="50800">
+                    <a:lnL w="6350" cmpd="sng">
+                      <a:solidFill>
+                        <a:srgbClr val="D9D3C4"/>
+                      </a:solidFill>
+                    </a:lnL>
+                    <a:lnR w="6350" cmpd="sng">
+                      <a:solidFill>
+                        <a:srgbClr val="D9D3C4"/>
+                      </a:solidFill>
+                    </a:lnR>
+                    <a:lnT w="6350" cmpd="sng">
+                      <a:solidFill>
+                        <a:srgbClr val="D9D3C4"/>
+                      </a:solidFill>
+                    </a:lnT>
+                    <a:lnB w="6350" cmpd="sng">
+                      <a:solidFill>
+                        <a:srgbClr val="D9D3C4"/>
+                      </a:solidFill>
+                    </a:lnB>
+                    <a:solidFill>
+                      <a:srgbClr val="FFFFFF"/>
+                    </a:solidFill>
+                  </a:tcPr>
+                </a:tc>
+                <a:tc>
+                  <a:txBody>
+                    <a:bodyPr/>
+                    <a:lstStyle/>
+                    <a:p>
+                      <a:r>
+                        <a:rPr sz="900" b="0">
+                          <a:solidFill>
+                            <a:srgbClr val="1B1F26"/>
+                          </a:solidFill>
+                          <a:latin typeface="Calibri"/>
+                        </a:rPr>
+                        <a:t>[Requirement]</a:t>
+                      </a:r>
+                    </a:p>
+                  </a:txBody>
+                  <a:tcPr marL="50800" marR="50800" marT="50800" marB="50800">
+                    <a:lnL w="6350" cmpd="sng">
+                      <a:solidFill>
+                        <a:srgbClr val="D9D3C4"/>
+                      </a:solidFill>
+                    </a:lnL>
+                    <a:lnR w="6350" cmpd="sng">
+                      <a:solidFill>
+                        <a:srgbClr val="D9D3C4"/>
+                      </a:solidFill>
+                    </a:lnR>
+                    <a:lnT w="6350" cmpd="sng">
+                      <a:solidFill>
+                        <a:srgbClr val="D9D3C4"/>
+                      </a:solidFill>
+                    </a:lnT>
+                    <a:lnB w="6350" cmpd="sng">
+                      <a:solidFill>
+                        <a:srgbClr val="D9D3C4"/>
+                      </a:solidFill>
+                    </a:lnB>
+                    <a:solidFill>
+                      <a:srgbClr val="FFFFFF"/>
+                    </a:solidFill>
+                  </a:tcPr>
+                </a:tc>
+                <a:tc>
+                  <a:txBody>
+                    <a:bodyPr/>
+                    <a:lstStyle/>
+                    <a:p>
+                      <a:r>
+                        <a:rPr sz="900" b="0">
+                          <a:solidFill>
+                            <a:srgbClr val="1B1F26"/>
+                          </a:solidFill>
+                          <a:latin typeface="Calibri"/>
+                        </a:rPr>
+                        <a:t>[Observation]</a:t>
+                      </a:r>
+                    </a:p>
+                  </a:txBody>
+                  <a:tcPr marL="50800" marR="50800" marT="50800" marB="50800">
+                    <a:lnL w="6350" cmpd="sng">
+                      <a:solidFill>
+                        <a:srgbClr val="D9D3C4"/>
+                      </a:solidFill>
+                    </a:lnL>
+                    <a:lnR w="6350" cmpd="sng">
+                      <a:solidFill>
+                        <a:srgbClr val="D9D3C4"/>
+                      </a:solidFill>
+                    </a:lnR>
+                    <a:lnT w="6350" cmpd="sng">
+                      <a:solidFill>
+                        <a:srgbClr val="D9D3C4"/>
+                      </a:solidFill>
+                    </a:lnT>
+                    <a:lnB w="6350" cmpd="sng">
+                      <a:solidFill>
+                        <a:srgbClr val="D9D3C4"/>
+                      </a:solidFill>
+                    </a:lnB>
+                    <a:solidFill>
+                      <a:srgbClr val="FFFFFF"/>
+                    </a:solidFill>
+                  </a:tcPr>
+                </a:tc>
+                <a:tc>
+                  <a:txBody>
+                    <a:bodyPr/>
+                    <a:lstStyle/>
+                    <a:p>
+                      <a:r>
+                        <a:rPr sz="900" b="0">
+                          <a:solidFill>
+                            <a:srgbClr val="1B1F26"/>
+                          </a:solidFill>
+                          <a:latin typeface="Calibri"/>
+                        </a:rPr>
+                        <a:t>Not met</a:t>
+                      </a:r>
+                    </a:p>
+                  </a:txBody>
+                  <a:tcPr marL="50800" marR="50800" marT="50800" marB="50800">
+                    <a:lnL w="6350" cmpd="sng">
+                      <a:solidFill>
+                        <a:srgbClr val="D9D3C4"/>
+                      </a:solidFill>
+                    </a:lnL>
+                    <a:lnR w="6350" cmpd="sng">
+                      <a:solidFill>
+                        <a:srgbClr val="D9D3C4"/>
+                      </a:solidFill>
+                    </a:lnR>
+                    <a:lnT w="6350" cmpd="sng">
+                      <a:solidFill>
+                        <a:srgbClr val="D9D3C4"/>
+                      </a:solidFill>
+                    </a:lnT>
+                    <a:lnB w="6350" cmpd="sng">
+                      <a:solidFill>
+                        <a:srgbClr val="D9D3C4"/>
+                      </a:solidFill>
+                    </a:lnB>
+                    <a:solidFill>
+                      <a:srgbClr val="FFC7CE"/>
+                    </a:solidFill>
+                  </a:tcPr>
+                </a:tc>
+              </a:tr>
+              <a:tr h="288000">
+                <a:tc>
+                  <a:txBody>
+                    <a:bodyPr/>
+                    <a:lstStyle/>
+                    <a:p>
+                      <a:r>
+                        <a:rPr sz="900" b="0">
+                          <a:solidFill>
+                            <a:srgbClr val="1B1F26"/>
+                          </a:solidFill>
+                          <a:latin typeface="Calibri"/>
+                        </a:rPr>
+                        <a:t>[A.8.8]</a:t>
+                      </a:r>
+                    </a:p>
+                  </a:txBody>
+                  <a:tcPr marL="50800" marR="50800" marT="50800" marB="50800">
+                    <a:lnL w="6350" cmpd="sng">
+                      <a:solidFill>
+                        <a:srgbClr val="D9D3C4"/>
+                      </a:solidFill>
+                    </a:lnL>
+                    <a:lnR w="6350" cmpd="sng">
+                      <a:solidFill>
+                        <a:srgbClr val="D9D3C4"/>
+                      </a:solidFill>
+                    </a:lnR>
+                    <a:lnT w="6350" cmpd="sng">
+                      <a:solidFill>
+                        <a:srgbClr val="D9D3C4"/>
+                      </a:solidFill>
+                    </a:lnT>
+                    <a:lnB w="6350" cmpd="sng">
+                      <a:solidFill>
+                        <a:srgbClr val="D9D3C4"/>
+                      </a:solidFill>
+                    </a:lnB>
+                    <a:solidFill>
+                      <a:srgbClr val="FFFFFF"/>
+                    </a:solidFill>
+                  </a:tcPr>
+                </a:tc>
+                <a:tc>
+                  <a:txBody>
+                    <a:bodyPr/>
+                    <a:lstStyle/>
+                    <a:p>
+                      <a:r>
+                        <a:rPr sz="900" b="0">
+                          <a:solidFill>
+                            <a:srgbClr val="1B1F26"/>
+                          </a:solidFill>
+                          <a:latin typeface="Calibri"/>
+                        </a:rPr>
+                        <a:t>[Requirement]</a:t>
+                      </a:r>
+                    </a:p>
+                  </a:txBody>
+                  <a:tcPr marL="50800" marR="50800" marT="50800" marB="50800">
+                    <a:lnL w="6350" cmpd="sng">
+                      <a:solidFill>
+                        <a:srgbClr val="D9D3C4"/>
+                      </a:solidFill>
+                    </a:lnL>
+                    <a:lnR w="6350" cmpd="sng">
+                      <a:solidFill>
+                        <a:srgbClr val="D9D3C4"/>
+                      </a:solidFill>
+                    </a:lnR>
+                    <a:lnT w="6350" cmpd="sng">
+                      <a:solidFill>
+                        <a:srgbClr val="D9D3C4"/>
+                      </a:solidFill>
+                    </a:lnT>
+                    <a:lnB w="6350" cmpd="sng">
+                      <a:solidFill>
+                        <a:srgbClr val="D9D3C4"/>
+                      </a:solidFill>
+                    </a:lnB>
+                    <a:solidFill>
+                      <a:srgbClr val="FFFFFF"/>
+                    </a:solidFill>
+                  </a:tcPr>
+                </a:tc>
+                <a:tc>
+                  <a:txBody>
+                    <a:bodyPr/>
+                    <a:lstStyle/>
+                    <a:p>
+                      <a:r>
+                        <a:rPr sz="900" b="0">
+                          <a:solidFill>
+                            <a:srgbClr val="1B1F26"/>
+                          </a:solidFill>
+                          <a:latin typeface="Calibri"/>
+                        </a:rPr>
+                        <a:t>[Observation]</a:t>
+                      </a:r>
+                    </a:p>
+                  </a:txBody>
+                  <a:tcPr marL="50800" marR="50800" marT="50800" marB="50800">
+                    <a:lnL w="6350" cmpd="sng">
+                      <a:solidFill>
+                        <a:srgbClr val="D9D3C4"/>
+                      </a:solidFill>
+                    </a:lnL>
+                    <a:lnR w="6350" cmpd="sng">
+                      <a:solidFill>
+                        <a:srgbClr val="D9D3C4"/>
+                      </a:solidFill>
+                    </a:lnR>
+                    <a:lnT w="6350" cmpd="sng">
+                      <a:solidFill>
+                        <a:srgbClr val="D9D3C4"/>
+                      </a:solidFill>
+                    </a:lnT>
+                    <a:lnB w="6350" cmpd="sng">
+                      <a:solidFill>
+                        <a:srgbClr val="D9D3C4"/>
+                      </a:solidFill>
+                    </a:lnB>
+                    <a:solidFill>
+                      <a:srgbClr val="FFFFFF"/>
+                    </a:solidFill>
+                  </a:tcPr>
+                </a:tc>
+                <a:tc>
+                  <a:txBody>
+                    <a:bodyPr/>
+                    <a:lstStyle/>
+                    <a:p>
+                      <a:r>
+                        <a:rPr sz="900" b="0">
+                          <a:solidFill>
+                            <a:srgbClr val="1B1F26"/>
+                          </a:solidFill>
+                          <a:latin typeface="Calibri"/>
+                        </a:rPr>
+                        <a:t>Not assessed</a:t>
+                      </a:r>
+                    </a:p>
+                  </a:txBody>
+                  <a:tcPr marL="50800" marR="50800" marT="50800" marB="50800">
+                    <a:lnL w="6350" cmpd="sng">
+                      <a:solidFill>
+                        <a:srgbClr val="D9D3C4"/>
+                      </a:solidFill>
+                    </a:lnL>
+                    <a:lnR w="6350" cmpd="sng">
+                      <a:solidFill>
+                        <a:srgbClr val="D9D3C4"/>
+                      </a:solidFill>
+                    </a:lnR>
+                    <a:lnT w="6350" cmpd="sng">
+                      <a:solidFill>
+                        <a:srgbClr val="D9D3C4"/>
+                      </a:solidFill>
+                    </a:lnT>
+                    <a:lnB w="6350" cmpd="sng">
+                      <a:solidFill>
+                        <a:srgbClr val="D9D3C4"/>
+                      </a:solidFill>
+                    </a:lnB>
+                    <a:solidFill>
+                      <a:srgbClr val="E7E6E6"/>
+                    </a:solidFill>
+                  </a:tcPr>
+                </a:tc>
+              </a:tr>
+            </a:tbl>
+          </a:graphicData>
+        </a:graphic>
+      </p:graphicFrame>
+    </p:spTree>
   </p:cSld>
   <p:clrMapOvr>
     <a:masterClrMapping/>
@@ -3426,44 +6025,44 @@
         <a:sysClr val="window" lastClr="FFFFFF"/>
       </a:lt1>
       <a:dk2>
-        <a:srgbClr val="0E2841"/>
+        <a:srgbClr val="1F497D"/>
       </a:dk2>
       <a:lt2>
-        <a:srgbClr val="E8E8E8"/>
+        <a:srgbClr val="EEECE1"/>
       </a:lt2>
       <a:accent1>
-        <a:srgbClr val="156082"/>
+        <a:srgbClr val="4F81BD"/>
       </a:accent1>
       <a:accent2>
-        <a:srgbClr val="E97132"/>
+        <a:srgbClr val="C0504D"/>
       </a:accent2>
       <a:accent3>
-        <a:srgbClr val="196B24"/>
+        <a:srgbClr val="9BBB59"/>
       </a:accent3>
       <a:accent4>
-        <a:srgbClr val="0F9ED5"/>
+        <a:srgbClr val="8064A2"/>
       </a:accent4>
       <a:accent5>
-        <a:srgbClr val="A02B93"/>
+        <a:srgbClr val="4BACC6"/>
       </a:accent5>
       <a:accent6>
-        <a:srgbClr val="4EA72E"/>
+        <a:srgbClr val="F79646"/>
       </a:accent6>
       <a:hlink>
-        <a:srgbClr val="467886"/>
+        <a:srgbClr val="0000FF"/>
       </a:hlink>
       <a:folHlink>
-        <a:srgbClr val="96607D"/>
+        <a:srgbClr val="800080"/>
       </a:folHlink>
     </a:clrScheme>
     <a:fontScheme name="Office">
       <a:majorFont>
-        <a:latin typeface="Aptos Display" panose="02110004020202020204"/>
+        <a:latin typeface="Calibri"/>
         <a:ea typeface=""/>
         <a:cs typeface=""/>
-        <a:font script="Jpan" typeface="游ゴシック Light"/>
+        <a:font script="Jpan" typeface="ＭＳ Ｐゴシック"/>
         <a:font script="Hang" typeface="맑은 고딕"/>
-        <a:font script="Hans" typeface="等线 Light"/>
+        <a:font script="Hans" typeface="宋体"/>
         <a:font script="Hant" typeface="新細明體"/>
         <a:font script="Arab" typeface="Times New Roman"/>
         <a:font script="Hebr" typeface="Times New Roman"/>
@@ -3491,31 +6090,14 @@
         <a:font script="Viet" typeface="Times New Roman"/>
         <a:font script="Uigh" typeface="Microsoft Uighur"/>
         <a:font script="Geor" typeface="Sylfaen"/>
-        <a:font script="Armn" typeface="Arial"/>
-        <a:font script="Bugi" typeface="Leelawadee UI"/>
-        <a:font script="Bopo" typeface="Microsoft JhengHei"/>
-        <a:font script="Java" typeface="Javanese Text"/>
-        <a:font script="Lisu" typeface="Segoe UI"/>
-        <a:font script="Mymr" typeface="Myanmar Text"/>
-        <a:font script="Nkoo" typeface="Ebrima"/>
-        <a:font script="Olck" typeface="Nirmala UI"/>
-        <a:font script="Osma" typeface="Ebrima"/>
-        <a:font script="Phag" typeface="Phagspa"/>
-        <a:font script="Syrn" typeface="Estrangelo Edessa"/>
-        <a:font script="Syrj" typeface="Estrangelo Edessa"/>
-        <a:font script="Syre" typeface="Estrangelo Edessa"/>
-        <a:font script="Sora" typeface="Nirmala UI"/>
-        <a:font script="Tale" typeface="Microsoft Tai Le"/>
-        <a:font script="Talu" typeface="Microsoft New Tai Lue"/>
-        <a:font script="Tfng" typeface="Ebrima"/>
       </a:majorFont>
       <a:minorFont>
-        <a:latin typeface="Aptos" panose="02110004020202020204"/>
+        <a:latin typeface="Calibri"/>
         <a:ea typeface=""/>
         <a:cs typeface=""/>
-        <a:font script="Jpan" typeface="游ゴシック"/>
+        <a:font script="Jpan" typeface="ＭＳ Ｐゴシック"/>
         <a:font script="Hang" typeface="맑은 고딕"/>
-        <a:font script="Hans" typeface="等线"/>
+        <a:font script="Hans" typeface="宋体"/>
         <a:font script="Hant" typeface="新細明體"/>
         <a:font script="Arab" typeface="Arial"/>
         <a:font script="Hebr" typeface="Arial"/>
@@ -3543,23 +6125,6 @@
         <a:font script="Viet" typeface="Arial"/>
         <a:font script="Uigh" typeface="Microsoft Uighur"/>
         <a:font script="Geor" typeface="Sylfaen"/>
-        <a:font script="Armn" typeface="Arial"/>
-        <a:font script="Bugi" typeface="Leelawadee UI"/>
-        <a:font script="Bopo" typeface="Microsoft JhengHei"/>
-        <a:font script="Java" typeface="Javanese Text"/>
-        <a:font script="Lisu" typeface="Segoe UI"/>
-        <a:font script="Mymr" typeface="Myanmar Text"/>
-        <a:font script="Nkoo" typeface="Ebrima"/>
-        <a:font script="Olck" typeface="Nirmala UI"/>
-        <a:font script="Osma" typeface="Ebrima"/>
-        <a:font script="Phag" typeface="Phagspa"/>
-        <a:font script="Syrn" typeface="Estrangelo Edessa"/>
-        <a:font script="Syrj" typeface="Estrangelo Edessa"/>
-        <a:font script="Syre" typeface="Estrangelo Edessa"/>
-        <a:font script="Sora" typeface="Nirmala UI"/>
-        <a:font script="Tale" typeface="Microsoft Tai Le"/>
-        <a:font script="Talu" typeface="Microsoft New Tai Lue"/>
-        <a:font script="Tfng" typeface="Ebrima"/>
       </a:minorFont>
     </a:fontScheme>
     <a:fmtScheme name="Office">
@@ -3571,136 +6136,180 @@
           <a:gsLst>
             <a:gs pos="0">
               <a:schemeClr val="phClr">
-                <a:lumMod val="110000"/>
-                <a:satMod val="105000"/>
-                <a:tint val="67000"/>
+                <a:tint val="50000"/>
+                <a:satMod val="300000"/>
               </a:schemeClr>
             </a:gs>
-            <a:gs pos="50000">
+            <a:gs pos="35000">
               <a:schemeClr val="phClr">
-                <a:lumMod val="105000"/>
-                <a:satMod val="103000"/>
-                <a:tint val="73000"/>
+                <a:tint val="37000"/>
+                <a:satMod val="300000"/>
               </a:schemeClr>
             </a:gs>
             <a:gs pos="100000">
               <a:schemeClr val="phClr">
-                <a:lumMod val="105000"/>
-                <a:satMod val="109000"/>
-                <a:tint val="81000"/>
+                <a:tint val="15000"/>
+                <a:satMod val="350000"/>
               </a:schemeClr>
             </a:gs>
           </a:gsLst>
-          <a:lin ang="5400000" scaled="0"/>
+          <a:lin ang="16200000" scaled="1"/>
         </a:gradFill>
         <a:gradFill rotWithShape="1">
           <a:gsLst>
             <a:gs pos="0">
               <a:schemeClr val="phClr">
-                <a:satMod val="103000"/>
-                <a:lumMod val="102000"/>
-                <a:tint val="94000"/>
-              </a:schemeClr>
-            </a:gs>
-            <a:gs pos="50000">
-              <a:schemeClr val="phClr">
-                <a:satMod val="110000"/>
-                <a:lumMod val="100000"/>
+                <a:tint val="100000"/>
                 <a:shade val="100000"/>
+                <a:satMod val="130000"/>
               </a:schemeClr>
             </a:gs>
             <a:gs pos="100000">
               <a:schemeClr val="phClr">
-                <a:lumMod val="99000"/>
-                <a:satMod val="120000"/>
-                <a:shade val="78000"/>
+                <a:tint val="50000"/>
+                <a:shade val="100000"/>
+                <a:satMod val="350000"/>
               </a:schemeClr>
             </a:gs>
           </a:gsLst>
-          <a:lin ang="5400000" scaled="0"/>
+          <a:lin ang="16200000" scaled="0"/>
         </a:gradFill>
       </a:fillStyleLst>
       <a:lnStyleLst>
-        <a:ln w="12700" cap="flat" cmpd="sng" algn="ctr">
+        <a:ln w="9525" cap="flat" cmpd="sng" algn="ctr">
           <a:solidFill>
-            <a:schemeClr val="phClr"/>
+            <a:schemeClr val="phClr">
+              <a:shade val="95000"/>
+              <a:satMod val="105000"/>
+            </a:schemeClr>
           </a:solidFill>
           <a:prstDash val="solid"/>
-          <a:miter lim="800000"/>
-        </a:ln>
-        <a:ln w="19050" cap="flat" cmpd="sng" algn="ctr">
-          <a:solidFill>
-            <a:schemeClr val="phClr"/>
-          </a:solidFill>
-          <a:prstDash val="solid"/>
-          <a:miter lim="800000"/>
         </a:ln>
         <a:ln w="25400" cap="flat" cmpd="sng" algn="ctr">
           <a:solidFill>
             <a:schemeClr val="phClr"/>
           </a:solidFill>
           <a:prstDash val="solid"/>
-          <a:miter lim="800000"/>
+        </a:ln>
+        <a:ln w="38100" cap="flat" cmpd="sng" algn="ctr">
+          <a:solidFill>
+            <a:schemeClr val="phClr"/>
+          </a:solidFill>
+          <a:prstDash val="solid"/>
         </a:ln>
       </a:lnStyleLst>
       <a:effectStyleLst>
         <a:effectStyle>
-          <a:effectLst/>
-        </a:effectStyle>
-        <a:effectStyle>
-          <a:effectLst/>
+          <a:effectLst>
+            <a:outerShdw blurRad="40000" dist="20000" dir="5400000" rotWithShape="0">
+              <a:srgbClr val="000000">
+                <a:alpha val="38000"/>
+              </a:srgbClr>
+            </a:outerShdw>
+          </a:effectLst>
         </a:effectStyle>
         <a:effectStyle>
           <a:effectLst>
-            <a:outerShdw blurRad="57150" dist="19050" dir="5400000" algn="ctr" rotWithShape="0">
+            <a:outerShdw blurRad="40000" dist="23000" dir="5400000" rotWithShape="0">
               <a:srgbClr val="000000">
-                <a:alpha val="63000"/>
+                <a:alpha val="35000"/>
               </a:srgbClr>
             </a:outerShdw>
           </a:effectLst>
+        </a:effectStyle>
+        <a:effectStyle>
+          <a:effectLst>
+            <a:outerShdw blurRad="40000" dist="23000" dir="5400000" rotWithShape="0">
+              <a:srgbClr val="000000">
+                <a:alpha val="35000"/>
+              </a:srgbClr>
+            </a:outerShdw>
+          </a:effectLst>
+          <a:scene3d>
+            <a:camera prst="orthographicFront">
+              <a:rot lat="0" lon="0" rev="0"/>
+            </a:camera>
+            <a:lightRig rig="threePt" dir="t">
+              <a:rot lat="0" lon="0" rev="1200000"/>
+            </a:lightRig>
+          </a:scene3d>
+          <a:sp3d>
+            <a:bevelT w="63500" h="25400"/>
+          </a:sp3d>
         </a:effectStyle>
       </a:effectStyleLst>
       <a:bgFillStyleLst>
         <a:solidFill>
           <a:schemeClr val="phClr"/>
         </a:solidFill>
-        <a:solidFill>
-          <a:schemeClr val="phClr">
-            <a:tint val="95000"/>
-            <a:satMod val="170000"/>
-          </a:schemeClr>
-        </a:solidFill>
         <a:gradFill rotWithShape="1">
           <a:gsLst>
             <a:gs pos="0">
               <a:schemeClr val="phClr">
-                <a:tint val="93000"/>
-                <a:satMod val="150000"/>
-                <a:shade val="98000"/>
-                <a:lumMod val="102000"/>
+                <a:tint val="40000"/>
+                <a:satMod val="350000"/>
               </a:schemeClr>
             </a:gs>
-            <a:gs pos="50000">
+            <a:gs pos="40000">
               <a:schemeClr val="phClr">
-                <a:tint val="98000"/>
-                <a:satMod val="130000"/>
-                <a:shade val="90000"/>
-                <a:lumMod val="103000"/>
+                <a:tint val="45000"/>
+                <a:shade val="99000"/>
+                <a:satMod val="350000"/>
               </a:schemeClr>
             </a:gs>
             <a:gs pos="100000">
               <a:schemeClr val="phClr">
-                <a:shade val="63000"/>
-                <a:satMod val="120000"/>
+                <a:shade val="20000"/>
+                <a:satMod val="255000"/>
               </a:schemeClr>
             </a:gs>
           </a:gsLst>
-          <a:lin ang="5400000" scaled="0"/>
+          <a:path path="circle">
+            <a:fillToRect l="50000" t="-80000" r="50000" b="180000"/>
+          </a:path>
+        </a:gradFill>
+        <a:gradFill rotWithShape="1">
+          <a:gsLst>
+            <a:gs pos="0">
+              <a:schemeClr val="phClr">
+                <a:tint val="80000"/>
+                <a:satMod val="300000"/>
+              </a:schemeClr>
+            </a:gs>
+            <a:gs pos="100000">
+              <a:schemeClr val="phClr">
+                <a:shade val="30000"/>
+                <a:satMod val="200000"/>
+              </a:schemeClr>
+            </a:gs>
+          </a:gsLst>
+          <a:path path="circle">
+            <a:fillToRect l="50000" t="50000" r="50000" b="50000"/>
+          </a:path>
         </a:gradFill>
       </a:bgFillStyleLst>
     </a:fmtScheme>
   </a:themeElements>
   <a:objectDefaults>
+    <a:spDef>
+      <a:spPr/>
+      <a:bodyPr/>
+      <a:lstStyle/>
+      <a:style>
+        <a:lnRef idx="1">
+          <a:schemeClr val="accent1"/>
+        </a:lnRef>
+        <a:fillRef idx="3">
+          <a:schemeClr val="accent1"/>
+        </a:fillRef>
+        <a:effectRef idx="2">
+          <a:schemeClr val="accent1"/>
+        </a:effectRef>
+        <a:fontRef idx="minor">
+          <a:schemeClr val="lt1"/>
+        </a:fontRef>
+      </a:style>
+    </a:spDef>
     <a:lnDef>
       <a:spPr/>
       <a:bodyPr/>
@@ -3722,10 +6331,5 @@
     </a:lnDef>
   </a:objectDefaults>
   <a:extraClrSchemeLst/>
-  <a:extLst>
-    <a:ext uri="{05A4C25C-085E-4340-85A3-A5531E510DB2}">
-      <thm15:themeFamily xmlns:thm15="http://schemas.microsoft.com/office/thememl/2012/main" name="Office Theme" id="{2E142A2C-CD16-42D6-873A-C26D2A0506FA}" vid="{1BDDFF52-6CD6-40A5-AB3C-68EB2F1E4D0A}"/>
-    </a:ext>
-  </a:extLst>
 </a:theme>
 </file>